--- a/MATTEL_DO_BRASIL_LTDA.pptx
+++ b/MATTEL_DO_BRASIL_LTDA.pptx
@@ -161,10 +161,10 @@
                 <c:formatCode>General</c:formatCode>
                 <c:ptCount val="2"/>
                 <c:pt idx="0">
-                  <c:v>142</c:v>
+                  <c:v>31</c:v>
                 </c:pt>
                 <c:pt idx="1">
-                  <c:v>92</c:v>
+                  <c:v>87</c:v>
                 </c:pt>
               </c:numCache>
             </c:numRef>
@@ -3687,7 +3687,7 @@
         <p:spPr>
           <a:xfrm>
             <a:off x="1005840" y="2240279"/>
-            <a:ext cx="2377439" cy="891540"/>
+            <a:ext cx="2377440" cy="868680"/>
           </a:xfrm>
           <a:prstGeom prst="rect">
             <a:avLst/>
@@ -3708,7 +3708,7 @@
                 </a:solidFill>
                 <a:latin typeface="Calibri"/>
               </a:rPr>
-              <a:t>92</a:t>
+              <a:t>87</a:t>
             </a:r>
           </a:p>
         </p:txBody>
@@ -3721,8 +3721,8 @@
         </p:nvSpPr>
         <p:spPr>
           <a:xfrm>
-            <a:off x="1005840" y="3058668"/>
-            <a:ext cx="2377439" cy="548640"/>
+            <a:off x="1005840" y="3090672"/>
+            <a:ext cx="2377440" cy="411480"/>
           </a:xfrm>
           <a:prstGeom prst="rect">
             <a:avLst/>
@@ -3802,7 +3802,7 @@
         <p:spPr>
           <a:xfrm>
             <a:off x="3931920" y="2240279"/>
-            <a:ext cx="2377439" cy="891540"/>
+            <a:ext cx="2377440" cy="868680"/>
           </a:xfrm>
           <a:prstGeom prst="rect">
             <a:avLst/>
@@ -3823,7 +3823,7 @@
                 </a:solidFill>
                 <a:latin typeface="Calibri"/>
               </a:rPr>
-              <a:t>92</a:t>
+              <a:t>87</a:t>
             </a:r>
           </a:p>
         </p:txBody>
@@ -3836,8 +3836,8 @@
         </p:nvSpPr>
         <p:spPr>
           <a:xfrm>
-            <a:off x="3931920" y="3058668"/>
-            <a:ext cx="2377439" cy="548640"/>
+            <a:off x="3931920" y="3090672"/>
+            <a:ext cx="2377440" cy="411480"/>
           </a:xfrm>
           <a:prstGeom prst="rect">
             <a:avLst/>
@@ -3917,7 +3917,7 @@
         <p:spPr>
           <a:xfrm>
             <a:off x="6858000" y="2240279"/>
-            <a:ext cx="2377439" cy="891540"/>
+            <a:ext cx="2377440" cy="868680"/>
           </a:xfrm>
           <a:prstGeom prst="rect">
             <a:avLst/>
@@ -3951,8 +3951,8 @@
         </p:nvSpPr>
         <p:spPr>
           <a:xfrm>
-            <a:off x="6858000" y="3058668"/>
-            <a:ext cx="2377439" cy="548640"/>
+            <a:off x="6858000" y="3090672"/>
+            <a:ext cx="2377440" cy="411480"/>
           </a:xfrm>
           <a:prstGeom prst="rect">
             <a:avLst/>
@@ -4032,7 +4032,7 @@
         <p:spPr>
           <a:xfrm>
             <a:off x="9784080" y="2240279"/>
-            <a:ext cx="2377439" cy="891540"/>
+            <a:ext cx="2377440" cy="868680"/>
           </a:xfrm>
           <a:prstGeom prst="rect">
             <a:avLst/>
@@ -4066,8 +4066,8 @@
         </p:nvSpPr>
         <p:spPr>
           <a:xfrm>
-            <a:off x="9784080" y="3058668"/>
-            <a:ext cx="2377439" cy="548640"/>
+            <a:off x="9784080" y="3090672"/>
+            <a:ext cx="2377440" cy="411480"/>
           </a:xfrm>
           <a:prstGeom prst="rect">
             <a:avLst/>
@@ -4120,7 +4120,7 @@
               <a:tr h="475488">
                 <a:tc>
                   <a:txBody>
-                    <a:bodyPr wrap="square"/>
+                    <a:bodyPr/>
                     <a:lstStyle/>
                     <a:p>
                       <a:pPr algn="ctr"/>
@@ -4143,7 +4143,7 @@
                 </a:tc>
                 <a:tc>
                   <a:txBody>
-                    <a:bodyPr wrap="square"/>
+                    <a:bodyPr/>
                     <a:lstStyle/>
                     <a:p>
                       <a:pPr algn="ctr"/>
@@ -4166,7 +4166,7 @@
                 </a:tc>
                 <a:tc>
                   <a:txBody>
-                    <a:bodyPr wrap="square"/>
+                    <a:bodyPr/>
                     <a:lstStyle/>
                     <a:p>
                       <a:pPr algn="ctr"/>
@@ -4189,7 +4189,7 @@
                 </a:tc>
                 <a:tc>
                   <a:txBody>
-                    <a:bodyPr wrap="square"/>
+                    <a:bodyPr/>
                     <a:lstStyle/>
                     <a:p>
                       <a:pPr algn="ctr"/>
@@ -4214,18 +4214,18 @@
               <a:tr h="475488">
                 <a:tc>
                   <a:txBody>
-                    <a:bodyPr wrap="square"/>
-                    <a:lstStyle/>
-                    <a:p>
-                      <a:pPr algn="l"/>
-                      <a:r>
-                        <a:rPr sz="1000" b="0">
-                          <a:solidFill>
-                            <a:srgbClr val="1D1B43"/>
-                          </a:solidFill>
-                          <a:latin typeface="Calibri"/>
-                        </a:rPr>
-                        <a:t>Total Entregas</a:t>
+                    <a:bodyPr/>
+                    <a:lstStyle/>
+                    <a:p>
+                      <a:pPr algn="l"/>
+                      <a:r>
+                        <a:rPr sz="1000" b="0">
+                          <a:solidFill>
+                            <a:srgbClr val="1D1B43"/>
+                          </a:solidFill>
+                          <a:latin typeface="Calibri"/>
+                        </a:rPr>
+                        <a:t>Total</a:t>
                       </a:r>
                     </a:p>
                   </a:txBody>
@@ -4237,18 +4237,18 @@
                 </a:tc>
                 <a:tc>
                   <a:txBody>
-                    <a:bodyPr wrap="square"/>
-                    <a:lstStyle/>
-                    <a:p>
-                      <a:pPr algn="l"/>
-                      <a:r>
-                        <a:rPr sz="1000" b="0">
-                          <a:solidFill>
-                            <a:srgbClr val="1D1B43"/>
-                          </a:solidFill>
-                          <a:latin typeface="Calibri"/>
-                        </a:rPr>
-                        <a:t>142</a:t>
+                    <a:bodyPr/>
+                    <a:lstStyle/>
+                    <a:p>
+                      <a:pPr algn="l"/>
+                      <a:r>
+                        <a:rPr sz="1000" b="0">
+                          <a:solidFill>
+                            <a:srgbClr val="1D1B43"/>
+                          </a:solidFill>
+                          <a:latin typeface="Calibri"/>
+                        </a:rPr>
+                        <a:t>31</a:t>
                       </a:r>
                     </a:p>
                   </a:txBody>
@@ -4260,18 +4260,18 @@
                 </a:tc>
                 <a:tc>
                   <a:txBody>
-                    <a:bodyPr wrap="square"/>
-                    <a:lstStyle/>
-                    <a:p>
-                      <a:pPr algn="l"/>
-                      <a:r>
-                        <a:rPr sz="1000" b="0">
-                          <a:solidFill>
-                            <a:srgbClr val="1D1B43"/>
-                          </a:solidFill>
-                          <a:latin typeface="Calibri"/>
-                        </a:rPr>
-                        <a:t>92</a:t>
+                    <a:bodyPr/>
+                    <a:lstStyle/>
+                    <a:p>
+                      <a:pPr algn="l"/>
+                      <a:r>
+                        <a:rPr sz="1000" b="0">
+                          <a:solidFill>
+                            <a:srgbClr val="1D1B43"/>
+                          </a:solidFill>
+                          <a:latin typeface="Calibri"/>
+                        </a:rPr>
+                        <a:t>87</a:t>
                       </a:r>
                     </a:p>
                   </a:txBody>
@@ -4283,18 +4283,18 @@
                 </a:tc>
                 <a:tc>
                   <a:txBody>
-                    <a:bodyPr wrap="square"/>
-                    <a:lstStyle/>
-                    <a:p>
-                      <a:pPr algn="l"/>
-                      <a:r>
-                        <a:rPr sz="1000" b="0">
-                          <a:solidFill>
-                            <a:srgbClr val="1D1B43"/>
-                          </a:solidFill>
-                          <a:latin typeface="Calibri"/>
-                        </a:rPr>
-                        <a:t>- 50</a:t>
+                    <a:bodyPr/>
+                    <a:lstStyle/>
+                    <a:p>
+                      <a:pPr algn="l"/>
+                      <a:r>
+                        <a:rPr sz="1000" b="0">
+                          <a:solidFill>
+                            <a:srgbClr val="1D1B43"/>
+                          </a:solidFill>
+                          <a:latin typeface="Calibri"/>
+                        </a:rPr>
+                        <a:t>+ 56</a:t>
                       </a:r>
                     </a:p>
                   </a:txBody>
@@ -4308,7 +4308,7 @@
               <a:tr h="475488">
                 <a:tc>
                   <a:txBody>
-                    <a:bodyPr wrap="square"/>
+                    <a:bodyPr/>
                     <a:lstStyle/>
                     <a:p>
                       <a:pPr algn="l"/>
@@ -4331,18 +4331,18 @@
                 </a:tc>
                 <a:tc>
                   <a:txBody>
-                    <a:bodyPr wrap="square"/>
-                    <a:lstStyle/>
-                    <a:p>
-                      <a:pPr algn="l"/>
-                      <a:r>
-                        <a:rPr sz="1000" b="0">
-                          <a:solidFill>
-                            <a:srgbClr val="1D1B43"/>
-                          </a:solidFill>
-                          <a:latin typeface="Calibri"/>
-                        </a:rPr>
-                        <a:t>142</a:t>
+                    <a:bodyPr/>
+                    <a:lstStyle/>
+                    <a:p>
+                      <a:pPr algn="l"/>
+                      <a:r>
+                        <a:rPr sz="1000" b="0">
+                          <a:solidFill>
+                            <a:srgbClr val="1D1B43"/>
+                          </a:solidFill>
+                          <a:latin typeface="Calibri"/>
+                        </a:rPr>
+                        <a:t>31</a:t>
                       </a:r>
                     </a:p>
                   </a:txBody>
@@ -4354,18 +4354,18 @@
                 </a:tc>
                 <a:tc>
                   <a:txBody>
-                    <a:bodyPr wrap="square"/>
-                    <a:lstStyle/>
-                    <a:p>
-                      <a:pPr algn="l"/>
-                      <a:r>
-                        <a:rPr sz="1000" b="0">
-                          <a:solidFill>
-                            <a:srgbClr val="1D1B43"/>
-                          </a:solidFill>
-                          <a:latin typeface="Calibri"/>
-                        </a:rPr>
-                        <a:t>92</a:t>
+                    <a:bodyPr/>
+                    <a:lstStyle/>
+                    <a:p>
+                      <a:pPr algn="l"/>
+                      <a:r>
+                        <a:rPr sz="1000" b="0">
+                          <a:solidFill>
+                            <a:srgbClr val="1D1B43"/>
+                          </a:solidFill>
+                          <a:latin typeface="Calibri"/>
+                        </a:rPr>
+                        <a:t>87</a:t>
                       </a:r>
                     </a:p>
                   </a:txBody>
@@ -4377,18 +4377,18 @@
                 </a:tc>
                 <a:tc>
                   <a:txBody>
-                    <a:bodyPr wrap="square"/>
-                    <a:lstStyle/>
-                    <a:p>
-                      <a:pPr algn="l"/>
-                      <a:r>
-                        <a:rPr sz="1000" b="0">
-                          <a:solidFill>
-                            <a:srgbClr val="1D1B43"/>
-                          </a:solidFill>
-                          <a:latin typeface="Calibri"/>
-                        </a:rPr>
-                        <a:t>- 50</a:t>
+                    <a:bodyPr/>
+                    <a:lstStyle/>
+                    <a:p>
+                      <a:pPr algn="l"/>
+                      <a:r>
+                        <a:rPr sz="1000" b="0">
+                          <a:solidFill>
+                            <a:srgbClr val="1D1B43"/>
+                          </a:solidFill>
+                          <a:latin typeface="Calibri"/>
+                        </a:rPr>
+                        <a:t>+ 56</a:t>
                       </a:r>
                     </a:p>
                   </a:txBody>
@@ -4402,18 +4402,18 @@
               <a:tr h="475488">
                 <a:tc>
                   <a:txBody>
-                    <a:bodyPr wrap="square"/>
-                    <a:lstStyle/>
-                    <a:p>
-                      <a:pPr algn="l"/>
-                      <a:r>
-                        <a:rPr sz="1000" b="0">
-                          <a:solidFill>
-                            <a:srgbClr val="1D1B43"/>
-                          </a:solidFill>
-                          <a:latin typeface="Calibri"/>
-                        </a:rPr>
-                        <a:t>Fora do Prazo</a:t>
+                    <a:bodyPr/>
+                    <a:lstStyle/>
+                    <a:p>
+                      <a:pPr algn="l"/>
+                      <a:r>
+                        <a:rPr sz="1000" b="0">
+                          <a:solidFill>
+                            <a:srgbClr val="1D1B43"/>
+                          </a:solidFill>
+                          <a:latin typeface="Calibri"/>
+                        </a:rPr>
+                        <a:t>Fora Prazo</a:t>
                       </a:r>
                     </a:p>
                   </a:txBody>
@@ -4425,7 +4425,7 @@
                 </a:tc>
                 <a:tc>
                   <a:txBody>
-                    <a:bodyPr wrap="square"/>
+                    <a:bodyPr/>
                     <a:lstStyle/>
                     <a:p>
                       <a:pPr algn="l"/>
@@ -4448,7 +4448,7 @@
                 </a:tc>
                 <a:tc>
                   <a:txBody>
-                    <a:bodyPr wrap="square"/>
+                    <a:bodyPr/>
                     <a:lstStyle/>
                     <a:p>
                       <a:pPr algn="l"/>
@@ -4471,7 +4471,7 @@
                 </a:tc>
                 <a:tc>
                   <a:txBody>
-                    <a:bodyPr wrap="square"/>
+                    <a:bodyPr/>
                     <a:lstStyle/>
                     <a:p>
                       <a:pPr algn="l"/>
@@ -4496,7 +4496,7 @@
               <a:tr h="475488">
                 <a:tc>
                   <a:txBody>
-                    <a:bodyPr wrap="square"/>
+                    <a:bodyPr/>
                     <a:lstStyle/>
                     <a:p>
                       <a:pPr algn="l"/>
@@ -4519,7 +4519,7 @@
                 </a:tc>
                 <a:tc>
                   <a:txBody>
-                    <a:bodyPr wrap="square"/>
+                    <a:bodyPr/>
                     <a:lstStyle/>
                     <a:p>
                       <a:pPr algn="l"/>
@@ -4542,7 +4542,7 @@
                 </a:tc>
                 <a:tc>
                   <a:txBody>
-                    <a:bodyPr wrap="square"/>
+                    <a:bodyPr/>
                     <a:lstStyle/>
                     <a:p>
                       <a:pPr algn="l"/>
@@ -4565,7 +4565,7 @@
                 </a:tc>
                 <a:tc>
                   <a:txBody>
-                    <a:bodyPr wrap="square"/>
+                    <a:bodyPr/>
                     <a:lstStyle/>
                     <a:p>
                       <a:pPr algn="l"/>
@@ -4765,7 +4765,7 @@
               <a:tr h="438912">
                 <a:tc>
                   <a:txBody>
-                    <a:bodyPr wrap="square"/>
+                    <a:bodyPr/>
                     <a:lstStyle/>
                     <a:p>
                       <a:pPr algn="ctr"/>
@@ -4788,7 +4788,7 @@
                 </a:tc>
                 <a:tc>
                   <a:txBody>
-                    <a:bodyPr wrap="square"/>
+                    <a:bodyPr/>
                     <a:lstStyle/>
                     <a:p>
                       <a:pPr algn="ctr"/>
@@ -4811,7 +4811,7 @@
                 </a:tc>
                 <a:tc>
                   <a:txBody>
-                    <a:bodyPr wrap="square"/>
+                    <a:bodyPr/>
                     <a:lstStyle/>
                     <a:p>
                       <a:pPr algn="ctr"/>
@@ -4834,7 +4834,7 @@
                 </a:tc>
                 <a:tc>
                   <a:txBody>
-                    <a:bodyPr wrap="square"/>
+                    <a:bodyPr/>
                     <a:lstStyle/>
                     <a:p>
                       <a:pPr algn="ctr"/>
@@ -4857,7 +4857,7 @@
                 </a:tc>
                 <a:tc>
                   <a:txBody>
-                    <a:bodyPr wrap="square"/>
+                    <a:bodyPr/>
                     <a:lstStyle/>
                     <a:p>
                       <a:pPr algn="ctr"/>
@@ -4882,7 +4882,7 @@
               <a:tr h="438912">
                 <a:tc>
                   <a:txBody>
-                    <a:bodyPr wrap="square"/>
+                    <a:bodyPr/>
                     <a:lstStyle/>
                     <a:p>
                       <a:pPr algn="l"/>
@@ -4905,18 +4905,18 @@
                 </a:tc>
                 <a:tc>
                   <a:txBody>
-                    <a:bodyPr wrap="square"/>
-                    <a:lstStyle/>
-                    <a:p>
-                      <a:pPr algn="l"/>
-                      <a:r>
-                        <a:rPr sz="1000" b="0">
-                          <a:solidFill>
-                            <a:srgbClr val="1D1B43"/>
-                          </a:solidFill>
-                          <a:latin typeface="Calibri"/>
-                        </a:rPr>
-                        <a:t>142</a:t>
+                    <a:bodyPr/>
+                    <a:lstStyle/>
+                    <a:p>
+                      <a:pPr algn="l"/>
+                      <a:r>
+                        <a:rPr sz="1000" b="0">
+                          <a:solidFill>
+                            <a:srgbClr val="1D1B43"/>
+                          </a:solidFill>
+                          <a:latin typeface="Calibri"/>
+                        </a:rPr>
+                        <a:t>31</a:t>
                       </a:r>
                     </a:p>
                   </a:txBody>
@@ -4928,18 +4928,18 @@
                 </a:tc>
                 <a:tc>
                   <a:txBody>
-                    <a:bodyPr wrap="square"/>
-                    <a:lstStyle/>
-                    <a:p>
-                      <a:pPr algn="l"/>
-                      <a:r>
-                        <a:rPr sz="1000" b="0">
-                          <a:solidFill>
-                            <a:srgbClr val="1D1B43"/>
-                          </a:solidFill>
-                          <a:latin typeface="Calibri"/>
-                        </a:rPr>
-                        <a:t>142</a:t>
+                    <a:bodyPr/>
+                    <a:lstStyle/>
+                    <a:p>
+                      <a:pPr algn="l"/>
+                      <a:r>
+                        <a:rPr sz="1000" b="0">
+                          <a:solidFill>
+                            <a:srgbClr val="1D1B43"/>
+                          </a:solidFill>
+                          <a:latin typeface="Calibri"/>
+                        </a:rPr>
+                        <a:t>31</a:t>
                       </a:r>
                     </a:p>
                   </a:txBody>
@@ -4951,7 +4951,7 @@
                 </a:tc>
                 <a:tc>
                   <a:txBody>
-                    <a:bodyPr wrap="square"/>
+                    <a:bodyPr/>
                     <a:lstStyle/>
                     <a:p>
                       <a:pPr algn="l"/>
@@ -4974,7 +4974,7 @@
                 </a:tc>
                 <a:tc>
                   <a:txBody>
-                    <a:bodyPr wrap="square"/>
+                    <a:bodyPr/>
                     <a:lstStyle/>
                     <a:p>
                       <a:pPr algn="l"/>
@@ -4999,7 +4999,7 @@
               <a:tr h="438912">
                 <a:tc>
                   <a:txBody>
-                    <a:bodyPr wrap="square"/>
+                    <a:bodyPr/>
                     <a:lstStyle/>
                     <a:p>
                       <a:pPr algn="l"/>
@@ -5022,18 +5022,18 @@
                 </a:tc>
                 <a:tc>
                   <a:txBody>
-                    <a:bodyPr wrap="square"/>
-                    <a:lstStyle/>
-                    <a:p>
-                      <a:pPr algn="l"/>
-                      <a:r>
-                        <a:rPr sz="1000" b="0">
-                          <a:solidFill>
-                            <a:srgbClr val="1D1B43"/>
-                          </a:solidFill>
-                          <a:latin typeface="Calibri"/>
-                        </a:rPr>
-                        <a:t>92</a:t>
+                    <a:bodyPr/>
+                    <a:lstStyle/>
+                    <a:p>
+                      <a:pPr algn="l"/>
+                      <a:r>
+                        <a:rPr sz="1000" b="0">
+                          <a:solidFill>
+                            <a:srgbClr val="1D1B43"/>
+                          </a:solidFill>
+                          <a:latin typeface="Calibri"/>
+                        </a:rPr>
+                        <a:t>87</a:t>
                       </a:r>
                     </a:p>
                   </a:txBody>
@@ -5045,18 +5045,18 @@
                 </a:tc>
                 <a:tc>
                   <a:txBody>
-                    <a:bodyPr wrap="square"/>
-                    <a:lstStyle/>
-                    <a:p>
-                      <a:pPr algn="l"/>
-                      <a:r>
-                        <a:rPr sz="1000" b="0">
-                          <a:solidFill>
-                            <a:srgbClr val="1D1B43"/>
-                          </a:solidFill>
-                          <a:latin typeface="Calibri"/>
-                        </a:rPr>
-                        <a:t>92</a:t>
+                    <a:bodyPr/>
+                    <a:lstStyle/>
+                    <a:p>
+                      <a:pPr algn="l"/>
+                      <a:r>
+                        <a:rPr sz="1000" b="0">
+                          <a:solidFill>
+                            <a:srgbClr val="1D1B43"/>
+                          </a:solidFill>
+                          <a:latin typeface="Calibri"/>
+                        </a:rPr>
+                        <a:t>87</a:t>
                       </a:r>
                     </a:p>
                   </a:txBody>
@@ -5068,7 +5068,7 @@
                 </a:tc>
                 <a:tc>
                   <a:txBody>
-                    <a:bodyPr wrap="square"/>
+                    <a:bodyPr/>
                     <a:lstStyle/>
                     <a:p>
                       <a:pPr algn="l"/>
@@ -5091,7 +5091,7 @@
                 </a:tc>
                 <a:tc>
                   <a:txBody>
-                    <a:bodyPr wrap="square"/>
+                    <a:bodyPr/>
                     <a:lstStyle/>
                     <a:p>
                       <a:pPr algn="l"/>
@@ -5352,7 +5352,7 @@
               <a:tr h="457200">
                 <a:tc>
                   <a:txBody>
-                    <a:bodyPr wrap="square"/>
+                    <a:bodyPr/>
                     <a:lstStyle/>
                     <a:p>
                       <a:pPr algn="ctr"/>
@@ -5375,7 +5375,7 @@
                 </a:tc>
                 <a:tc>
                   <a:txBody>
-                    <a:bodyPr wrap="square"/>
+                    <a:bodyPr/>
                     <a:lstStyle/>
                     <a:p>
                       <a:pPr algn="ctr"/>
@@ -5398,7 +5398,7 @@
                 </a:tc>
                 <a:tc>
                   <a:txBody>
-                    <a:bodyPr wrap="square"/>
+                    <a:bodyPr/>
                     <a:lstStyle/>
                     <a:p>
                       <a:pPr algn="ctr"/>
@@ -5421,7 +5421,7 @@
                 </a:tc>
                 <a:tc>
                   <a:txBody>
-                    <a:bodyPr wrap="square"/>
+                    <a:bodyPr/>
                     <a:lstStyle/>
                     <a:p>
                       <a:pPr algn="ctr"/>
@@ -5444,7 +5444,7 @@
                 </a:tc>
                 <a:tc>
                   <a:txBody>
-                    <a:bodyPr wrap="square"/>
+                    <a:bodyPr/>
                     <a:lstStyle/>
                     <a:p>
                       <a:pPr algn="ctr"/>
@@ -5467,7 +5467,7 @@
                 </a:tc>
                 <a:tc>
                   <a:txBody>
-                    <a:bodyPr wrap="square"/>
+                    <a:bodyPr/>
                     <a:lstStyle/>
                     <a:p>
                       <a:pPr algn="ctr"/>
@@ -5492,7 +5492,7 @@
               <a:tr h="457200">
                 <a:tc>
                   <a:txBody>
-                    <a:bodyPr wrap="square"/>
+                    <a:bodyPr/>
                     <a:lstStyle/>
                     <a:p>
                       <a:pPr algn="l"/>
@@ -5515,18 +5515,18 @@
                 </a:tc>
                 <a:tc>
                   <a:txBody>
-                    <a:bodyPr wrap="square"/>
-                    <a:lstStyle/>
-                    <a:p>
-                      <a:pPr algn="l"/>
-                      <a:r>
-                        <a:rPr sz="1000" b="0">
-                          <a:solidFill>
-                            <a:srgbClr val="1D1B43"/>
-                          </a:solidFill>
-                          <a:latin typeface="Calibri"/>
-                        </a:rPr>
-                        <a:t>21</a:t>
+                    <a:bodyPr/>
+                    <a:lstStyle/>
+                    <a:p>
+                      <a:pPr algn="l"/>
+                      <a:r>
+                        <a:rPr sz="1000" b="0">
+                          <a:solidFill>
+                            <a:srgbClr val="1D1B43"/>
+                          </a:solidFill>
+                          <a:latin typeface="Calibri"/>
+                        </a:rPr>
+                        <a:t>22</a:t>
                       </a:r>
                     </a:p>
                   </a:txBody>
@@ -5538,18 +5538,18 @@
                 </a:tc>
                 <a:tc>
                   <a:txBody>
-                    <a:bodyPr wrap="square"/>
-                    <a:lstStyle/>
-                    <a:p>
-                      <a:pPr algn="l"/>
-                      <a:r>
-                        <a:rPr sz="1000" b="0">
-                          <a:solidFill>
-                            <a:srgbClr val="1D1B43"/>
-                          </a:solidFill>
-                          <a:latin typeface="Calibri"/>
-                        </a:rPr>
-                        <a:t>21</a:t>
+                    <a:bodyPr/>
+                    <a:lstStyle/>
+                    <a:p>
+                      <a:pPr algn="l"/>
+                      <a:r>
+                        <a:rPr sz="1000" b="0">
+                          <a:solidFill>
+                            <a:srgbClr val="1D1B43"/>
+                          </a:solidFill>
+                          <a:latin typeface="Calibri"/>
+                        </a:rPr>
+                        <a:t>22</a:t>
                       </a:r>
                     </a:p>
                   </a:txBody>
@@ -5561,7 +5561,7 @@
                 </a:tc>
                 <a:tc>
                   <a:txBody>
-                    <a:bodyPr wrap="square"/>
+                    <a:bodyPr/>
                     <a:lstStyle/>
                     <a:p>
                       <a:pPr algn="l"/>
@@ -5584,7 +5584,7 @@
                 </a:tc>
                 <a:tc>
                   <a:txBody>
-                    <a:bodyPr wrap="square"/>
+                    <a:bodyPr/>
                     <a:lstStyle/>
                     <a:p>
                       <a:pPr algn="l"/>
@@ -5607,7 +5607,7 @@
                 </a:tc>
                 <a:tc>
                   <a:txBody>
-                    <a:bodyPr wrap="square"/>
+                    <a:bodyPr/>
                     <a:lstStyle/>
                     <a:p>
                       <a:pPr algn="l"/>
@@ -5632,18 +5632,18 @@
               <a:tr h="457200">
                 <a:tc>
                   <a:txBody>
-                    <a:bodyPr wrap="square"/>
-                    <a:lstStyle/>
-                    <a:p>
-                      <a:pPr algn="l"/>
-                      <a:r>
-                        <a:rPr sz="1000" b="0">
-                          <a:solidFill>
-                            <a:srgbClr val="1D1B43"/>
-                          </a:solidFill>
-                          <a:latin typeface="Calibri"/>
-                        </a:rPr>
-                        <a:t>PR</a:t>
+                    <a:bodyPr/>
+                    <a:lstStyle/>
+                    <a:p>
+                      <a:pPr algn="l"/>
+                      <a:r>
+                        <a:rPr sz="1000" b="0">
+                          <a:solidFill>
+                            <a:srgbClr val="1D1B43"/>
+                          </a:solidFill>
+                          <a:latin typeface="Calibri"/>
+                        </a:rPr>
+                        <a:t>MG</a:t>
                       </a:r>
                     </a:p>
                   </a:txBody>
@@ -5655,18 +5655,18 @@
                 </a:tc>
                 <a:tc>
                   <a:txBody>
-                    <a:bodyPr wrap="square"/>
-                    <a:lstStyle/>
-                    <a:p>
-                      <a:pPr algn="l"/>
-                      <a:r>
-                        <a:rPr sz="1000" b="0">
-                          <a:solidFill>
-                            <a:srgbClr val="1D1B43"/>
-                          </a:solidFill>
-                          <a:latin typeface="Calibri"/>
-                        </a:rPr>
-                        <a:t>16</a:t>
+                    <a:bodyPr/>
+                    <a:lstStyle/>
+                    <a:p>
+                      <a:pPr algn="l"/>
+                      <a:r>
+                        <a:rPr sz="1000" b="0">
+                          <a:solidFill>
+                            <a:srgbClr val="1D1B43"/>
+                          </a:solidFill>
+                          <a:latin typeface="Calibri"/>
+                        </a:rPr>
+                        <a:t>14</a:t>
                       </a:r>
                     </a:p>
                   </a:txBody>
@@ -5678,18 +5678,18 @@
                 </a:tc>
                 <a:tc>
                   <a:txBody>
-                    <a:bodyPr wrap="square"/>
-                    <a:lstStyle/>
-                    <a:p>
-                      <a:pPr algn="l"/>
-                      <a:r>
-                        <a:rPr sz="1000" b="0">
-                          <a:solidFill>
-                            <a:srgbClr val="1D1B43"/>
-                          </a:solidFill>
-                          <a:latin typeface="Calibri"/>
-                        </a:rPr>
-                        <a:t>16</a:t>
+                    <a:bodyPr/>
+                    <a:lstStyle/>
+                    <a:p>
+                      <a:pPr algn="l"/>
+                      <a:r>
+                        <a:rPr sz="1000" b="0">
+                          <a:solidFill>
+                            <a:srgbClr val="1D1B43"/>
+                          </a:solidFill>
+                          <a:latin typeface="Calibri"/>
+                        </a:rPr>
+                        <a:t>14</a:t>
                       </a:r>
                     </a:p>
                   </a:txBody>
@@ -5701,7 +5701,7 @@
                 </a:tc>
                 <a:tc>
                   <a:txBody>
-                    <a:bodyPr wrap="square"/>
+                    <a:bodyPr/>
                     <a:lstStyle/>
                     <a:p>
                       <a:pPr algn="l"/>
@@ -5724,7 +5724,7 @@
                 </a:tc>
                 <a:tc>
                   <a:txBody>
-                    <a:bodyPr wrap="square"/>
+                    <a:bodyPr/>
                     <a:lstStyle/>
                     <a:p>
                       <a:pPr algn="l"/>
@@ -5747,7 +5747,7 @@
                 </a:tc>
                 <a:tc>
                   <a:txBody>
-                    <a:bodyPr wrap="square"/>
+                    <a:bodyPr/>
                     <a:lstStyle/>
                     <a:p>
                       <a:pPr algn="l"/>
@@ -5772,18 +5772,18 @@
               <a:tr h="457200">
                 <a:tc>
                   <a:txBody>
-                    <a:bodyPr wrap="square"/>
-                    <a:lstStyle/>
-                    <a:p>
-                      <a:pPr algn="l"/>
-                      <a:r>
-                        <a:rPr sz="1000" b="0">
-                          <a:solidFill>
-                            <a:srgbClr val="1D1B43"/>
-                          </a:solidFill>
-                          <a:latin typeface="Calibri"/>
-                        </a:rPr>
-                        <a:t>MG</a:t>
+                    <a:bodyPr/>
+                    <a:lstStyle/>
+                    <a:p>
+                      <a:pPr algn="l"/>
+                      <a:r>
+                        <a:rPr sz="1000" b="0">
+                          <a:solidFill>
+                            <a:srgbClr val="1D1B43"/>
+                          </a:solidFill>
+                          <a:latin typeface="Calibri"/>
+                        </a:rPr>
+                        <a:t>PR</a:t>
                       </a:r>
                     </a:p>
                   </a:txBody>
@@ -5795,18 +5795,18 @@
                 </a:tc>
                 <a:tc>
                   <a:txBody>
-                    <a:bodyPr wrap="square"/>
-                    <a:lstStyle/>
-                    <a:p>
-                      <a:pPr algn="l"/>
-                      <a:r>
-                        <a:rPr sz="1000" b="0">
-                          <a:solidFill>
-                            <a:srgbClr val="1D1B43"/>
-                          </a:solidFill>
-                          <a:latin typeface="Calibri"/>
-                        </a:rPr>
-                        <a:t>15</a:t>
+                    <a:bodyPr/>
+                    <a:lstStyle/>
+                    <a:p>
+                      <a:pPr algn="l"/>
+                      <a:r>
+                        <a:rPr sz="1000" b="0">
+                          <a:solidFill>
+                            <a:srgbClr val="1D1B43"/>
+                          </a:solidFill>
+                          <a:latin typeface="Calibri"/>
+                        </a:rPr>
+                        <a:t>14</a:t>
                       </a:r>
                     </a:p>
                   </a:txBody>
@@ -5818,18 +5818,18 @@
                 </a:tc>
                 <a:tc>
                   <a:txBody>
-                    <a:bodyPr wrap="square"/>
-                    <a:lstStyle/>
-                    <a:p>
-                      <a:pPr algn="l"/>
-                      <a:r>
-                        <a:rPr sz="1000" b="0">
-                          <a:solidFill>
-                            <a:srgbClr val="1D1B43"/>
-                          </a:solidFill>
-                          <a:latin typeface="Calibri"/>
-                        </a:rPr>
-                        <a:t>15</a:t>
+                    <a:bodyPr/>
+                    <a:lstStyle/>
+                    <a:p>
+                      <a:pPr algn="l"/>
+                      <a:r>
+                        <a:rPr sz="1000" b="0">
+                          <a:solidFill>
+                            <a:srgbClr val="1D1B43"/>
+                          </a:solidFill>
+                          <a:latin typeface="Calibri"/>
+                        </a:rPr>
+                        <a:t>14</a:t>
                       </a:r>
                     </a:p>
                   </a:txBody>
@@ -5841,7 +5841,7 @@
                 </a:tc>
                 <a:tc>
                   <a:txBody>
-                    <a:bodyPr wrap="square"/>
+                    <a:bodyPr/>
                     <a:lstStyle/>
                     <a:p>
                       <a:pPr algn="l"/>
@@ -5864,7 +5864,7 @@
                 </a:tc>
                 <a:tc>
                   <a:txBody>
-                    <a:bodyPr wrap="square"/>
+                    <a:bodyPr/>
                     <a:lstStyle/>
                     <a:p>
                       <a:pPr algn="l"/>
@@ -5887,7 +5887,7 @@
                 </a:tc>
                 <a:tc>
                   <a:txBody>
-                    <a:bodyPr wrap="square"/>
+                    <a:bodyPr/>
                     <a:lstStyle/>
                     <a:p>
                       <a:pPr algn="l"/>
@@ -5912,7 +5912,7 @@
               <a:tr h="457200">
                 <a:tc>
                   <a:txBody>
-                    <a:bodyPr wrap="square"/>
+                    <a:bodyPr/>
                     <a:lstStyle/>
                     <a:p>
                       <a:pPr algn="l"/>
@@ -5935,18 +5935,18 @@
                 </a:tc>
                 <a:tc>
                   <a:txBody>
-                    <a:bodyPr wrap="square"/>
-                    <a:lstStyle/>
-                    <a:p>
-                      <a:pPr algn="l"/>
-                      <a:r>
-                        <a:rPr sz="1000" b="0">
-                          <a:solidFill>
-                            <a:srgbClr val="1D1B43"/>
-                          </a:solidFill>
-                          <a:latin typeface="Calibri"/>
-                        </a:rPr>
-                        <a:t>14</a:t>
+                    <a:bodyPr/>
+                    <a:lstStyle/>
+                    <a:p>
+                      <a:pPr algn="l"/>
+                      <a:r>
+                        <a:rPr sz="1000" b="0">
+                          <a:solidFill>
+                            <a:srgbClr val="1D1B43"/>
+                          </a:solidFill>
+                          <a:latin typeface="Calibri"/>
+                        </a:rPr>
+                        <a:t>11</a:t>
                       </a:r>
                     </a:p>
                   </a:txBody>
@@ -5958,18 +5958,18 @@
                 </a:tc>
                 <a:tc>
                   <a:txBody>
-                    <a:bodyPr wrap="square"/>
-                    <a:lstStyle/>
-                    <a:p>
-                      <a:pPr algn="l"/>
-                      <a:r>
-                        <a:rPr sz="1000" b="0">
-                          <a:solidFill>
-                            <a:srgbClr val="1D1B43"/>
-                          </a:solidFill>
-                          <a:latin typeface="Calibri"/>
-                        </a:rPr>
-                        <a:t>14</a:t>
+                    <a:bodyPr/>
+                    <a:lstStyle/>
+                    <a:p>
+                      <a:pPr algn="l"/>
+                      <a:r>
+                        <a:rPr sz="1000" b="0">
+                          <a:solidFill>
+                            <a:srgbClr val="1D1B43"/>
+                          </a:solidFill>
+                          <a:latin typeface="Calibri"/>
+                        </a:rPr>
+                        <a:t>11</a:t>
                       </a:r>
                     </a:p>
                   </a:txBody>
@@ -5981,7 +5981,7 @@
                 </a:tc>
                 <a:tc>
                   <a:txBody>
-                    <a:bodyPr wrap="square"/>
+                    <a:bodyPr/>
                     <a:lstStyle/>
                     <a:p>
                       <a:pPr algn="l"/>
@@ -6004,7 +6004,7 @@
                 </a:tc>
                 <a:tc>
                   <a:txBody>
-                    <a:bodyPr wrap="square"/>
+                    <a:bodyPr/>
                     <a:lstStyle/>
                     <a:p>
                       <a:pPr algn="l"/>
@@ -6027,7 +6027,7 @@
                 </a:tc>
                 <a:tc>
                   <a:txBody>
-                    <a:bodyPr wrap="square"/>
+                    <a:bodyPr/>
                     <a:lstStyle/>
                     <a:p>
                       <a:pPr algn="l"/>
@@ -6052,7 +6052,7 @@
               <a:tr h="457200">
                 <a:tc>
                   <a:txBody>
-                    <a:bodyPr wrap="square"/>
+                    <a:bodyPr/>
                     <a:lstStyle/>
                     <a:p>
                       <a:pPr algn="l"/>
@@ -6075,7 +6075,7 @@
                 </a:tc>
                 <a:tc>
                   <a:txBody>
-                    <a:bodyPr wrap="square"/>
+                    <a:bodyPr/>
                     <a:lstStyle/>
                     <a:p>
                       <a:pPr algn="l"/>
@@ -6098,7 +6098,7 @@
                 </a:tc>
                 <a:tc>
                   <a:txBody>
-                    <a:bodyPr wrap="square"/>
+                    <a:bodyPr/>
                     <a:lstStyle/>
                     <a:p>
                       <a:pPr algn="l"/>
@@ -6121,7 +6121,7 @@
                 </a:tc>
                 <a:tc>
                   <a:txBody>
-                    <a:bodyPr wrap="square"/>
+                    <a:bodyPr/>
                     <a:lstStyle/>
                     <a:p>
                       <a:pPr algn="l"/>
@@ -6144,7 +6144,7 @@
                 </a:tc>
                 <a:tc>
                   <a:txBody>
-                    <a:bodyPr wrap="square"/>
+                    <a:bodyPr/>
                     <a:lstStyle/>
                     <a:p>
                       <a:pPr algn="l"/>
@@ -6167,7 +6167,7 @@
                 </a:tc>
                 <a:tc>
                   <a:txBody>
-                    <a:bodyPr wrap="square"/>
+                    <a:bodyPr/>
                     <a:lstStyle/>
                     <a:p>
                       <a:pPr algn="l"/>
@@ -6192,7 +6192,7 @@
               <a:tr h="457200">
                 <a:tc>
                   <a:txBody>
-                    <a:bodyPr wrap="square"/>
+                    <a:bodyPr/>
                     <a:lstStyle/>
                     <a:p>
                       <a:pPr algn="l"/>
@@ -6215,7 +6215,7 @@
                 </a:tc>
                 <a:tc>
                   <a:txBody>
-                    <a:bodyPr wrap="square"/>
+                    <a:bodyPr/>
                     <a:lstStyle/>
                     <a:p>
                       <a:pPr algn="l"/>
@@ -6238,7 +6238,7 @@
                 </a:tc>
                 <a:tc>
                   <a:txBody>
-                    <a:bodyPr wrap="square"/>
+                    <a:bodyPr/>
                     <a:lstStyle/>
                     <a:p>
                       <a:pPr algn="l"/>
@@ -6261,7 +6261,7 @@
                 </a:tc>
                 <a:tc>
                   <a:txBody>
-                    <a:bodyPr wrap="square"/>
+                    <a:bodyPr/>
                     <a:lstStyle/>
                     <a:p>
                       <a:pPr algn="l"/>
@@ -6284,7 +6284,7 @@
                 </a:tc>
                 <a:tc>
                   <a:txBody>
-                    <a:bodyPr wrap="square"/>
+                    <a:bodyPr/>
                     <a:lstStyle/>
                     <a:p>
                       <a:pPr algn="l"/>
@@ -6307,7 +6307,7 @@
                 </a:tc>
                 <a:tc>
                   <a:txBody>
-                    <a:bodyPr wrap="square"/>
+                    <a:bodyPr/>
                     <a:lstStyle/>
                     <a:p>
                       <a:pPr algn="l"/>
@@ -6332,7 +6332,7 @@
               <a:tr h="457200">
                 <a:tc>
                   <a:txBody>
-                    <a:bodyPr wrap="square"/>
+                    <a:bodyPr/>
                     <a:lstStyle/>
                     <a:p>
                       <a:pPr algn="l"/>
@@ -6355,7 +6355,7 @@
                 </a:tc>
                 <a:tc>
                   <a:txBody>
-                    <a:bodyPr wrap="square"/>
+                    <a:bodyPr/>
                     <a:lstStyle/>
                     <a:p>
                       <a:pPr algn="l"/>
@@ -6378,7 +6378,7 @@
                 </a:tc>
                 <a:tc>
                   <a:txBody>
-                    <a:bodyPr wrap="square"/>
+                    <a:bodyPr/>
                     <a:lstStyle/>
                     <a:p>
                       <a:pPr algn="l"/>
@@ -6401,7 +6401,7 @@
                 </a:tc>
                 <a:tc>
                   <a:txBody>
-                    <a:bodyPr wrap="square"/>
+                    <a:bodyPr/>
                     <a:lstStyle/>
                     <a:p>
                       <a:pPr algn="l"/>
@@ -6424,7 +6424,7 @@
                 </a:tc>
                 <a:tc>
                   <a:txBody>
-                    <a:bodyPr wrap="square"/>
+                    <a:bodyPr/>
                     <a:lstStyle/>
                     <a:p>
                       <a:pPr algn="l"/>
@@ -6447,7 +6447,7 @@
                 </a:tc>
                 <a:tc>
                   <a:txBody>
-                    <a:bodyPr wrap="square"/>
+                    <a:bodyPr/>
                     <a:lstStyle/>
                     <a:p>
                       <a:pPr algn="l"/>
@@ -6472,7 +6472,7 @@
               <a:tr h="457200">
                 <a:tc>
                   <a:txBody>
-                    <a:bodyPr wrap="square"/>
+                    <a:bodyPr/>
                     <a:lstStyle/>
                     <a:p>
                       <a:pPr algn="l"/>
@@ -6495,7 +6495,7 @@
                 </a:tc>
                 <a:tc>
                   <a:txBody>
-                    <a:bodyPr wrap="square"/>
+                    <a:bodyPr/>
                     <a:lstStyle/>
                     <a:p>
                       <a:pPr algn="l"/>
@@ -6518,7 +6518,7 @@
                 </a:tc>
                 <a:tc>
                   <a:txBody>
-                    <a:bodyPr wrap="square"/>
+                    <a:bodyPr/>
                     <a:lstStyle/>
                     <a:p>
                       <a:pPr algn="l"/>
@@ -6541,7 +6541,7 @@
                 </a:tc>
                 <a:tc>
                   <a:txBody>
-                    <a:bodyPr wrap="square"/>
+                    <a:bodyPr/>
                     <a:lstStyle/>
                     <a:p>
                       <a:pPr algn="l"/>
@@ -6564,7 +6564,7 @@
                 </a:tc>
                 <a:tc>
                   <a:txBody>
-                    <a:bodyPr wrap="square"/>
+                    <a:bodyPr/>
                     <a:lstStyle/>
                     <a:p>
                       <a:pPr algn="l"/>
@@ -6587,7 +6587,7 @@
                 </a:tc>
                 <a:tc>
                   <a:txBody>
-                    <a:bodyPr wrap="square"/>
+                    <a:bodyPr/>
                     <a:lstStyle/>
                     <a:p>
                       <a:pPr algn="l"/>
@@ -6693,7 +6693,7 @@
                 </a:solidFill>
                 <a:latin typeface="Calibri"/>
               </a:rPr>
-              <a:t>TOP DESTINATARIOS (55 pontos)</a:t>
+              <a:t>TOP DESTINATARIOS (54 pontos)</a:t>
             </a:r>
           </a:p>
         </p:txBody>
@@ -6771,7 +6771,7 @@
               <a:tr h="292608">
                 <a:tc>
                   <a:txBody>
-                    <a:bodyPr wrap="square"/>
+                    <a:bodyPr/>
                     <a:lstStyle/>
                     <a:p>
                       <a:pPr algn="ctr"/>
@@ -6794,7 +6794,7 @@
                 </a:tc>
                 <a:tc>
                   <a:txBody>
-                    <a:bodyPr wrap="square"/>
+                    <a:bodyPr/>
                     <a:lstStyle/>
                     <a:p>
                       <a:pPr algn="ctr"/>
@@ -6817,7 +6817,7 @@
                 </a:tc>
                 <a:tc>
                   <a:txBody>
-                    <a:bodyPr wrap="square"/>
+                    <a:bodyPr/>
                     <a:lstStyle/>
                     <a:p>
                       <a:pPr algn="ctr"/>
@@ -6840,7 +6840,7 @@
                 </a:tc>
                 <a:tc>
                   <a:txBody>
-                    <a:bodyPr wrap="square"/>
+                    <a:bodyPr/>
                     <a:lstStyle/>
                     <a:p>
                       <a:pPr algn="ctr"/>
@@ -6863,7 +6863,7 @@
                 </a:tc>
                 <a:tc>
                   <a:txBody>
-                    <a:bodyPr wrap="square"/>
+                    <a:bodyPr/>
                     <a:lstStyle/>
                     <a:p>
                       <a:pPr algn="ctr"/>
@@ -6886,7 +6886,7 @@
                 </a:tc>
                 <a:tc>
                   <a:txBody>
-                    <a:bodyPr wrap="square"/>
+                    <a:bodyPr/>
                     <a:lstStyle/>
                     <a:p>
                       <a:pPr algn="ctr"/>
@@ -6909,7 +6909,7 @@
                 </a:tc>
                 <a:tc>
                   <a:txBody>
-                    <a:bodyPr wrap="square"/>
+                    <a:bodyPr/>
                     <a:lstStyle/>
                     <a:p>
                       <a:pPr algn="ctr"/>
@@ -6934,7 +6934,7 @@
               <a:tr h="292608">
                 <a:tc>
                   <a:txBody>
-                    <a:bodyPr wrap="square"/>
+                    <a:bodyPr/>
                     <a:lstStyle/>
                     <a:p>
                       <a:pPr algn="l"/>
@@ -6957,7 +6957,7 @@
                 </a:tc>
                 <a:tc>
                   <a:txBody>
-                    <a:bodyPr wrap="square"/>
+                    <a:bodyPr/>
                     <a:lstStyle/>
                     <a:p>
                       <a:pPr algn="l"/>
@@ -6980,18 +6980,18 @@
                 </a:tc>
                 <a:tc>
                   <a:txBody>
-                    <a:bodyPr wrap="square"/>
-                    <a:lstStyle/>
-                    <a:p>
-                      <a:pPr algn="l"/>
-                      <a:r>
-                        <a:rPr sz="1000" b="0">
-                          <a:solidFill>
-                            <a:srgbClr val="1D1B43"/>
-                          </a:solidFill>
-                          <a:latin typeface="Calibri"/>
-                        </a:rPr>
-                        <a:t>9</a:t>
+                    <a:bodyPr/>
+                    <a:lstStyle/>
+                    <a:p>
+                      <a:pPr algn="l"/>
+                      <a:r>
+                        <a:rPr sz="1000" b="0">
+                          <a:solidFill>
+                            <a:srgbClr val="1D1B43"/>
+                          </a:solidFill>
+                          <a:latin typeface="Calibri"/>
+                        </a:rPr>
+                        <a:t>6</a:t>
                       </a:r>
                     </a:p>
                   </a:txBody>
@@ -7003,18 +7003,18 @@
                 </a:tc>
                 <a:tc>
                   <a:txBody>
-                    <a:bodyPr wrap="square"/>
-                    <a:lstStyle/>
-                    <a:p>
-                      <a:pPr algn="l"/>
-                      <a:r>
-                        <a:rPr sz="1000" b="0">
-                          <a:solidFill>
-                            <a:srgbClr val="1D1B43"/>
-                          </a:solidFill>
-                          <a:latin typeface="Calibri"/>
-                        </a:rPr>
-                        <a:t>9</a:t>
+                    <a:bodyPr/>
+                    <a:lstStyle/>
+                    <a:p>
+                      <a:pPr algn="l"/>
+                      <a:r>
+                        <a:rPr sz="1000" b="0">
+                          <a:solidFill>
+                            <a:srgbClr val="1D1B43"/>
+                          </a:solidFill>
+                          <a:latin typeface="Calibri"/>
+                        </a:rPr>
+                        <a:t>6</a:t>
                       </a:r>
                     </a:p>
                   </a:txBody>
@@ -7026,7 +7026,7 @@
                 </a:tc>
                 <a:tc>
                   <a:txBody>
-                    <a:bodyPr wrap="square"/>
+                    <a:bodyPr/>
                     <a:lstStyle/>
                     <a:p>
                       <a:pPr algn="l"/>
@@ -7049,7 +7049,7 @@
                 </a:tc>
                 <a:tc>
                   <a:txBody>
-                    <a:bodyPr wrap="square"/>
+                    <a:bodyPr/>
                     <a:lstStyle/>
                     <a:p>
                       <a:pPr algn="l"/>
@@ -7072,7 +7072,7 @@
                 </a:tc>
                 <a:tc>
                   <a:txBody>
-                    <a:bodyPr wrap="square"/>
+                    <a:bodyPr/>
                     <a:lstStyle/>
                     <a:p>
                       <a:pPr algn="l"/>
@@ -7097,7 +7097,7 @@
               <a:tr h="292608">
                 <a:tc>
                   <a:txBody>
-                    <a:bodyPr wrap="square"/>
+                    <a:bodyPr/>
                     <a:lstStyle/>
                     <a:p>
                       <a:pPr algn="l"/>
@@ -7120,7 +7120,7 @@
                 </a:tc>
                 <a:tc>
                   <a:txBody>
-                    <a:bodyPr wrap="square"/>
+                    <a:bodyPr/>
                     <a:lstStyle/>
                     <a:p>
                       <a:pPr algn="l"/>
@@ -7143,7 +7143,7 @@
                 </a:tc>
                 <a:tc>
                   <a:txBody>
-                    <a:bodyPr wrap="square"/>
+                    <a:bodyPr/>
                     <a:lstStyle/>
                     <a:p>
                       <a:pPr algn="l"/>
@@ -7166,7 +7166,7 @@
                 </a:tc>
                 <a:tc>
                   <a:txBody>
-                    <a:bodyPr wrap="square"/>
+                    <a:bodyPr/>
                     <a:lstStyle/>
                     <a:p>
                       <a:pPr algn="l"/>
@@ -7189,7 +7189,7 @@
                 </a:tc>
                 <a:tc>
                   <a:txBody>
-                    <a:bodyPr wrap="square"/>
+                    <a:bodyPr/>
                     <a:lstStyle/>
                     <a:p>
                       <a:pPr algn="l"/>
@@ -7212,7 +7212,7 @@
                 </a:tc>
                 <a:tc>
                   <a:txBody>
-                    <a:bodyPr wrap="square"/>
+                    <a:bodyPr/>
                     <a:lstStyle/>
                     <a:p>
                       <a:pPr algn="l"/>
@@ -7235,7 +7235,7 @@
                 </a:tc>
                 <a:tc>
                   <a:txBody>
-                    <a:bodyPr wrap="square"/>
+                    <a:bodyPr/>
                     <a:lstStyle/>
                     <a:p>
                       <a:pPr algn="l"/>
@@ -7260,7 +7260,7 @@
               <a:tr h="292608">
                 <a:tc>
                   <a:txBody>
-                    <a:bodyPr wrap="square"/>
+                    <a:bodyPr/>
                     <a:lstStyle/>
                     <a:p>
                       <a:pPr algn="l"/>
@@ -7283,18 +7283,18 @@
                 </a:tc>
                 <a:tc>
                   <a:txBody>
-                    <a:bodyPr wrap="square"/>
-                    <a:lstStyle/>
-                    <a:p>
-                      <a:pPr algn="l"/>
-                      <a:r>
-                        <a:rPr sz="1000" b="0">
-                          <a:solidFill>
-                            <a:srgbClr val="1D1B43"/>
-                          </a:solidFill>
-                          <a:latin typeface="Calibri"/>
-                        </a:rPr>
-                        <a:t>AMAZON SERVICOS DE V - BETIM / MG</a:t>
+                    <a:bodyPr/>
+                    <a:lstStyle/>
+                    <a:p>
+                      <a:pPr algn="l"/>
+                      <a:r>
+                        <a:rPr sz="1000" b="0">
+                          <a:solidFill>
+                            <a:srgbClr val="1D1B43"/>
+                          </a:solidFill>
+                          <a:latin typeface="Calibri"/>
+                        </a:rPr>
+                        <a:t>DEYCON COM E DISTRIB - IBIPORA / PR</a:t>
                       </a:r>
                     </a:p>
                   </a:txBody>
@@ -7306,7 +7306,7 @@
                 </a:tc>
                 <a:tc>
                   <a:txBody>
-                    <a:bodyPr wrap="square"/>
+                    <a:bodyPr/>
                     <a:lstStyle/>
                     <a:p>
                       <a:pPr algn="l"/>
@@ -7329,7 +7329,7 @@
                 </a:tc>
                 <a:tc>
                   <a:txBody>
-                    <a:bodyPr wrap="square"/>
+                    <a:bodyPr/>
                     <a:lstStyle/>
                     <a:p>
                       <a:pPr algn="l"/>
@@ -7352,7 +7352,7 @@
                 </a:tc>
                 <a:tc>
                   <a:txBody>
-                    <a:bodyPr wrap="square"/>
+                    <a:bodyPr/>
                     <a:lstStyle/>
                     <a:p>
                       <a:pPr algn="l"/>
@@ -7375,7 +7375,7 @@
                 </a:tc>
                 <a:tc>
                   <a:txBody>
-                    <a:bodyPr wrap="square"/>
+                    <a:bodyPr/>
                     <a:lstStyle/>
                     <a:p>
                       <a:pPr algn="l"/>
@@ -7398,7 +7398,7 @@
                 </a:tc>
                 <a:tc>
                   <a:txBody>
-                    <a:bodyPr wrap="square"/>
+                    <a:bodyPr/>
                     <a:lstStyle/>
                     <a:p>
                       <a:pPr algn="l"/>
@@ -7423,7 +7423,7 @@
               <a:tr h="292608">
                 <a:tc>
                   <a:txBody>
-                    <a:bodyPr wrap="square"/>
+                    <a:bodyPr/>
                     <a:lstStyle/>
                     <a:p>
                       <a:pPr algn="l"/>
@@ -7446,18 +7446,18 @@
                 </a:tc>
                 <a:tc>
                   <a:txBody>
-                    <a:bodyPr wrap="square"/>
-                    <a:lstStyle/>
-                    <a:p>
-                      <a:pPr algn="l"/>
-                      <a:r>
-                        <a:rPr sz="1000" b="0">
-                          <a:solidFill>
-                            <a:srgbClr val="1D1B43"/>
-                          </a:solidFill>
-                          <a:latin typeface="Calibri"/>
-                        </a:rPr>
-                        <a:t>DEYCON COM E DISTRIB - IBIPORA / PR</a:t>
+                    <a:bodyPr/>
+                    <a:lstStyle/>
+                    <a:p>
+                      <a:pPr algn="l"/>
+                      <a:r>
+                        <a:rPr sz="1000" b="0">
+                          <a:solidFill>
+                            <a:srgbClr val="1D1B43"/>
+                          </a:solidFill>
+                          <a:latin typeface="Calibri"/>
+                        </a:rPr>
+                        <a:t>DEYCON COM E DISTRIB - SAO JOSE DOS PINHAIS / PR</a:t>
                       </a:r>
                     </a:p>
                   </a:txBody>
@@ -7469,7 +7469,7 @@
                 </a:tc>
                 <a:tc>
                   <a:txBody>
-                    <a:bodyPr wrap="square"/>
+                    <a:bodyPr/>
                     <a:lstStyle/>
                     <a:p>
                       <a:pPr algn="l"/>
@@ -7492,7 +7492,7 @@
                 </a:tc>
                 <a:tc>
                   <a:txBody>
-                    <a:bodyPr wrap="square"/>
+                    <a:bodyPr/>
                     <a:lstStyle/>
                     <a:p>
                       <a:pPr algn="l"/>
@@ -7515,7 +7515,7 @@
                 </a:tc>
                 <a:tc>
                   <a:txBody>
-                    <a:bodyPr wrap="square"/>
+                    <a:bodyPr/>
                     <a:lstStyle/>
                     <a:p>
                       <a:pPr algn="l"/>
@@ -7538,7 +7538,7 @@
                 </a:tc>
                 <a:tc>
                   <a:txBody>
-                    <a:bodyPr wrap="square"/>
+                    <a:bodyPr/>
                     <a:lstStyle/>
                     <a:p>
                       <a:pPr algn="l"/>
@@ -7561,7 +7561,7 @@
                 </a:tc>
                 <a:tc>
                   <a:txBody>
-                    <a:bodyPr wrap="square"/>
+                    <a:bodyPr/>
                     <a:lstStyle/>
                     <a:p>
                       <a:pPr algn="l"/>
@@ -7586,7 +7586,7 @@
               <a:tr h="292608">
                 <a:tc>
                   <a:txBody>
-                    <a:bodyPr wrap="square"/>
+                    <a:bodyPr/>
                     <a:lstStyle/>
                     <a:p>
                       <a:pPr algn="l"/>
@@ -7609,18 +7609,18 @@
                 </a:tc>
                 <a:tc>
                   <a:txBody>
-                    <a:bodyPr wrap="square"/>
-                    <a:lstStyle/>
-                    <a:p>
-                      <a:pPr algn="l"/>
-                      <a:r>
-                        <a:rPr sz="1000" b="0">
-                          <a:solidFill>
-                            <a:srgbClr val="1D1B43"/>
-                          </a:solidFill>
-                          <a:latin typeface="Calibri"/>
-                        </a:rPr>
-                        <a:t>DEYCON COM E DISTRIB - SAO JOSE DOS PINHAIS / PR</a:t>
+                    <a:bodyPr/>
+                    <a:lstStyle/>
+                    <a:p>
+                      <a:pPr algn="l"/>
+                      <a:r>
+                        <a:rPr sz="1000" b="0">
+                          <a:solidFill>
+                            <a:srgbClr val="1D1B43"/>
+                          </a:solidFill>
+                          <a:latin typeface="Calibri"/>
+                        </a:rPr>
+                        <a:t>CIA ZAFFARI COM IND - PORTO ALEGRE / RS</a:t>
                       </a:r>
                     </a:p>
                   </a:txBody>
@@ -7632,18 +7632,18 @@
                 </a:tc>
                 <a:tc>
                   <a:txBody>
-                    <a:bodyPr wrap="square"/>
-                    <a:lstStyle/>
-                    <a:p>
-                      <a:pPr algn="l"/>
-                      <a:r>
-                        <a:rPr sz="1000" b="0">
-                          <a:solidFill>
-                            <a:srgbClr val="1D1B43"/>
-                          </a:solidFill>
-                          <a:latin typeface="Calibri"/>
-                        </a:rPr>
-                        <a:t>4</a:t>
+                    <a:bodyPr/>
+                    <a:lstStyle/>
+                    <a:p>
+                      <a:pPr algn="l"/>
+                      <a:r>
+                        <a:rPr sz="1000" b="0">
+                          <a:solidFill>
+                            <a:srgbClr val="1D1B43"/>
+                          </a:solidFill>
+                          <a:latin typeface="Calibri"/>
+                        </a:rPr>
+                        <a:t>3</a:t>
                       </a:r>
                     </a:p>
                   </a:txBody>
@@ -7655,18 +7655,18 @@
                 </a:tc>
                 <a:tc>
                   <a:txBody>
-                    <a:bodyPr wrap="square"/>
-                    <a:lstStyle/>
-                    <a:p>
-                      <a:pPr algn="l"/>
-                      <a:r>
-                        <a:rPr sz="1000" b="0">
-                          <a:solidFill>
-                            <a:srgbClr val="1D1B43"/>
-                          </a:solidFill>
-                          <a:latin typeface="Calibri"/>
-                        </a:rPr>
-                        <a:t>4</a:t>
+                    <a:bodyPr/>
+                    <a:lstStyle/>
+                    <a:p>
+                      <a:pPr algn="l"/>
+                      <a:r>
+                        <a:rPr sz="1000" b="0">
+                          <a:solidFill>
+                            <a:srgbClr val="1D1B43"/>
+                          </a:solidFill>
+                          <a:latin typeface="Calibri"/>
+                        </a:rPr>
+                        <a:t>3</a:t>
                       </a:r>
                     </a:p>
                   </a:txBody>
@@ -7678,7 +7678,7 @@
                 </a:tc>
                 <a:tc>
                   <a:txBody>
-                    <a:bodyPr wrap="square"/>
+                    <a:bodyPr/>
                     <a:lstStyle/>
                     <a:p>
                       <a:pPr algn="l"/>
@@ -7701,7 +7701,7 @@
                 </a:tc>
                 <a:tc>
                   <a:txBody>
-                    <a:bodyPr wrap="square"/>
+                    <a:bodyPr/>
                     <a:lstStyle/>
                     <a:p>
                       <a:pPr algn="l"/>
@@ -7724,7 +7724,7 @@
                 </a:tc>
                 <a:tc>
                   <a:txBody>
-                    <a:bodyPr wrap="square"/>
+                    <a:bodyPr/>
                     <a:lstStyle/>
                     <a:p>
                       <a:pPr algn="l"/>
@@ -7749,7 +7749,7 @@
               <a:tr h="292608">
                 <a:tc>
                   <a:txBody>
-                    <a:bodyPr wrap="square"/>
+                    <a:bodyPr/>
                     <a:lstStyle/>
                     <a:p>
                       <a:pPr algn="l"/>
@@ -7772,18 +7772,18 @@
                 </a:tc>
                 <a:tc>
                   <a:txBody>
-                    <a:bodyPr wrap="square"/>
-                    <a:lstStyle/>
-                    <a:p>
-                      <a:pPr algn="l"/>
-                      <a:r>
-                        <a:rPr sz="1000" b="0">
-                          <a:solidFill>
-                            <a:srgbClr val="1D1B43"/>
-                          </a:solidFill>
-                          <a:latin typeface="Calibri"/>
-                        </a:rPr>
-                        <a:t>FIORELO PEGORARO COM - JOACABA / SC</a:t>
+                    <a:bodyPr/>
+                    <a:lstStyle/>
+                    <a:p>
+                      <a:pPr algn="l"/>
+                      <a:r>
+                        <a:rPr sz="1000" b="0">
+                          <a:solidFill>
+                            <a:srgbClr val="1D1B43"/>
+                          </a:solidFill>
+                          <a:latin typeface="Calibri"/>
+                        </a:rPr>
+                        <a:t>AMAZON SERVICOS DE V - BETIM / MG</a:t>
                       </a:r>
                     </a:p>
                   </a:txBody>
@@ -7795,7 +7795,7 @@
                 </a:tc>
                 <a:tc>
                   <a:txBody>
-                    <a:bodyPr wrap="square"/>
+                    <a:bodyPr/>
                     <a:lstStyle/>
                     <a:p>
                       <a:pPr algn="l"/>
@@ -7818,7 +7818,7 @@
                 </a:tc>
                 <a:tc>
                   <a:txBody>
-                    <a:bodyPr wrap="square"/>
+                    <a:bodyPr/>
                     <a:lstStyle/>
                     <a:p>
                       <a:pPr algn="l"/>
@@ -7841,7 +7841,7 @@
                 </a:tc>
                 <a:tc>
                   <a:txBody>
-                    <a:bodyPr wrap="square"/>
+                    <a:bodyPr/>
                     <a:lstStyle/>
                     <a:p>
                       <a:pPr algn="l"/>
@@ -7864,7 +7864,7 @@
                 </a:tc>
                 <a:tc>
                   <a:txBody>
-                    <a:bodyPr wrap="square"/>
+                    <a:bodyPr/>
                     <a:lstStyle/>
                     <a:p>
                       <a:pPr algn="l"/>
@@ -7887,7 +7887,7 @@
                 </a:tc>
                 <a:tc>
                   <a:txBody>
-                    <a:bodyPr wrap="square"/>
+                    <a:bodyPr/>
                     <a:lstStyle/>
                     <a:p>
                       <a:pPr algn="l"/>
@@ -7912,7 +7912,7 @@
               <a:tr h="292608">
                 <a:tc>
                   <a:txBody>
-                    <a:bodyPr wrap="square"/>
+                    <a:bodyPr/>
                     <a:lstStyle/>
                     <a:p>
                       <a:pPr algn="l"/>
@@ -7935,18 +7935,18 @@
                 </a:tc>
                 <a:tc>
                   <a:txBody>
-                    <a:bodyPr wrap="square"/>
-                    <a:lstStyle/>
-                    <a:p>
-                      <a:pPr algn="l"/>
-                      <a:r>
-                        <a:rPr sz="1000" b="0">
-                          <a:solidFill>
-                            <a:srgbClr val="1D1B43"/>
-                          </a:solidFill>
-                          <a:latin typeface="Calibri"/>
-                        </a:rPr>
-                        <a:t>MAGAZINE LUIZA S/A - ARAUCARIA / PR</a:t>
+                    <a:bodyPr/>
+                    <a:lstStyle/>
+                    <a:p>
+                      <a:pPr algn="l"/>
+                      <a:r>
+                        <a:rPr sz="1000" b="0">
+                          <a:solidFill>
+                            <a:srgbClr val="1D1B43"/>
+                          </a:solidFill>
+                          <a:latin typeface="Calibri"/>
+                        </a:rPr>
+                        <a:t>FIORELO PEGORARO COM - JOACABA / SC</a:t>
                       </a:r>
                     </a:p>
                   </a:txBody>
@@ -7958,7 +7958,7 @@
                 </a:tc>
                 <a:tc>
                   <a:txBody>
-                    <a:bodyPr wrap="square"/>
+                    <a:bodyPr/>
                     <a:lstStyle/>
                     <a:p>
                       <a:pPr algn="l"/>
@@ -7981,7 +7981,7 @@
                 </a:tc>
                 <a:tc>
                   <a:txBody>
-                    <a:bodyPr wrap="square"/>
+                    <a:bodyPr/>
                     <a:lstStyle/>
                     <a:p>
                       <a:pPr algn="l"/>
@@ -8004,7 +8004,7 @@
                 </a:tc>
                 <a:tc>
                   <a:txBody>
-                    <a:bodyPr wrap="square"/>
+                    <a:bodyPr/>
                     <a:lstStyle/>
                     <a:p>
                       <a:pPr algn="l"/>
@@ -8027,7 +8027,7 @@
                 </a:tc>
                 <a:tc>
                   <a:txBody>
-                    <a:bodyPr wrap="square"/>
+                    <a:bodyPr/>
                     <a:lstStyle/>
                     <a:p>
                       <a:pPr algn="l"/>
@@ -8050,7 +8050,7 @@
                 </a:tc>
                 <a:tc>
                   <a:txBody>
-                    <a:bodyPr wrap="square"/>
+                    <a:bodyPr/>
                     <a:lstStyle/>
                     <a:p>
                       <a:pPr algn="l"/>
@@ -8075,7 +8075,7 @@
               <a:tr h="292608">
                 <a:tc>
                   <a:txBody>
-                    <a:bodyPr wrap="square"/>
+                    <a:bodyPr/>
                     <a:lstStyle/>
                     <a:p>
                       <a:pPr algn="l"/>
@@ -8098,7 +8098,7 @@
                 </a:tc>
                 <a:tc>
                   <a:txBody>
-                    <a:bodyPr wrap="square"/>
+                    <a:bodyPr/>
                     <a:lstStyle/>
                     <a:p>
                       <a:pPr algn="l"/>
@@ -8121,7 +8121,7 @@
                 </a:tc>
                 <a:tc>
                   <a:txBody>
-                    <a:bodyPr wrap="square"/>
+                    <a:bodyPr/>
                     <a:lstStyle/>
                     <a:p>
                       <a:pPr algn="l"/>
@@ -8144,7 +8144,7 @@
                 </a:tc>
                 <a:tc>
                   <a:txBody>
-                    <a:bodyPr wrap="square"/>
+                    <a:bodyPr/>
                     <a:lstStyle/>
                     <a:p>
                       <a:pPr algn="l"/>
@@ -8167,7 +8167,7 @@
                 </a:tc>
                 <a:tc>
                   <a:txBody>
-                    <a:bodyPr wrap="square"/>
+                    <a:bodyPr/>
                     <a:lstStyle/>
                     <a:p>
                       <a:pPr algn="l"/>
@@ -8190,7 +8190,7 @@
                 </a:tc>
                 <a:tc>
                   <a:txBody>
-                    <a:bodyPr wrap="square"/>
+                    <a:bodyPr/>
                     <a:lstStyle/>
                     <a:p>
                       <a:pPr algn="l"/>
@@ -8213,7 +8213,7 @@
                 </a:tc>
                 <a:tc>
                   <a:txBody>
-                    <a:bodyPr wrap="square"/>
+                    <a:bodyPr/>
                     <a:lstStyle/>
                     <a:p>
                       <a:pPr algn="l"/>
@@ -8238,7 +8238,7 @@
               <a:tr h="292608">
                 <a:tc>
                   <a:txBody>
-                    <a:bodyPr wrap="square"/>
+                    <a:bodyPr/>
                     <a:lstStyle/>
                     <a:p>
                       <a:pPr algn="l"/>
@@ -8261,7 +8261,7 @@
                 </a:tc>
                 <a:tc>
                   <a:txBody>
-                    <a:bodyPr wrap="square"/>
+                    <a:bodyPr/>
                     <a:lstStyle/>
                     <a:p>
                       <a:pPr algn="l"/>
@@ -8284,7 +8284,7 @@
                 </a:tc>
                 <a:tc>
                   <a:txBody>
-                    <a:bodyPr wrap="square"/>
+                    <a:bodyPr/>
                     <a:lstStyle/>
                     <a:p>
                       <a:pPr algn="l"/>
@@ -8307,7 +8307,7 @@
                 </a:tc>
                 <a:tc>
                   <a:txBody>
-                    <a:bodyPr wrap="square"/>
+                    <a:bodyPr/>
                     <a:lstStyle/>
                     <a:p>
                       <a:pPr algn="l"/>
@@ -8330,7 +8330,7 @@
                 </a:tc>
                 <a:tc>
                   <a:txBody>
-                    <a:bodyPr wrap="square"/>
+                    <a:bodyPr/>
                     <a:lstStyle/>
                     <a:p>
                       <a:pPr algn="l"/>
@@ -8353,7 +8353,7 @@
                 </a:tc>
                 <a:tc>
                   <a:txBody>
-                    <a:bodyPr wrap="square"/>
+                    <a:bodyPr/>
                     <a:lstStyle/>
                     <a:p>
                       <a:pPr algn="l"/>
@@ -8376,7 +8376,7 @@
                 </a:tc>
                 <a:tc>
                   <a:txBody>
-                    <a:bodyPr wrap="square"/>
+                    <a:bodyPr/>
                     <a:lstStyle/>
                     <a:p>
                       <a:pPr algn="l"/>
@@ -8401,7 +8401,7 @@
               <a:tr h="292608">
                 <a:tc>
                   <a:txBody>
-                    <a:bodyPr wrap="square"/>
+                    <a:bodyPr/>
                     <a:lstStyle/>
                     <a:p>
                       <a:pPr algn="l"/>
@@ -8424,18 +8424,18 @@
                 </a:tc>
                 <a:tc>
                   <a:txBody>
-                    <a:bodyPr wrap="square"/>
-                    <a:lstStyle/>
-                    <a:p>
-                      <a:pPr algn="l"/>
-                      <a:r>
-                        <a:rPr sz="1000" b="0">
-                          <a:solidFill>
-                            <a:srgbClr val="1D1B43"/>
-                          </a:solidFill>
-                          <a:latin typeface="Calibri"/>
-                        </a:rPr>
-                        <a:t>FABIO J R DOS SANTOS - CURITIBA / PR</a:t>
+                    <a:bodyPr/>
+                    <a:lstStyle/>
+                    <a:p>
+                      <a:pPr algn="l"/>
+                      <a:r>
+                        <a:rPr sz="1000" b="0">
+                          <a:solidFill>
+                            <a:srgbClr val="1D1B43"/>
+                          </a:solidFill>
+                          <a:latin typeface="Calibri"/>
+                        </a:rPr>
+                        <a:t>DEYCON COM E DISTRIB - JOACABA / SC</a:t>
                       </a:r>
                     </a:p>
                   </a:txBody>
@@ -8447,7 +8447,7 @@
                 </a:tc>
                 <a:tc>
                   <a:txBody>
-                    <a:bodyPr wrap="square"/>
+                    <a:bodyPr/>
                     <a:lstStyle/>
                     <a:p>
                       <a:pPr algn="l"/>
@@ -8470,7 +8470,7 @@
                 </a:tc>
                 <a:tc>
                   <a:txBody>
-                    <a:bodyPr wrap="square"/>
+                    <a:bodyPr/>
                     <a:lstStyle/>
                     <a:p>
                       <a:pPr algn="l"/>
@@ -8493,7 +8493,7 @@
                 </a:tc>
                 <a:tc>
                   <a:txBody>
-                    <a:bodyPr wrap="square"/>
+                    <a:bodyPr/>
                     <a:lstStyle/>
                     <a:p>
                       <a:pPr algn="l"/>
@@ -8516,7 +8516,7 @@
                 </a:tc>
                 <a:tc>
                   <a:txBody>
-                    <a:bodyPr wrap="square"/>
+                    <a:bodyPr/>
                     <a:lstStyle/>
                     <a:p>
                       <a:pPr algn="l"/>
@@ -8539,7 +8539,7 @@
                 </a:tc>
                 <a:tc>
                   <a:txBody>
-                    <a:bodyPr wrap="square"/>
+                    <a:bodyPr/>
                     <a:lstStyle/>
                     <a:p>
                       <a:pPr algn="l"/>
@@ -8564,7 +8564,7 @@
               <a:tr h="292608">
                 <a:tc>
                   <a:txBody>
-                    <a:bodyPr wrap="square"/>
+                    <a:bodyPr/>
                     <a:lstStyle/>
                     <a:p>
                       <a:pPr algn="l"/>
@@ -8587,18 +8587,18 @@
                 </a:tc>
                 <a:tc>
                   <a:txBody>
-                    <a:bodyPr wrap="square"/>
-                    <a:lstStyle/>
-                    <a:p>
-                      <a:pPr algn="l"/>
-                      <a:r>
-                        <a:rPr sz="1000" b="0">
-                          <a:solidFill>
-                            <a:srgbClr val="1D1B43"/>
-                          </a:solidFill>
-                          <a:latin typeface="Calibri"/>
-                        </a:rPr>
-                        <a:t>CIA ZAFFARI COM IND - PORTO ALEGRE / RS</a:t>
+                    <a:bodyPr/>
+                    <a:lstStyle/>
+                    <a:p>
+                      <a:pPr algn="l"/>
+                      <a:r>
+                        <a:rPr sz="1000" b="0">
+                          <a:solidFill>
+                            <a:srgbClr val="1D1B43"/>
+                          </a:solidFill>
+                          <a:latin typeface="Calibri"/>
+                        </a:rPr>
+                        <a:t>FABIO J R DOS SANTOS - CURITIBA / PR</a:t>
                       </a:r>
                     </a:p>
                   </a:txBody>
@@ -8610,7 +8610,7 @@
                 </a:tc>
                 <a:tc>
                   <a:txBody>
-                    <a:bodyPr wrap="square"/>
+                    <a:bodyPr/>
                     <a:lstStyle/>
                     <a:p>
                       <a:pPr algn="l"/>
@@ -8633,7 +8633,7 @@
                 </a:tc>
                 <a:tc>
                   <a:txBody>
-                    <a:bodyPr wrap="square"/>
+                    <a:bodyPr/>
                     <a:lstStyle/>
                     <a:p>
                       <a:pPr algn="l"/>
@@ -8656,7 +8656,7 @@
                 </a:tc>
                 <a:tc>
                   <a:txBody>
-                    <a:bodyPr wrap="square"/>
+                    <a:bodyPr/>
                     <a:lstStyle/>
                     <a:p>
                       <a:pPr algn="l"/>
@@ -8679,7 +8679,7 @@
                 </a:tc>
                 <a:tc>
                   <a:txBody>
-                    <a:bodyPr wrap="square"/>
+                    <a:bodyPr/>
                     <a:lstStyle/>
                     <a:p>
                       <a:pPr algn="l"/>
@@ -8702,7 +8702,7 @@
                 </a:tc>
                 <a:tc>
                   <a:txBody>
-                    <a:bodyPr wrap="square"/>
+                    <a:bodyPr/>
                     <a:lstStyle/>
                     <a:p>
                       <a:pPr algn="l"/>
@@ -8727,7 +8727,7 @@
               <a:tr h="292608">
                 <a:tc>
                   <a:txBody>
-                    <a:bodyPr wrap="square"/>
+                    <a:bodyPr/>
                     <a:lstStyle/>
                     <a:p>
                       <a:pPr algn="l"/>
@@ -8750,18 +8750,18 @@
                 </a:tc>
                 <a:tc>
                   <a:txBody>
-                    <a:bodyPr wrap="square"/>
-                    <a:lstStyle/>
-                    <a:p>
-                      <a:pPr algn="l"/>
-                      <a:r>
-                        <a:rPr sz="1000" b="0">
-                          <a:solidFill>
-                            <a:srgbClr val="1D1B43"/>
-                          </a:solidFill>
-                          <a:latin typeface="Calibri"/>
-                        </a:rPr>
-                        <a:t>MATTEL DO BRASIL LTD - NAVEGANTES / SC</a:t>
+                    <a:bodyPr/>
+                    <a:lstStyle/>
+                    <a:p>
+                      <a:pPr algn="l"/>
+                      <a:r>
+                        <a:rPr sz="1000" b="0">
+                          <a:solidFill>
+                            <a:srgbClr val="1D1B43"/>
+                          </a:solidFill>
+                          <a:latin typeface="Calibri"/>
+                        </a:rPr>
+                        <a:t>PEGORARO DEYCON COM - PASSO FUNDO / RS</a:t>
                       </a:r>
                     </a:p>
                   </a:txBody>
@@ -8773,7 +8773,7 @@
                 </a:tc>
                 <a:tc>
                   <a:txBody>
-                    <a:bodyPr wrap="square"/>
+                    <a:bodyPr/>
                     <a:lstStyle/>
                     <a:p>
                       <a:pPr algn="l"/>
@@ -8796,7 +8796,7 @@
                 </a:tc>
                 <a:tc>
                   <a:txBody>
-                    <a:bodyPr wrap="square"/>
+                    <a:bodyPr/>
                     <a:lstStyle/>
                     <a:p>
                       <a:pPr algn="l"/>
@@ -8819,7 +8819,7 @@
                 </a:tc>
                 <a:tc>
                   <a:txBody>
-                    <a:bodyPr wrap="square"/>
+                    <a:bodyPr/>
                     <a:lstStyle/>
                     <a:p>
                       <a:pPr algn="l"/>
@@ -8842,7 +8842,7 @@
                 </a:tc>
                 <a:tc>
                   <a:txBody>
-                    <a:bodyPr wrap="square"/>
+                    <a:bodyPr/>
                     <a:lstStyle/>
                     <a:p>
                       <a:pPr algn="l"/>
@@ -8865,7 +8865,7 @@
                 </a:tc>
                 <a:tc>
                   <a:txBody>
-                    <a:bodyPr wrap="square"/>
+                    <a:bodyPr/>
                     <a:lstStyle/>
                     <a:p>
                       <a:pPr algn="l"/>
@@ -8890,7 +8890,7 @@
               <a:tr h="292608">
                 <a:tc>
                   <a:txBody>
-                    <a:bodyPr wrap="square"/>
+                    <a:bodyPr/>
                     <a:lstStyle/>
                     <a:p>
                       <a:pPr algn="l"/>
@@ -8913,18 +8913,18 @@
                 </a:tc>
                 <a:tc>
                   <a:txBody>
-                    <a:bodyPr wrap="square"/>
-                    <a:lstStyle/>
-                    <a:p>
-                      <a:pPr algn="l"/>
-                      <a:r>
-                        <a:rPr sz="1000" b="0">
-                          <a:solidFill>
-                            <a:srgbClr val="1D1B43"/>
-                          </a:solidFill>
-                          <a:latin typeface="Calibri"/>
-                        </a:rPr>
-                        <a:t>PEGORARO DEYCON COM - PASSO FUNDO / RS</a:t>
+                    <a:bodyPr/>
+                    <a:lstStyle/>
+                    <a:p>
+                      <a:pPr algn="l"/>
+                      <a:r>
+                        <a:rPr sz="1000" b="0">
+                          <a:solidFill>
+                            <a:srgbClr val="1D1B43"/>
+                          </a:solidFill>
+                          <a:latin typeface="Calibri"/>
+                        </a:rPr>
+                        <a:t>MAGAZINE LUIZA S/A - ARAUCARIA / PR</a:t>
                       </a:r>
                     </a:p>
                   </a:txBody>
@@ -8936,7 +8936,7 @@
                 </a:tc>
                 <a:tc>
                   <a:txBody>
-                    <a:bodyPr wrap="square"/>
+                    <a:bodyPr/>
                     <a:lstStyle/>
                     <a:p>
                       <a:pPr algn="l"/>
@@ -8959,7 +8959,7 @@
                 </a:tc>
                 <a:tc>
                   <a:txBody>
-                    <a:bodyPr wrap="square"/>
+                    <a:bodyPr/>
                     <a:lstStyle/>
                     <a:p>
                       <a:pPr algn="l"/>
@@ -8982,7 +8982,7 @@
                 </a:tc>
                 <a:tc>
                   <a:txBody>
-                    <a:bodyPr wrap="square"/>
+                    <a:bodyPr/>
                     <a:lstStyle/>
                     <a:p>
                       <a:pPr algn="l"/>
@@ -9005,7 +9005,7 @@
                 </a:tc>
                 <a:tc>
                   <a:txBody>
-                    <a:bodyPr wrap="square"/>
+                    <a:bodyPr/>
                     <a:lstStyle/>
                     <a:p>
                       <a:pPr algn="l"/>
@@ -9028,7 +9028,7 @@
                 </a:tc>
                 <a:tc>
                   <a:txBody>
-                    <a:bodyPr wrap="square"/>
+                    <a:bodyPr/>
                     <a:lstStyle/>
                     <a:p>
                       <a:pPr algn="l"/>
@@ -9053,7 +9053,7 @@
               <a:tr h="292608">
                 <a:tc>
                   <a:txBody>
-                    <a:bodyPr wrap="square"/>
+                    <a:bodyPr/>
                     <a:lstStyle/>
                     <a:p>
                       <a:pPr algn="l"/>
@@ -9076,18 +9076,18 @@
                 </a:tc>
                 <a:tc>
                   <a:txBody>
-                    <a:bodyPr wrap="square"/>
-                    <a:lstStyle/>
-                    <a:p>
-                      <a:pPr algn="l"/>
-                      <a:r>
-                        <a:rPr sz="1000" b="0">
-                          <a:solidFill>
-                            <a:srgbClr val="1D1B43"/>
-                          </a:solidFill>
-                          <a:latin typeface="Calibri"/>
-                        </a:rPr>
-                        <a:t>DEYCON COM E DISTRIB - JOACABA / SC</a:t>
+                    <a:bodyPr/>
+                    <a:lstStyle/>
+                    <a:p>
+                      <a:pPr algn="l"/>
+                      <a:r>
+                        <a:rPr sz="1000" b="0">
+                          <a:solidFill>
+                            <a:srgbClr val="1D1B43"/>
+                          </a:solidFill>
+                          <a:latin typeface="Calibri"/>
+                        </a:rPr>
+                        <a:t>AMAZON SERVICOS DE V - NOVA SANTA RITA / RS</a:t>
                       </a:r>
                     </a:p>
                   </a:txBody>
@@ -9099,7 +9099,7 @@
                 </a:tc>
                 <a:tc>
                   <a:txBody>
-                    <a:bodyPr wrap="square"/>
+                    <a:bodyPr/>
                     <a:lstStyle/>
                     <a:p>
                       <a:pPr algn="l"/>
@@ -9122,7 +9122,7 @@
                 </a:tc>
                 <a:tc>
                   <a:txBody>
-                    <a:bodyPr wrap="square"/>
+                    <a:bodyPr/>
                     <a:lstStyle/>
                     <a:p>
                       <a:pPr algn="l"/>
@@ -9145,7 +9145,7 @@
                 </a:tc>
                 <a:tc>
                   <a:txBody>
-                    <a:bodyPr wrap="square"/>
+                    <a:bodyPr/>
                     <a:lstStyle/>
                     <a:p>
                       <a:pPr algn="l"/>
@@ -9168,7 +9168,7 @@
                 </a:tc>
                 <a:tc>
                   <a:txBody>
-                    <a:bodyPr wrap="square"/>
+                    <a:bodyPr/>
                     <a:lstStyle/>
                     <a:p>
                       <a:pPr algn="l"/>
@@ -9191,7 +9191,7 @@
                 </a:tc>
                 <a:tc>
                   <a:txBody>
-                    <a:bodyPr wrap="square"/>
+                    <a:bodyPr/>
                     <a:lstStyle/>
                     <a:p>
                       <a:pPr algn="l"/>

--- a/MATTEL_DO_BRASIL_LTDA.pptx
+++ b/MATTEL_DO_BRASIL_LTDA.pptx
@@ -11,6 +11,7 @@
     <p:sldId id="259" r:id="rId10"/>
     <p:sldId id="260" r:id="rId11"/>
     <p:sldId id="261" r:id="rId12"/>
+    <p:sldId id="262" r:id="rId13"/>
   </p:sldIdLst>
   <p:sldSz cx="12188952" cy="6858000" type="screen4x3"/>
   <p:notesSz cx="6858000" cy="9144000"/>
@@ -146,10 +147,10 @@
               <c:strCache>
                 <c:ptCount val="2"/>
                 <c:pt idx="0">
-                  <c:v>Marco 2026</c:v>
+                  <c:v>Abril 2026</c:v>
                 </c:pt>
                 <c:pt idx="1">
-                  <c:v>Abril 2026</c:v>
+                  <c:v>Maio 2026</c:v>
                 </c:pt>
               </c:strCache>
             </c:strRef>
@@ -161,10 +162,10 @@
                 <c:formatCode>General</c:formatCode>
                 <c:ptCount val="2"/>
                 <c:pt idx="0">
-                  <c:v>31</c:v>
+                  <c:v>88</c:v>
                 </c:pt>
                 <c:pt idx="1">
-                  <c:v>87</c:v>
+                  <c:v>76</c:v>
                 </c:pt>
               </c:numCache>
             </c:numRef>
@@ -195,10 +196,10 @@
               <c:strCache>
                 <c:ptCount val="2"/>
                 <c:pt idx="0">
-                  <c:v>Marco 2026</c:v>
+                  <c:v>Abril 2026</c:v>
                 </c:pt>
                 <c:pt idx="1">
-                  <c:v>Abril 2026</c:v>
+                  <c:v>Maio 2026</c:v>
                 </c:pt>
               </c:strCache>
             </c:strRef>
@@ -210,10 +211,10 @@
                 <c:formatCode>General</c:formatCode>
                 <c:ptCount val="2"/>
                 <c:pt idx="0">
-                  <c:v>0</c:v>
+                  <c:v>2</c:v>
                 </c:pt>
                 <c:pt idx="1">
-                  <c:v>0</c:v>
+                  <c:v>1</c:v>
                 </c:pt>
               </c:numCache>
             </c:numRef>
@@ -3386,7 +3387,7 @@
                 </a:solidFill>
                 <a:latin typeface="Calibri"/>
               </a:rPr>
-              <a:t>INDICADORES ABRIL 2026</a:t>
+              <a:t>INDICADORES MAIO 2026</a:t>
             </a:r>
           </a:p>
         </p:txBody>
@@ -3708,7 +3709,7 @@
                 </a:solidFill>
                 <a:latin typeface="Calibri"/>
               </a:rPr>
-              <a:t>87</a:t>
+              <a:t>77</a:t>
             </a:r>
           </a:p>
         </p:txBody>
@@ -3823,7 +3824,7 @@
                 </a:solidFill>
                 <a:latin typeface="Calibri"/>
               </a:rPr>
-              <a:t>87</a:t>
+              <a:t>76</a:t>
             </a:r>
           </a:p>
         </p:txBody>
@@ -3934,11 +3935,11 @@
             <a:r>
               <a:rPr sz="2800" b="1">
                 <a:solidFill>
-                  <a:srgbClr val="10B981"/>
+                  <a:srgbClr val="EF4444"/>
                 </a:solidFill>
                 <a:latin typeface="Calibri"/>
               </a:rPr>
-              <a:t>0</a:t>
+              <a:t>1</a:t>
             </a:r>
           </a:p>
         </p:txBody>
@@ -4053,7 +4054,7 @@
                 </a:solidFill>
                 <a:latin typeface="Calibri"/>
               </a:rPr>
-              <a:t>100.0%</a:t>
+              <a:t>98.7%</a:t>
             </a:r>
           </a:p>
         </p:txBody>
@@ -4154,7 +4155,7 @@
                           </a:solidFill>
                           <a:latin typeface="Calibri"/>
                         </a:rPr>
-                        <a:t>Marco 2026</a:t>
+                        <a:t>Abril 2026</a:t>
                       </a:r>
                     </a:p>
                   </a:txBody>
@@ -4177,7 +4178,7 @@
                           </a:solidFill>
                           <a:latin typeface="Calibri"/>
                         </a:rPr>
-                        <a:t>Abril 2026</a:t>
+                        <a:t>Maio 2026</a:t>
                       </a:r>
                     </a:p>
                   </a:txBody>
@@ -4248,7 +4249,7 @@
                           </a:solidFill>
                           <a:latin typeface="Calibri"/>
                         </a:rPr>
-                        <a:t>31</a:t>
+                        <a:t>90</a:t>
                       </a:r>
                     </a:p>
                   </a:txBody>
@@ -4271,7 +4272,7 @@
                           </a:solidFill>
                           <a:latin typeface="Calibri"/>
                         </a:rPr>
-                        <a:t>87</a:t>
+                        <a:t>77</a:t>
                       </a:r>
                     </a:p>
                   </a:txBody>
@@ -4294,7 +4295,7 @@
                           </a:solidFill>
                           <a:latin typeface="Calibri"/>
                         </a:rPr>
-                        <a:t>+ 56</a:t>
+                        <a:t>- 13</a:t>
                       </a:r>
                     </a:p>
                   </a:txBody>
@@ -4342,7 +4343,7 @@
                           </a:solidFill>
                           <a:latin typeface="Calibri"/>
                         </a:rPr>
-                        <a:t>31</a:t>
+                        <a:t>88</a:t>
                       </a:r>
                     </a:p>
                   </a:txBody>
@@ -4365,7 +4366,7 @@
                           </a:solidFill>
                           <a:latin typeface="Calibri"/>
                         </a:rPr>
-                        <a:t>87</a:t>
+                        <a:t>76</a:t>
                       </a:r>
                     </a:p>
                   </a:txBody>
@@ -4388,7 +4389,7 @@
                           </a:solidFill>
                           <a:latin typeface="Calibri"/>
                         </a:rPr>
-                        <a:t>+ 56</a:t>
+                        <a:t>- 12</a:t>
                       </a:r>
                     </a:p>
                   </a:txBody>
@@ -4436,7 +4437,7 @@
                           </a:solidFill>
                           <a:latin typeface="Calibri"/>
                         </a:rPr>
-                        <a:t>0</a:t>
+                        <a:t>2</a:t>
                       </a:r>
                     </a:p>
                   </a:txBody>
@@ -4459,7 +4460,7 @@
                           </a:solidFill>
                           <a:latin typeface="Calibri"/>
                         </a:rPr>
-                        <a:t>0</a:t>
+                        <a:t>1</a:t>
                       </a:r>
                     </a:p>
                   </a:txBody>
@@ -4482,7 +4483,7 @@
                           </a:solidFill>
                           <a:latin typeface="Calibri"/>
                         </a:rPr>
-                        <a:t>- 0</a:t>
+                        <a:t>- 1</a:t>
                       </a:r>
                     </a:p>
                   </a:txBody>
@@ -4530,7 +4531,7 @@
                           </a:solidFill>
                           <a:latin typeface="Calibri"/>
                         </a:rPr>
-                        <a:t>100.0%</a:t>
+                        <a:t>97.8%</a:t>
                       </a:r>
                     </a:p>
                   </a:txBody>
@@ -4553,7 +4554,7 @@
                           </a:solidFill>
                           <a:latin typeface="Calibri"/>
                         </a:rPr>
-                        <a:t>100.0%</a:t>
+                        <a:t>98.7%</a:t>
                       </a:r>
                     </a:p>
                   </a:txBody>
@@ -4576,7 +4577,7 @@
                           </a:solidFill>
                           <a:latin typeface="Calibri"/>
                         </a:rPr>
-                        <a:t>+ 0.0pp</a:t>
+                        <a:t>+ 0.9pp</a:t>
                       </a:r>
                     </a:p>
                   </a:txBody>
@@ -4893,7 +4894,7 @@
                           </a:solidFill>
                           <a:latin typeface="Calibri"/>
                         </a:rPr>
-                        <a:t>Marco 2026</a:t>
+                        <a:t>Abril 2026</a:t>
                       </a:r>
                     </a:p>
                   </a:txBody>
@@ -4916,7 +4917,7 @@
                           </a:solidFill>
                           <a:latin typeface="Calibri"/>
                         </a:rPr>
-                        <a:t>31</a:t>
+                        <a:t>90</a:t>
                       </a:r>
                     </a:p>
                   </a:txBody>
@@ -4939,7 +4940,7 @@
                           </a:solidFill>
                           <a:latin typeface="Calibri"/>
                         </a:rPr>
-                        <a:t>31</a:t>
+                        <a:t>88</a:t>
                       </a:r>
                     </a:p>
                   </a:txBody>
@@ -4962,7 +4963,7 @@
                           </a:solidFill>
                           <a:latin typeface="Calibri"/>
                         </a:rPr>
-                        <a:t>0</a:t>
+                        <a:t>2</a:t>
                       </a:r>
                     </a:p>
                   </a:txBody>
@@ -4985,7 +4986,7 @@
                           </a:solidFill>
                           <a:latin typeface="Calibri"/>
                         </a:rPr>
-                        <a:t>100.0%</a:t>
+                        <a:t>97.8%</a:t>
                       </a:r>
                     </a:p>
                   </a:txBody>
@@ -5010,7 +5011,7 @@
                           </a:solidFill>
                           <a:latin typeface="Calibri"/>
                         </a:rPr>
-                        <a:t>Abril 2026</a:t>
+                        <a:t>Maio 2026</a:t>
                       </a:r>
                     </a:p>
                   </a:txBody>
@@ -5033,7 +5034,7 @@
                           </a:solidFill>
                           <a:latin typeface="Calibri"/>
                         </a:rPr>
-                        <a:t>87</a:t>
+                        <a:t>77</a:t>
                       </a:r>
                     </a:p>
                   </a:txBody>
@@ -5056,7 +5057,7 @@
                           </a:solidFill>
                           <a:latin typeface="Calibri"/>
                         </a:rPr>
-                        <a:t>87</a:t>
+                        <a:t>76</a:t>
                       </a:r>
                     </a:p>
                   </a:txBody>
@@ -5079,7 +5080,7 @@
                           </a:solidFill>
                           <a:latin typeface="Calibri"/>
                         </a:rPr>
-                        <a:t>0</a:t>
+                        <a:t>1</a:t>
                       </a:r>
                     </a:p>
                   </a:txBody>
@@ -5102,7 +5103,7 @@
                           </a:solidFill>
                           <a:latin typeface="Calibri"/>
                         </a:rPr>
-                        <a:t>100.0%</a:t>
+                        <a:t>98.7%</a:t>
                       </a:r>
                     </a:p>
                   </a:txBody>
@@ -5190,7 +5191,7 @@
                 </a:solidFill>
                 <a:latin typeface="Calibri"/>
               </a:rPr>
-              <a:t>PERFORMANCE: 100.0% - EXCELENTE</a:t>
+              <a:t>PERFORMANCE: 98.7% - EXCELENTE</a:t>
             </a:r>
           </a:p>
         </p:txBody>
@@ -5254,7 +5255,7 @@
         <p:spPr>
           <a:xfrm>
             <a:off x="749808" y="502920"/>
-            <a:ext cx="9144000" cy="914400"/>
+            <a:ext cx="10058400" cy="914400"/>
           </a:xfrm>
           <a:prstGeom prst="rect">
             <a:avLst/>
@@ -5269,13 +5270,13 @@
           <a:p>
             <a:pPr algn="l"/>
             <a:r>
-              <a:rPr sz="4000" b="1">
+              <a:rPr sz="3200" b="1">
                 <a:solidFill>
                   <a:srgbClr val="F97316"/>
                 </a:solidFill>
                 <a:latin typeface="Calibri"/>
               </a:rPr>
-              <a:t>PERFORMANCE POR UF</a:t>
+              <a:t>OCORRENCIAS FORA DO PRAZO (1)</a:t>
             </a:r>
           </a:p>
         </p:txBody>
@@ -5288,7 +5289,7 @@
         </p:nvSpPr>
         <p:spPr>
           <a:xfrm>
-            <a:off x="749808" y="1719072"/>
+            <a:off x="749808" y="1600200"/>
             <a:ext cx="10424160" cy="36576"/>
           </a:xfrm>
           <a:prstGeom prst="rect">
@@ -5332,8 +5333,8 @@
           <p:nvPr/>
         </p:nvGraphicFramePr>
         <p:xfrm>
-          <a:off x="731520" y="1920240"/>
-          <a:ext cx="10698480" cy="4114800"/>
+          <a:off x="457200" y="1828800"/>
+          <a:ext cx="11429999" cy="768096"/>
         </p:xfrm>
         <a:graphic>
           <a:graphicData uri="http://schemas.openxmlformats.org/drawingml/2006/table">
@@ -5342,14 +5343,13 @@
                 <a:tableStyleId>{5C22544A-7EE6-4342-B048-85BDC9FD1C3A}</a:tableStyleId>
               </a:tblPr>
               <a:tblGrid>
-                <a:gridCol w="1097280"/>
-                <a:gridCol w="1645920"/>
-                <a:gridCol w="1645920"/>
-                <a:gridCol w="1645920"/>
+                <a:gridCol w="1280160"/>
+                <a:gridCol w="3749039"/>
+                <a:gridCol w="2103120"/>
                 <a:gridCol w="1554480"/>
-                <a:gridCol w="3108960"/>
+                <a:gridCol w="2743200"/>
               </a:tblGrid>
-              <a:tr h="457200">
+              <a:tr h="384048">
                 <a:tc>
                   <a:txBody>
                     <a:bodyPr/>
@@ -5363,7 +5363,7 @@
                           </a:solidFill>
                           <a:latin typeface="Calibri"/>
                         </a:rPr>
-                        <a:t>UF</a:t>
+                        <a:t>MD</a:t>
                       </a:r>
                     </a:p>
                   </a:txBody>
@@ -5386,7 +5386,7 @@
                           </a:solidFill>
                           <a:latin typeface="Calibri"/>
                         </a:rPr>
-                        <a:t>TOTAL</a:t>
+                        <a:t>DESTINATARIO</a:t>
                       </a:r>
                     </a:p>
                   </a:txBody>
@@ -5409,7 +5409,7 @@
                           </a:solidFill>
                           <a:latin typeface="Calibri"/>
                         </a:rPr>
-                        <a:t>NO PRAZO</a:t>
+                        <a:t>CIDADE/UF</a:t>
                       </a:r>
                     </a:p>
                   </a:txBody>
@@ -5432,7 +5432,7 @@
                           </a:solidFill>
                           <a:latin typeface="Calibri"/>
                         </a:rPr>
-                        <a:t>FORA</a:t>
+                        <a:t>PREV. ENTREGA</a:t>
                       </a:r>
                     </a:p>
                   </a:txBody>
@@ -5455,7 +5455,7 @@
                           </a:solidFill>
                           <a:latin typeface="Calibri"/>
                         </a:rPr>
-                        <a:t>TAXA</a:t>
+                        <a:t>STATUS</a:t>
                       </a:r>
                     </a:p>
                   </a:txBody>
@@ -5465,45 +5465,22 @@
                     </a:solidFill>
                   </a:tcPr>
                 </a:tc>
-                <a:tc>
-                  <a:txBody>
-                    <a:bodyPr/>
-                    <a:lstStyle/>
-                    <a:p>
-                      <a:pPr algn="ctr"/>
-                      <a:r>
-                        <a:rPr sz="1100" b="1">
-                          <a:solidFill>
-                            <a:srgbClr val="FFFFFF"/>
-                          </a:solidFill>
-                          <a:latin typeface="Calibri"/>
-                        </a:rPr>
-                        <a:t>STATUS</a:t>
-                      </a:r>
-                    </a:p>
-                  </a:txBody>
-                  <a:tcPr>
-                    <a:solidFill>
-                      <a:srgbClr val="1D1B43"/>
-                    </a:solidFill>
-                  </a:tcPr>
-                </a:tc>
               </a:tr>
-              <a:tr h="457200">
-                <a:tc>
-                  <a:txBody>
-                    <a:bodyPr/>
-                    <a:lstStyle/>
-                    <a:p>
-                      <a:pPr algn="l"/>
-                      <a:r>
-                        <a:rPr sz="1000" b="0">
-                          <a:solidFill>
-                            <a:srgbClr val="1D1B43"/>
-                          </a:solidFill>
-                          <a:latin typeface="Calibri"/>
-                        </a:rPr>
-                        <a:t>RS</a:t>
+              <a:tr h="384048">
+                <a:tc>
+                  <a:txBody>
+                    <a:bodyPr/>
+                    <a:lstStyle/>
+                    <a:p>
+                      <a:pPr algn="l"/>
+                      <a:r>
+                        <a:rPr sz="1000" b="0">
+                          <a:solidFill>
+                            <a:srgbClr val="1D1B43"/>
+                          </a:solidFill>
+                          <a:latin typeface="Calibri"/>
+                        </a:rPr>
+                        <a:t>281522</a:t>
                       </a:r>
                     </a:p>
                   </a:txBody>
@@ -5526,7 +5503,7 @@
                           </a:solidFill>
                           <a:latin typeface="Calibri"/>
                         </a:rPr>
-                        <a:t>22</a:t>
+                        <a:t>AMAZON SERVICOS DE V - BETIM / MG</a:t>
                       </a:r>
                     </a:p>
                   </a:txBody>
@@ -5549,7 +5526,7 @@
                           </a:solidFill>
                           <a:latin typeface="Calibri"/>
                         </a:rPr>
-                        <a:t>22</a:t>
+                        <a:t>BETIM/MG</a:t>
                       </a:r>
                     </a:p>
                   </a:txBody>
@@ -5572,7 +5549,7 @@
                           </a:solidFill>
                           <a:latin typeface="Calibri"/>
                         </a:rPr>
-                        <a:t>0</a:t>
+                        <a:t>13/05/2026</a:t>
                       </a:r>
                     </a:p>
                   </a:txBody>
@@ -5595,1016 +5572,13 @@
                           </a:solidFill>
                           <a:latin typeface="Calibri"/>
                         </a:rPr>
-                        <a:t>100.0%</a:t>
+                        <a:t>ENTREGUE FORA DO PRAZO</a:t>
                       </a:r>
                     </a:p>
                   </a:txBody>
                   <a:tcPr>
                     <a:solidFill>
                       <a:srgbClr val="FFFFFF"/>
-                    </a:solidFill>
-                  </a:tcPr>
-                </a:tc>
-                <a:tc>
-                  <a:txBody>
-                    <a:bodyPr/>
-                    <a:lstStyle/>
-                    <a:p>
-                      <a:pPr algn="l"/>
-                      <a:r>
-                        <a:rPr sz="1000" b="0">
-                          <a:solidFill>
-                            <a:srgbClr val="1D1B43"/>
-                          </a:solidFill>
-                          <a:latin typeface="Calibri"/>
-                        </a:rPr>
-                        <a:t>Excelente</a:t>
-                      </a:r>
-                    </a:p>
-                  </a:txBody>
-                  <a:tcPr>
-                    <a:solidFill>
-                      <a:srgbClr val="FFFFFF"/>
-                    </a:solidFill>
-                  </a:tcPr>
-                </a:tc>
-              </a:tr>
-              <a:tr h="457200">
-                <a:tc>
-                  <a:txBody>
-                    <a:bodyPr/>
-                    <a:lstStyle/>
-                    <a:p>
-                      <a:pPr algn="l"/>
-                      <a:r>
-                        <a:rPr sz="1000" b="0">
-                          <a:solidFill>
-                            <a:srgbClr val="1D1B43"/>
-                          </a:solidFill>
-                          <a:latin typeface="Calibri"/>
-                        </a:rPr>
-                        <a:t>MG</a:t>
-                      </a:r>
-                    </a:p>
-                  </a:txBody>
-                  <a:tcPr>
-                    <a:solidFill>
-                      <a:srgbClr val="F2F2F2"/>
-                    </a:solidFill>
-                  </a:tcPr>
-                </a:tc>
-                <a:tc>
-                  <a:txBody>
-                    <a:bodyPr/>
-                    <a:lstStyle/>
-                    <a:p>
-                      <a:pPr algn="l"/>
-                      <a:r>
-                        <a:rPr sz="1000" b="0">
-                          <a:solidFill>
-                            <a:srgbClr val="1D1B43"/>
-                          </a:solidFill>
-                          <a:latin typeface="Calibri"/>
-                        </a:rPr>
-                        <a:t>14</a:t>
-                      </a:r>
-                    </a:p>
-                  </a:txBody>
-                  <a:tcPr>
-                    <a:solidFill>
-                      <a:srgbClr val="F2F2F2"/>
-                    </a:solidFill>
-                  </a:tcPr>
-                </a:tc>
-                <a:tc>
-                  <a:txBody>
-                    <a:bodyPr/>
-                    <a:lstStyle/>
-                    <a:p>
-                      <a:pPr algn="l"/>
-                      <a:r>
-                        <a:rPr sz="1000" b="0">
-                          <a:solidFill>
-                            <a:srgbClr val="1D1B43"/>
-                          </a:solidFill>
-                          <a:latin typeface="Calibri"/>
-                        </a:rPr>
-                        <a:t>14</a:t>
-                      </a:r>
-                    </a:p>
-                  </a:txBody>
-                  <a:tcPr>
-                    <a:solidFill>
-                      <a:srgbClr val="F2F2F2"/>
-                    </a:solidFill>
-                  </a:tcPr>
-                </a:tc>
-                <a:tc>
-                  <a:txBody>
-                    <a:bodyPr/>
-                    <a:lstStyle/>
-                    <a:p>
-                      <a:pPr algn="l"/>
-                      <a:r>
-                        <a:rPr sz="1000" b="0">
-                          <a:solidFill>
-                            <a:srgbClr val="1D1B43"/>
-                          </a:solidFill>
-                          <a:latin typeface="Calibri"/>
-                        </a:rPr>
-                        <a:t>0</a:t>
-                      </a:r>
-                    </a:p>
-                  </a:txBody>
-                  <a:tcPr>
-                    <a:solidFill>
-                      <a:srgbClr val="F2F2F2"/>
-                    </a:solidFill>
-                  </a:tcPr>
-                </a:tc>
-                <a:tc>
-                  <a:txBody>
-                    <a:bodyPr/>
-                    <a:lstStyle/>
-                    <a:p>
-                      <a:pPr algn="l"/>
-                      <a:r>
-                        <a:rPr sz="1000" b="0">
-                          <a:solidFill>
-                            <a:srgbClr val="1D1B43"/>
-                          </a:solidFill>
-                          <a:latin typeface="Calibri"/>
-                        </a:rPr>
-                        <a:t>100.0%</a:t>
-                      </a:r>
-                    </a:p>
-                  </a:txBody>
-                  <a:tcPr>
-                    <a:solidFill>
-                      <a:srgbClr val="F2F2F2"/>
-                    </a:solidFill>
-                  </a:tcPr>
-                </a:tc>
-                <a:tc>
-                  <a:txBody>
-                    <a:bodyPr/>
-                    <a:lstStyle/>
-                    <a:p>
-                      <a:pPr algn="l"/>
-                      <a:r>
-                        <a:rPr sz="1000" b="0">
-                          <a:solidFill>
-                            <a:srgbClr val="1D1B43"/>
-                          </a:solidFill>
-                          <a:latin typeface="Calibri"/>
-                        </a:rPr>
-                        <a:t>Excelente</a:t>
-                      </a:r>
-                    </a:p>
-                  </a:txBody>
-                  <a:tcPr>
-                    <a:solidFill>
-                      <a:srgbClr val="F2F2F2"/>
-                    </a:solidFill>
-                  </a:tcPr>
-                </a:tc>
-              </a:tr>
-              <a:tr h="457200">
-                <a:tc>
-                  <a:txBody>
-                    <a:bodyPr/>
-                    <a:lstStyle/>
-                    <a:p>
-                      <a:pPr algn="l"/>
-                      <a:r>
-                        <a:rPr sz="1000" b="0">
-                          <a:solidFill>
-                            <a:srgbClr val="1D1B43"/>
-                          </a:solidFill>
-                          <a:latin typeface="Calibri"/>
-                        </a:rPr>
-                        <a:t>PR</a:t>
-                      </a:r>
-                    </a:p>
-                  </a:txBody>
-                  <a:tcPr>
-                    <a:solidFill>
-                      <a:srgbClr val="FFFFFF"/>
-                    </a:solidFill>
-                  </a:tcPr>
-                </a:tc>
-                <a:tc>
-                  <a:txBody>
-                    <a:bodyPr/>
-                    <a:lstStyle/>
-                    <a:p>
-                      <a:pPr algn="l"/>
-                      <a:r>
-                        <a:rPr sz="1000" b="0">
-                          <a:solidFill>
-                            <a:srgbClr val="1D1B43"/>
-                          </a:solidFill>
-                          <a:latin typeface="Calibri"/>
-                        </a:rPr>
-                        <a:t>14</a:t>
-                      </a:r>
-                    </a:p>
-                  </a:txBody>
-                  <a:tcPr>
-                    <a:solidFill>
-                      <a:srgbClr val="FFFFFF"/>
-                    </a:solidFill>
-                  </a:tcPr>
-                </a:tc>
-                <a:tc>
-                  <a:txBody>
-                    <a:bodyPr/>
-                    <a:lstStyle/>
-                    <a:p>
-                      <a:pPr algn="l"/>
-                      <a:r>
-                        <a:rPr sz="1000" b="0">
-                          <a:solidFill>
-                            <a:srgbClr val="1D1B43"/>
-                          </a:solidFill>
-                          <a:latin typeface="Calibri"/>
-                        </a:rPr>
-                        <a:t>14</a:t>
-                      </a:r>
-                    </a:p>
-                  </a:txBody>
-                  <a:tcPr>
-                    <a:solidFill>
-                      <a:srgbClr val="FFFFFF"/>
-                    </a:solidFill>
-                  </a:tcPr>
-                </a:tc>
-                <a:tc>
-                  <a:txBody>
-                    <a:bodyPr/>
-                    <a:lstStyle/>
-                    <a:p>
-                      <a:pPr algn="l"/>
-                      <a:r>
-                        <a:rPr sz="1000" b="0">
-                          <a:solidFill>
-                            <a:srgbClr val="1D1B43"/>
-                          </a:solidFill>
-                          <a:latin typeface="Calibri"/>
-                        </a:rPr>
-                        <a:t>0</a:t>
-                      </a:r>
-                    </a:p>
-                  </a:txBody>
-                  <a:tcPr>
-                    <a:solidFill>
-                      <a:srgbClr val="FFFFFF"/>
-                    </a:solidFill>
-                  </a:tcPr>
-                </a:tc>
-                <a:tc>
-                  <a:txBody>
-                    <a:bodyPr/>
-                    <a:lstStyle/>
-                    <a:p>
-                      <a:pPr algn="l"/>
-                      <a:r>
-                        <a:rPr sz="1000" b="0">
-                          <a:solidFill>
-                            <a:srgbClr val="1D1B43"/>
-                          </a:solidFill>
-                          <a:latin typeface="Calibri"/>
-                        </a:rPr>
-                        <a:t>100.0%</a:t>
-                      </a:r>
-                    </a:p>
-                  </a:txBody>
-                  <a:tcPr>
-                    <a:solidFill>
-                      <a:srgbClr val="FFFFFF"/>
-                    </a:solidFill>
-                  </a:tcPr>
-                </a:tc>
-                <a:tc>
-                  <a:txBody>
-                    <a:bodyPr/>
-                    <a:lstStyle/>
-                    <a:p>
-                      <a:pPr algn="l"/>
-                      <a:r>
-                        <a:rPr sz="1000" b="0">
-                          <a:solidFill>
-                            <a:srgbClr val="1D1B43"/>
-                          </a:solidFill>
-                          <a:latin typeface="Calibri"/>
-                        </a:rPr>
-                        <a:t>Excelente</a:t>
-                      </a:r>
-                    </a:p>
-                  </a:txBody>
-                  <a:tcPr>
-                    <a:solidFill>
-                      <a:srgbClr val="FFFFFF"/>
-                    </a:solidFill>
-                  </a:tcPr>
-                </a:tc>
-              </a:tr>
-              <a:tr h="457200">
-                <a:tc>
-                  <a:txBody>
-                    <a:bodyPr/>
-                    <a:lstStyle/>
-                    <a:p>
-                      <a:pPr algn="l"/>
-                      <a:r>
-                        <a:rPr sz="1000" b="0">
-                          <a:solidFill>
-                            <a:srgbClr val="1D1B43"/>
-                          </a:solidFill>
-                          <a:latin typeface="Calibri"/>
-                        </a:rPr>
-                        <a:t>DF</a:t>
-                      </a:r>
-                    </a:p>
-                  </a:txBody>
-                  <a:tcPr>
-                    <a:solidFill>
-                      <a:srgbClr val="F2F2F2"/>
-                    </a:solidFill>
-                  </a:tcPr>
-                </a:tc>
-                <a:tc>
-                  <a:txBody>
-                    <a:bodyPr/>
-                    <a:lstStyle/>
-                    <a:p>
-                      <a:pPr algn="l"/>
-                      <a:r>
-                        <a:rPr sz="1000" b="0">
-                          <a:solidFill>
-                            <a:srgbClr val="1D1B43"/>
-                          </a:solidFill>
-                          <a:latin typeface="Calibri"/>
-                        </a:rPr>
-                        <a:t>11</a:t>
-                      </a:r>
-                    </a:p>
-                  </a:txBody>
-                  <a:tcPr>
-                    <a:solidFill>
-                      <a:srgbClr val="F2F2F2"/>
-                    </a:solidFill>
-                  </a:tcPr>
-                </a:tc>
-                <a:tc>
-                  <a:txBody>
-                    <a:bodyPr/>
-                    <a:lstStyle/>
-                    <a:p>
-                      <a:pPr algn="l"/>
-                      <a:r>
-                        <a:rPr sz="1000" b="0">
-                          <a:solidFill>
-                            <a:srgbClr val="1D1B43"/>
-                          </a:solidFill>
-                          <a:latin typeface="Calibri"/>
-                        </a:rPr>
-                        <a:t>11</a:t>
-                      </a:r>
-                    </a:p>
-                  </a:txBody>
-                  <a:tcPr>
-                    <a:solidFill>
-                      <a:srgbClr val="F2F2F2"/>
-                    </a:solidFill>
-                  </a:tcPr>
-                </a:tc>
-                <a:tc>
-                  <a:txBody>
-                    <a:bodyPr/>
-                    <a:lstStyle/>
-                    <a:p>
-                      <a:pPr algn="l"/>
-                      <a:r>
-                        <a:rPr sz="1000" b="0">
-                          <a:solidFill>
-                            <a:srgbClr val="1D1B43"/>
-                          </a:solidFill>
-                          <a:latin typeface="Calibri"/>
-                        </a:rPr>
-                        <a:t>0</a:t>
-                      </a:r>
-                    </a:p>
-                  </a:txBody>
-                  <a:tcPr>
-                    <a:solidFill>
-                      <a:srgbClr val="F2F2F2"/>
-                    </a:solidFill>
-                  </a:tcPr>
-                </a:tc>
-                <a:tc>
-                  <a:txBody>
-                    <a:bodyPr/>
-                    <a:lstStyle/>
-                    <a:p>
-                      <a:pPr algn="l"/>
-                      <a:r>
-                        <a:rPr sz="1000" b="0">
-                          <a:solidFill>
-                            <a:srgbClr val="1D1B43"/>
-                          </a:solidFill>
-                          <a:latin typeface="Calibri"/>
-                        </a:rPr>
-                        <a:t>100.0%</a:t>
-                      </a:r>
-                    </a:p>
-                  </a:txBody>
-                  <a:tcPr>
-                    <a:solidFill>
-                      <a:srgbClr val="F2F2F2"/>
-                    </a:solidFill>
-                  </a:tcPr>
-                </a:tc>
-                <a:tc>
-                  <a:txBody>
-                    <a:bodyPr/>
-                    <a:lstStyle/>
-                    <a:p>
-                      <a:pPr algn="l"/>
-                      <a:r>
-                        <a:rPr sz="1000" b="0">
-                          <a:solidFill>
-                            <a:srgbClr val="1D1B43"/>
-                          </a:solidFill>
-                          <a:latin typeface="Calibri"/>
-                        </a:rPr>
-                        <a:t>Excelente</a:t>
-                      </a:r>
-                    </a:p>
-                  </a:txBody>
-                  <a:tcPr>
-                    <a:solidFill>
-                      <a:srgbClr val="F2F2F2"/>
-                    </a:solidFill>
-                  </a:tcPr>
-                </a:tc>
-              </a:tr>
-              <a:tr h="457200">
-                <a:tc>
-                  <a:txBody>
-                    <a:bodyPr/>
-                    <a:lstStyle/>
-                    <a:p>
-                      <a:pPr algn="l"/>
-                      <a:r>
-                        <a:rPr sz="1000" b="0">
-                          <a:solidFill>
-                            <a:srgbClr val="1D1B43"/>
-                          </a:solidFill>
-                          <a:latin typeface="Calibri"/>
-                        </a:rPr>
-                        <a:t>SC</a:t>
-                      </a:r>
-                    </a:p>
-                  </a:txBody>
-                  <a:tcPr>
-                    <a:solidFill>
-                      <a:srgbClr val="FFFFFF"/>
-                    </a:solidFill>
-                  </a:tcPr>
-                </a:tc>
-                <a:tc>
-                  <a:txBody>
-                    <a:bodyPr/>
-                    <a:lstStyle/>
-                    <a:p>
-                      <a:pPr algn="l"/>
-                      <a:r>
-                        <a:rPr sz="1000" b="0">
-                          <a:solidFill>
-                            <a:srgbClr val="1D1B43"/>
-                          </a:solidFill>
-                          <a:latin typeface="Calibri"/>
-                        </a:rPr>
-                        <a:t>9</a:t>
-                      </a:r>
-                    </a:p>
-                  </a:txBody>
-                  <a:tcPr>
-                    <a:solidFill>
-                      <a:srgbClr val="FFFFFF"/>
-                    </a:solidFill>
-                  </a:tcPr>
-                </a:tc>
-                <a:tc>
-                  <a:txBody>
-                    <a:bodyPr/>
-                    <a:lstStyle/>
-                    <a:p>
-                      <a:pPr algn="l"/>
-                      <a:r>
-                        <a:rPr sz="1000" b="0">
-                          <a:solidFill>
-                            <a:srgbClr val="1D1B43"/>
-                          </a:solidFill>
-                          <a:latin typeface="Calibri"/>
-                        </a:rPr>
-                        <a:t>9</a:t>
-                      </a:r>
-                    </a:p>
-                  </a:txBody>
-                  <a:tcPr>
-                    <a:solidFill>
-                      <a:srgbClr val="FFFFFF"/>
-                    </a:solidFill>
-                  </a:tcPr>
-                </a:tc>
-                <a:tc>
-                  <a:txBody>
-                    <a:bodyPr/>
-                    <a:lstStyle/>
-                    <a:p>
-                      <a:pPr algn="l"/>
-                      <a:r>
-                        <a:rPr sz="1000" b="0">
-                          <a:solidFill>
-                            <a:srgbClr val="1D1B43"/>
-                          </a:solidFill>
-                          <a:latin typeface="Calibri"/>
-                        </a:rPr>
-                        <a:t>0</a:t>
-                      </a:r>
-                    </a:p>
-                  </a:txBody>
-                  <a:tcPr>
-                    <a:solidFill>
-                      <a:srgbClr val="FFFFFF"/>
-                    </a:solidFill>
-                  </a:tcPr>
-                </a:tc>
-                <a:tc>
-                  <a:txBody>
-                    <a:bodyPr/>
-                    <a:lstStyle/>
-                    <a:p>
-                      <a:pPr algn="l"/>
-                      <a:r>
-                        <a:rPr sz="1000" b="0">
-                          <a:solidFill>
-                            <a:srgbClr val="1D1B43"/>
-                          </a:solidFill>
-                          <a:latin typeface="Calibri"/>
-                        </a:rPr>
-                        <a:t>100.0%</a:t>
-                      </a:r>
-                    </a:p>
-                  </a:txBody>
-                  <a:tcPr>
-                    <a:solidFill>
-                      <a:srgbClr val="FFFFFF"/>
-                    </a:solidFill>
-                  </a:tcPr>
-                </a:tc>
-                <a:tc>
-                  <a:txBody>
-                    <a:bodyPr/>
-                    <a:lstStyle/>
-                    <a:p>
-                      <a:pPr algn="l"/>
-                      <a:r>
-                        <a:rPr sz="1000" b="0">
-                          <a:solidFill>
-                            <a:srgbClr val="1D1B43"/>
-                          </a:solidFill>
-                          <a:latin typeface="Calibri"/>
-                        </a:rPr>
-                        <a:t>Excelente</a:t>
-                      </a:r>
-                    </a:p>
-                  </a:txBody>
-                  <a:tcPr>
-                    <a:solidFill>
-                      <a:srgbClr val="FFFFFF"/>
-                    </a:solidFill>
-                  </a:tcPr>
-                </a:tc>
-              </a:tr>
-              <a:tr h="457200">
-                <a:tc>
-                  <a:txBody>
-                    <a:bodyPr/>
-                    <a:lstStyle/>
-                    <a:p>
-                      <a:pPr algn="l"/>
-                      <a:r>
-                        <a:rPr sz="1000" b="0">
-                          <a:solidFill>
-                            <a:srgbClr val="1D1B43"/>
-                          </a:solidFill>
-                          <a:latin typeface="Calibri"/>
-                        </a:rPr>
-                        <a:t>ES</a:t>
-                      </a:r>
-                    </a:p>
-                  </a:txBody>
-                  <a:tcPr>
-                    <a:solidFill>
-                      <a:srgbClr val="F2F2F2"/>
-                    </a:solidFill>
-                  </a:tcPr>
-                </a:tc>
-                <a:tc>
-                  <a:txBody>
-                    <a:bodyPr/>
-                    <a:lstStyle/>
-                    <a:p>
-                      <a:pPr algn="l"/>
-                      <a:r>
-                        <a:rPr sz="1000" b="0">
-                          <a:solidFill>
-                            <a:srgbClr val="1D1B43"/>
-                          </a:solidFill>
-                          <a:latin typeface="Calibri"/>
-                        </a:rPr>
-                        <a:t>9</a:t>
-                      </a:r>
-                    </a:p>
-                  </a:txBody>
-                  <a:tcPr>
-                    <a:solidFill>
-                      <a:srgbClr val="F2F2F2"/>
-                    </a:solidFill>
-                  </a:tcPr>
-                </a:tc>
-                <a:tc>
-                  <a:txBody>
-                    <a:bodyPr/>
-                    <a:lstStyle/>
-                    <a:p>
-                      <a:pPr algn="l"/>
-                      <a:r>
-                        <a:rPr sz="1000" b="0">
-                          <a:solidFill>
-                            <a:srgbClr val="1D1B43"/>
-                          </a:solidFill>
-                          <a:latin typeface="Calibri"/>
-                        </a:rPr>
-                        <a:t>9</a:t>
-                      </a:r>
-                    </a:p>
-                  </a:txBody>
-                  <a:tcPr>
-                    <a:solidFill>
-                      <a:srgbClr val="F2F2F2"/>
-                    </a:solidFill>
-                  </a:tcPr>
-                </a:tc>
-                <a:tc>
-                  <a:txBody>
-                    <a:bodyPr/>
-                    <a:lstStyle/>
-                    <a:p>
-                      <a:pPr algn="l"/>
-                      <a:r>
-                        <a:rPr sz="1000" b="0">
-                          <a:solidFill>
-                            <a:srgbClr val="1D1B43"/>
-                          </a:solidFill>
-                          <a:latin typeface="Calibri"/>
-                        </a:rPr>
-                        <a:t>0</a:t>
-                      </a:r>
-                    </a:p>
-                  </a:txBody>
-                  <a:tcPr>
-                    <a:solidFill>
-                      <a:srgbClr val="F2F2F2"/>
-                    </a:solidFill>
-                  </a:tcPr>
-                </a:tc>
-                <a:tc>
-                  <a:txBody>
-                    <a:bodyPr/>
-                    <a:lstStyle/>
-                    <a:p>
-                      <a:pPr algn="l"/>
-                      <a:r>
-                        <a:rPr sz="1000" b="0">
-                          <a:solidFill>
-                            <a:srgbClr val="1D1B43"/>
-                          </a:solidFill>
-                          <a:latin typeface="Calibri"/>
-                        </a:rPr>
-                        <a:t>100.0%</a:t>
-                      </a:r>
-                    </a:p>
-                  </a:txBody>
-                  <a:tcPr>
-                    <a:solidFill>
-                      <a:srgbClr val="F2F2F2"/>
-                    </a:solidFill>
-                  </a:tcPr>
-                </a:tc>
-                <a:tc>
-                  <a:txBody>
-                    <a:bodyPr/>
-                    <a:lstStyle/>
-                    <a:p>
-                      <a:pPr algn="l"/>
-                      <a:r>
-                        <a:rPr sz="1000" b="0">
-                          <a:solidFill>
-                            <a:srgbClr val="1D1B43"/>
-                          </a:solidFill>
-                          <a:latin typeface="Calibri"/>
-                        </a:rPr>
-                        <a:t>Excelente</a:t>
-                      </a:r>
-                    </a:p>
-                  </a:txBody>
-                  <a:tcPr>
-                    <a:solidFill>
-                      <a:srgbClr val="F2F2F2"/>
-                    </a:solidFill>
-                  </a:tcPr>
-                </a:tc>
-              </a:tr>
-              <a:tr h="457200">
-                <a:tc>
-                  <a:txBody>
-                    <a:bodyPr/>
-                    <a:lstStyle/>
-                    <a:p>
-                      <a:pPr algn="l"/>
-                      <a:r>
-                        <a:rPr sz="1000" b="0">
-                          <a:solidFill>
-                            <a:srgbClr val="1D1B43"/>
-                          </a:solidFill>
-                          <a:latin typeface="Calibri"/>
-                        </a:rPr>
-                        <a:t>MT</a:t>
-                      </a:r>
-                    </a:p>
-                  </a:txBody>
-                  <a:tcPr>
-                    <a:solidFill>
-                      <a:srgbClr val="FFFFFF"/>
-                    </a:solidFill>
-                  </a:tcPr>
-                </a:tc>
-                <a:tc>
-                  <a:txBody>
-                    <a:bodyPr/>
-                    <a:lstStyle/>
-                    <a:p>
-                      <a:pPr algn="l"/>
-                      <a:r>
-                        <a:rPr sz="1000" b="0">
-                          <a:solidFill>
-                            <a:srgbClr val="1D1B43"/>
-                          </a:solidFill>
-                          <a:latin typeface="Calibri"/>
-                        </a:rPr>
-                        <a:t>5</a:t>
-                      </a:r>
-                    </a:p>
-                  </a:txBody>
-                  <a:tcPr>
-                    <a:solidFill>
-                      <a:srgbClr val="FFFFFF"/>
-                    </a:solidFill>
-                  </a:tcPr>
-                </a:tc>
-                <a:tc>
-                  <a:txBody>
-                    <a:bodyPr/>
-                    <a:lstStyle/>
-                    <a:p>
-                      <a:pPr algn="l"/>
-                      <a:r>
-                        <a:rPr sz="1000" b="0">
-                          <a:solidFill>
-                            <a:srgbClr val="1D1B43"/>
-                          </a:solidFill>
-                          <a:latin typeface="Calibri"/>
-                        </a:rPr>
-                        <a:t>5</a:t>
-                      </a:r>
-                    </a:p>
-                  </a:txBody>
-                  <a:tcPr>
-                    <a:solidFill>
-                      <a:srgbClr val="FFFFFF"/>
-                    </a:solidFill>
-                  </a:tcPr>
-                </a:tc>
-                <a:tc>
-                  <a:txBody>
-                    <a:bodyPr/>
-                    <a:lstStyle/>
-                    <a:p>
-                      <a:pPr algn="l"/>
-                      <a:r>
-                        <a:rPr sz="1000" b="0">
-                          <a:solidFill>
-                            <a:srgbClr val="1D1B43"/>
-                          </a:solidFill>
-                          <a:latin typeface="Calibri"/>
-                        </a:rPr>
-                        <a:t>0</a:t>
-                      </a:r>
-                    </a:p>
-                  </a:txBody>
-                  <a:tcPr>
-                    <a:solidFill>
-                      <a:srgbClr val="FFFFFF"/>
-                    </a:solidFill>
-                  </a:tcPr>
-                </a:tc>
-                <a:tc>
-                  <a:txBody>
-                    <a:bodyPr/>
-                    <a:lstStyle/>
-                    <a:p>
-                      <a:pPr algn="l"/>
-                      <a:r>
-                        <a:rPr sz="1000" b="0">
-                          <a:solidFill>
-                            <a:srgbClr val="1D1B43"/>
-                          </a:solidFill>
-                          <a:latin typeface="Calibri"/>
-                        </a:rPr>
-                        <a:t>100.0%</a:t>
-                      </a:r>
-                    </a:p>
-                  </a:txBody>
-                  <a:tcPr>
-                    <a:solidFill>
-                      <a:srgbClr val="FFFFFF"/>
-                    </a:solidFill>
-                  </a:tcPr>
-                </a:tc>
-                <a:tc>
-                  <a:txBody>
-                    <a:bodyPr/>
-                    <a:lstStyle/>
-                    <a:p>
-                      <a:pPr algn="l"/>
-                      <a:r>
-                        <a:rPr sz="1000" b="0">
-                          <a:solidFill>
-                            <a:srgbClr val="1D1B43"/>
-                          </a:solidFill>
-                          <a:latin typeface="Calibri"/>
-                        </a:rPr>
-                        <a:t>Excelente</a:t>
-                      </a:r>
-                    </a:p>
-                  </a:txBody>
-                  <a:tcPr>
-                    <a:solidFill>
-                      <a:srgbClr val="FFFFFF"/>
-                    </a:solidFill>
-                  </a:tcPr>
-                </a:tc>
-              </a:tr>
-              <a:tr h="457200">
-                <a:tc>
-                  <a:txBody>
-                    <a:bodyPr/>
-                    <a:lstStyle/>
-                    <a:p>
-                      <a:pPr algn="l"/>
-                      <a:r>
-                        <a:rPr sz="1000" b="0">
-                          <a:solidFill>
-                            <a:srgbClr val="1D1B43"/>
-                          </a:solidFill>
-                          <a:latin typeface="Calibri"/>
-                        </a:rPr>
-                        <a:t>MS</a:t>
-                      </a:r>
-                    </a:p>
-                  </a:txBody>
-                  <a:tcPr>
-                    <a:solidFill>
-                      <a:srgbClr val="F2F2F2"/>
-                    </a:solidFill>
-                  </a:tcPr>
-                </a:tc>
-                <a:tc>
-                  <a:txBody>
-                    <a:bodyPr/>
-                    <a:lstStyle/>
-                    <a:p>
-                      <a:pPr algn="l"/>
-                      <a:r>
-                        <a:rPr sz="1000" b="0">
-                          <a:solidFill>
-                            <a:srgbClr val="1D1B43"/>
-                          </a:solidFill>
-                          <a:latin typeface="Calibri"/>
-                        </a:rPr>
-                        <a:t>3</a:t>
-                      </a:r>
-                    </a:p>
-                  </a:txBody>
-                  <a:tcPr>
-                    <a:solidFill>
-                      <a:srgbClr val="F2F2F2"/>
-                    </a:solidFill>
-                  </a:tcPr>
-                </a:tc>
-                <a:tc>
-                  <a:txBody>
-                    <a:bodyPr/>
-                    <a:lstStyle/>
-                    <a:p>
-                      <a:pPr algn="l"/>
-                      <a:r>
-                        <a:rPr sz="1000" b="0">
-                          <a:solidFill>
-                            <a:srgbClr val="1D1B43"/>
-                          </a:solidFill>
-                          <a:latin typeface="Calibri"/>
-                        </a:rPr>
-                        <a:t>3</a:t>
-                      </a:r>
-                    </a:p>
-                  </a:txBody>
-                  <a:tcPr>
-                    <a:solidFill>
-                      <a:srgbClr val="F2F2F2"/>
-                    </a:solidFill>
-                  </a:tcPr>
-                </a:tc>
-                <a:tc>
-                  <a:txBody>
-                    <a:bodyPr/>
-                    <a:lstStyle/>
-                    <a:p>
-                      <a:pPr algn="l"/>
-                      <a:r>
-                        <a:rPr sz="1000" b="0">
-                          <a:solidFill>
-                            <a:srgbClr val="1D1B43"/>
-                          </a:solidFill>
-                          <a:latin typeface="Calibri"/>
-                        </a:rPr>
-                        <a:t>0</a:t>
-                      </a:r>
-                    </a:p>
-                  </a:txBody>
-                  <a:tcPr>
-                    <a:solidFill>
-                      <a:srgbClr val="F2F2F2"/>
-                    </a:solidFill>
-                  </a:tcPr>
-                </a:tc>
-                <a:tc>
-                  <a:txBody>
-                    <a:bodyPr/>
-                    <a:lstStyle/>
-                    <a:p>
-                      <a:pPr algn="l"/>
-                      <a:r>
-                        <a:rPr sz="1000" b="0">
-                          <a:solidFill>
-                            <a:srgbClr val="1D1B43"/>
-                          </a:solidFill>
-                          <a:latin typeface="Calibri"/>
-                        </a:rPr>
-                        <a:t>100.0%</a:t>
-                      </a:r>
-                    </a:p>
-                  </a:txBody>
-                  <a:tcPr>
-                    <a:solidFill>
-                      <a:srgbClr val="F2F2F2"/>
-                    </a:solidFill>
-                  </a:tcPr>
-                </a:tc>
-                <a:tc>
-                  <a:txBody>
-                    <a:bodyPr/>
-                    <a:lstStyle/>
-                    <a:p>
-                      <a:pPr algn="l"/>
-                      <a:r>
-                        <a:rPr sz="1000" b="0">
-                          <a:solidFill>
-                            <a:srgbClr val="1D1B43"/>
-                          </a:solidFill>
-                          <a:latin typeface="Calibri"/>
-                        </a:rPr>
-                        <a:t>Excelente</a:t>
-                      </a:r>
-                    </a:p>
-                  </a:txBody>
-                  <a:tcPr>
-                    <a:solidFill>
-                      <a:srgbClr val="F2F2F2"/>
                     </a:solidFill>
                   </a:tcPr>
                 </a:tc>
@@ -6672,6 +5646,1284 @@
         <p:spPr>
           <a:xfrm>
             <a:off x="749808" y="502920"/>
+            <a:ext cx="9144000" cy="914400"/>
+          </a:xfrm>
+          <a:prstGeom prst="rect">
+            <a:avLst/>
+          </a:prstGeom>
+          <a:noFill/>
+        </p:spPr>
+        <p:txBody>
+          <a:bodyPr wrap="square">
+            <a:spAutoFit/>
+          </a:bodyPr>
+          <a:lstStyle/>
+          <a:p>
+            <a:pPr algn="l"/>
+            <a:r>
+              <a:rPr sz="4000" b="1">
+                <a:solidFill>
+                  <a:srgbClr val="F97316"/>
+                </a:solidFill>
+                <a:latin typeface="Calibri"/>
+              </a:rPr>
+              <a:t>PERFORMANCE POR UF</a:t>
+            </a:r>
+          </a:p>
+        </p:txBody>
+      </p:sp>
+      <p:sp>
+        <p:nvSpPr>
+          <p:cNvPr id="4" name="Rectangle 3"/>
+          <p:cNvSpPr/>
+          <p:nvPr/>
+        </p:nvSpPr>
+        <p:spPr>
+          <a:xfrm>
+            <a:off x="749808" y="1719072"/>
+            <a:ext cx="10424160" cy="36576"/>
+          </a:xfrm>
+          <a:prstGeom prst="rect">
+            <a:avLst/>
+          </a:prstGeom>
+          <a:solidFill>
+            <a:srgbClr val="F97316"/>
+          </a:solidFill>
+          <a:ln>
+            <a:noFill/>
+          </a:ln>
+        </p:spPr>
+        <p:style>
+          <a:lnRef idx="1">
+            <a:schemeClr val="accent1"/>
+          </a:lnRef>
+          <a:fillRef idx="3">
+            <a:schemeClr val="accent1"/>
+          </a:fillRef>
+          <a:effectRef idx="2">
+            <a:schemeClr val="accent1"/>
+          </a:effectRef>
+          <a:fontRef idx="minor">
+            <a:schemeClr val="lt1"/>
+          </a:fontRef>
+        </p:style>
+        <p:txBody>
+          <a:bodyPr rtlCol="0" anchor="ctr"/>
+          <a:lstStyle/>
+          <a:p>
+            <a:pPr algn="ctr"/>
+          </a:p>
+        </p:txBody>
+      </p:sp>
+      <p:graphicFrame>
+        <p:nvGraphicFramePr>
+          <p:cNvPr id="5" name="Table 4"/>
+          <p:cNvGraphicFramePr>
+            <a:graphicFrameLocks noGrp="1"/>
+          </p:cNvGraphicFramePr>
+          <p:nvPr/>
+        </p:nvGraphicFramePr>
+        <p:xfrm>
+          <a:off x="731520" y="1920240"/>
+          <a:ext cx="10698480" cy="3657600"/>
+        </p:xfrm>
+        <a:graphic>
+          <a:graphicData uri="http://schemas.openxmlformats.org/drawingml/2006/table">
+            <a:tbl>
+              <a:tblPr firstRow="1" bandRow="1">
+                <a:tableStyleId>{5C22544A-7EE6-4342-B048-85BDC9FD1C3A}</a:tableStyleId>
+              </a:tblPr>
+              <a:tblGrid>
+                <a:gridCol w="1097280"/>
+                <a:gridCol w="1645920"/>
+                <a:gridCol w="1645920"/>
+                <a:gridCol w="1645920"/>
+                <a:gridCol w="1554480"/>
+                <a:gridCol w="3108960"/>
+              </a:tblGrid>
+              <a:tr h="457200">
+                <a:tc>
+                  <a:txBody>
+                    <a:bodyPr/>
+                    <a:lstStyle/>
+                    <a:p>
+                      <a:pPr algn="ctr"/>
+                      <a:r>
+                        <a:rPr sz="1100" b="1">
+                          <a:solidFill>
+                            <a:srgbClr val="FFFFFF"/>
+                          </a:solidFill>
+                          <a:latin typeface="Calibri"/>
+                        </a:rPr>
+                        <a:t>UF</a:t>
+                      </a:r>
+                    </a:p>
+                  </a:txBody>
+                  <a:tcPr>
+                    <a:solidFill>
+                      <a:srgbClr val="1D1B43"/>
+                    </a:solidFill>
+                  </a:tcPr>
+                </a:tc>
+                <a:tc>
+                  <a:txBody>
+                    <a:bodyPr/>
+                    <a:lstStyle/>
+                    <a:p>
+                      <a:pPr algn="ctr"/>
+                      <a:r>
+                        <a:rPr sz="1100" b="1">
+                          <a:solidFill>
+                            <a:srgbClr val="FFFFFF"/>
+                          </a:solidFill>
+                          <a:latin typeface="Calibri"/>
+                        </a:rPr>
+                        <a:t>TOTAL</a:t>
+                      </a:r>
+                    </a:p>
+                  </a:txBody>
+                  <a:tcPr>
+                    <a:solidFill>
+                      <a:srgbClr val="1D1B43"/>
+                    </a:solidFill>
+                  </a:tcPr>
+                </a:tc>
+                <a:tc>
+                  <a:txBody>
+                    <a:bodyPr/>
+                    <a:lstStyle/>
+                    <a:p>
+                      <a:pPr algn="ctr"/>
+                      <a:r>
+                        <a:rPr sz="1100" b="1">
+                          <a:solidFill>
+                            <a:srgbClr val="FFFFFF"/>
+                          </a:solidFill>
+                          <a:latin typeface="Calibri"/>
+                        </a:rPr>
+                        <a:t>NO PRAZO</a:t>
+                      </a:r>
+                    </a:p>
+                  </a:txBody>
+                  <a:tcPr>
+                    <a:solidFill>
+                      <a:srgbClr val="1D1B43"/>
+                    </a:solidFill>
+                  </a:tcPr>
+                </a:tc>
+                <a:tc>
+                  <a:txBody>
+                    <a:bodyPr/>
+                    <a:lstStyle/>
+                    <a:p>
+                      <a:pPr algn="ctr"/>
+                      <a:r>
+                        <a:rPr sz="1100" b="1">
+                          <a:solidFill>
+                            <a:srgbClr val="FFFFFF"/>
+                          </a:solidFill>
+                          <a:latin typeface="Calibri"/>
+                        </a:rPr>
+                        <a:t>FORA</a:t>
+                      </a:r>
+                    </a:p>
+                  </a:txBody>
+                  <a:tcPr>
+                    <a:solidFill>
+                      <a:srgbClr val="1D1B43"/>
+                    </a:solidFill>
+                  </a:tcPr>
+                </a:tc>
+                <a:tc>
+                  <a:txBody>
+                    <a:bodyPr/>
+                    <a:lstStyle/>
+                    <a:p>
+                      <a:pPr algn="ctr"/>
+                      <a:r>
+                        <a:rPr sz="1100" b="1">
+                          <a:solidFill>
+                            <a:srgbClr val="FFFFFF"/>
+                          </a:solidFill>
+                          <a:latin typeface="Calibri"/>
+                        </a:rPr>
+                        <a:t>TAXA</a:t>
+                      </a:r>
+                    </a:p>
+                  </a:txBody>
+                  <a:tcPr>
+                    <a:solidFill>
+                      <a:srgbClr val="1D1B43"/>
+                    </a:solidFill>
+                  </a:tcPr>
+                </a:tc>
+                <a:tc>
+                  <a:txBody>
+                    <a:bodyPr/>
+                    <a:lstStyle/>
+                    <a:p>
+                      <a:pPr algn="ctr"/>
+                      <a:r>
+                        <a:rPr sz="1100" b="1">
+                          <a:solidFill>
+                            <a:srgbClr val="FFFFFF"/>
+                          </a:solidFill>
+                          <a:latin typeface="Calibri"/>
+                        </a:rPr>
+                        <a:t>STATUS</a:t>
+                      </a:r>
+                    </a:p>
+                  </a:txBody>
+                  <a:tcPr>
+                    <a:solidFill>
+                      <a:srgbClr val="1D1B43"/>
+                    </a:solidFill>
+                  </a:tcPr>
+                </a:tc>
+              </a:tr>
+              <a:tr h="457200">
+                <a:tc>
+                  <a:txBody>
+                    <a:bodyPr/>
+                    <a:lstStyle/>
+                    <a:p>
+                      <a:pPr algn="l"/>
+                      <a:r>
+                        <a:rPr sz="1000" b="0">
+                          <a:solidFill>
+                            <a:srgbClr val="1D1B43"/>
+                          </a:solidFill>
+                          <a:latin typeface="Calibri"/>
+                        </a:rPr>
+                        <a:t>RS</a:t>
+                      </a:r>
+                    </a:p>
+                  </a:txBody>
+                  <a:tcPr>
+                    <a:solidFill>
+                      <a:srgbClr val="FFFFFF"/>
+                    </a:solidFill>
+                  </a:tcPr>
+                </a:tc>
+                <a:tc>
+                  <a:txBody>
+                    <a:bodyPr/>
+                    <a:lstStyle/>
+                    <a:p>
+                      <a:pPr algn="l"/>
+                      <a:r>
+                        <a:rPr sz="1000" b="0">
+                          <a:solidFill>
+                            <a:srgbClr val="1D1B43"/>
+                          </a:solidFill>
+                          <a:latin typeface="Calibri"/>
+                        </a:rPr>
+                        <a:t>23</a:t>
+                      </a:r>
+                    </a:p>
+                  </a:txBody>
+                  <a:tcPr>
+                    <a:solidFill>
+                      <a:srgbClr val="FFFFFF"/>
+                    </a:solidFill>
+                  </a:tcPr>
+                </a:tc>
+                <a:tc>
+                  <a:txBody>
+                    <a:bodyPr/>
+                    <a:lstStyle/>
+                    <a:p>
+                      <a:pPr algn="l"/>
+                      <a:r>
+                        <a:rPr sz="1000" b="0">
+                          <a:solidFill>
+                            <a:srgbClr val="1D1B43"/>
+                          </a:solidFill>
+                          <a:latin typeface="Calibri"/>
+                        </a:rPr>
+                        <a:t>23</a:t>
+                      </a:r>
+                    </a:p>
+                  </a:txBody>
+                  <a:tcPr>
+                    <a:solidFill>
+                      <a:srgbClr val="FFFFFF"/>
+                    </a:solidFill>
+                  </a:tcPr>
+                </a:tc>
+                <a:tc>
+                  <a:txBody>
+                    <a:bodyPr/>
+                    <a:lstStyle/>
+                    <a:p>
+                      <a:pPr algn="l"/>
+                      <a:r>
+                        <a:rPr sz="1000" b="0">
+                          <a:solidFill>
+                            <a:srgbClr val="1D1B43"/>
+                          </a:solidFill>
+                          <a:latin typeface="Calibri"/>
+                        </a:rPr>
+                        <a:t>0</a:t>
+                      </a:r>
+                    </a:p>
+                  </a:txBody>
+                  <a:tcPr>
+                    <a:solidFill>
+                      <a:srgbClr val="FFFFFF"/>
+                    </a:solidFill>
+                  </a:tcPr>
+                </a:tc>
+                <a:tc>
+                  <a:txBody>
+                    <a:bodyPr/>
+                    <a:lstStyle/>
+                    <a:p>
+                      <a:pPr algn="l"/>
+                      <a:r>
+                        <a:rPr sz="1000" b="0">
+                          <a:solidFill>
+                            <a:srgbClr val="1D1B43"/>
+                          </a:solidFill>
+                          <a:latin typeface="Calibri"/>
+                        </a:rPr>
+                        <a:t>100.0%</a:t>
+                      </a:r>
+                    </a:p>
+                  </a:txBody>
+                  <a:tcPr>
+                    <a:solidFill>
+                      <a:srgbClr val="FFFFFF"/>
+                    </a:solidFill>
+                  </a:tcPr>
+                </a:tc>
+                <a:tc>
+                  <a:txBody>
+                    <a:bodyPr/>
+                    <a:lstStyle/>
+                    <a:p>
+                      <a:pPr algn="l"/>
+                      <a:r>
+                        <a:rPr sz="1000" b="0">
+                          <a:solidFill>
+                            <a:srgbClr val="1D1B43"/>
+                          </a:solidFill>
+                          <a:latin typeface="Calibri"/>
+                        </a:rPr>
+                        <a:t>Excelente</a:t>
+                      </a:r>
+                    </a:p>
+                  </a:txBody>
+                  <a:tcPr>
+                    <a:solidFill>
+                      <a:srgbClr val="FFFFFF"/>
+                    </a:solidFill>
+                  </a:tcPr>
+                </a:tc>
+              </a:tr>
+              <a:tr h="457200">
+                <a:tc>
+                  <a:txBody>
+                    <a:bodyPr/>
+                    <a:lstStyle/>
+                    <a:p>
+                      <a:pPr algn="l"/>
+                      <a:r>
+                        <a:rPr sz="1000" b="0">
+                          <a:solidFill>
+                            <a:srgbClr val="1D1B43"/>
+                          </a:solidFill>
+                          <a:latin typeface="Calibri"/>
+                        </a:rPr>
+                        <a:t>PR</a:t>
+                      </a:r>
+                    </a:p>
+                  </a:txBody>
+                  <a:tcPr>
+                    <a:solidFill>
+                      <a:srgbClr val="F2F2F2"/>
+                    </a:solidFill>
+                  </a:tcPr>
+                </a:tc>
+                <a:tc>
+                  <a:txBody>
+                    <a:bodyPr/>
+                    <a:lstStyle/>
+                    <a:p>
+                      <a:pPr algn="l"/>
+                      <a:r>
+                        <a:rPr sz="1000" b="0">
+                          <a:solidFill>
+                            <a:srgbClr val="1D1B43"/>
+                          </a:solidFill>
+                          <a:latin typeface="Calibri"/>
+                        </a:rPr>
+                        <a:t>17</a:t>
+                      </a:r>
+                    </a:p>
+                  </a:txBody>
+                  <a:tcPr>
+                    <a:solidFill>
+                      <a:srgbClr val="F2F2F2"/>
+                    </a:solidFill>
+                  </a:tcPr>
+                </a:tc>
+                <a:tc>
+                  <a:txBody>
+                    <a:bodyPr/>
+                    <a:lstStyle/>
+                    <a:p>
+                      <a:pPr algn="l"/>
+                      <a:r>
+                        <a:rPr sz="1000" b="0">
+                          <a:solidFill>
+                            <a:srgbClr val="1D1B43"/>
+                          </a:solidFill>
+                          <a:latin typeface="Calibri"/>
+                        </a:rPr>
+                        <a:t>17</a:t>
+                      </a:r>
+                    </a:p>
+                  </a:txBody>
+                  <a:tcPr>
+                    <a:solidFill>
+                      <a:srgbClr val="F2F2F2"/>
+                    </a:solidFill>
+                  </a:tcPr>
+                </a:tc>
+                <a:tc>
+                  <a:txBody>
+                    <a:bodyPr/>
+                    <a:lstStyle/>
+                    <a:p>
+                      <a:pPr algn="l"/>
+                      <a:r>
+                        <a:rPr sz="1000" b="0">
+                          <a:solidFill>
+                            <a:srgbClr val="1D1B43"/>
+                          </a:solidFill>
+                          <a:latin typeface="Calibri"/>
+                        </a:rPr>
+                        <a:t>0</a:t>
+                      </a:r>
+                    </a:p>
+                  </a:txBody>
+                  <a:tcPr>
+                    <a:solidFill>
+                      <a:srgbClr val="F2F2F2"/>
+                    </a:solidFill>
+                  </a:tcPr>
+                </a:tc>
+                <a:tc>
+                  <a:txBody>
+                    <a:bodyPr/>
+                    <a:lstStyle/>
+                    <a:p>
+                      <a:pPr algn="l"/>
+                      <a:r>
+                        <a:rPr sz="1000" b="0">
+                          <a:solidFill>
+                            <a:srgbClr val="1D1B43"/>
+                          </a:solidFill>
+                          <a:latin typeface="Calibri"/>
+                        </a:rPr>
+                        <a:t>100.0%</a:t>
+                      </a:r>
+                    </a:p>
+                  </a:txBody>
+                  <a:tcPr>
+                    <a:solidFill>
+                      <a:srgbClr val="F2F2F2"/>
+                    </a:solidFill>
+                  </a:tcPr>
+                </a:tc>
+                <a:tc>
+                  <a:txBody>
+                    <a:bodyPr/>
+                    <a:lstStyle/>
+                    <a:p>
+                      <a:pPr algn="l"/>
+                      <a:r>
+                        <a:rPr sz="1000" b="0">
+                          <a:solidFill>
+                            <a:srgbClr val="1D1B43"/>
+                          </a:solidFill>
+                          <a:latin typeface="Calibri"/>
+                        </a:rPr>
+                        <a:t>Excelente</a:t>
+                      </a:r>
+                    </a:p>
+                  </a:txBody>
+                  <a:tcPr>
+                    <a:solidFill>
+                      <a:srgbClr val="F2F2F2"/>
+                    </a:solidFill>
+                  </a:tcPr>
+                </a:tc>
+              </a:tr>
+              <a:tr h="457200">
+                <a:tc>
+                  <a:txBody>
+                    <a:bodyPr/>
+                    <a:lstStyle/>
+                    <a:p>
+                      <a:pPr algn="l"/>
+                      <a:r>
+                        <a:rPr sz="1000" b="0">
+                          <a:solidFill>
+                            <a:srgbClr val="1D1B43"/>
+                          </a:solidFill>
+                          <a:latin typeface="Calibri"/>
+                        </a:rPr>
+                        <a:t>DF</a:t>
+                      </a:r>
+                    </a:p>
+                  </a:txBody>
+                  <a:tcPr>
+                    <a:solidFill>
+                      <a:srgbClr val="FFFFFF"/>
+                    </a:solidFill>
+                  </a:tcPr>
+                </a:tc>
+                <a:tc>
+                  <a:txBody>
+                    <a:bodyPr/>
+                    <a:lstStyle/>
+                    <a:p>
+                      <a:pPr algn="l"/>
+                      <a:r>
+                        <a:rPr sz="1000" b="0">
+                          <a:solidFill>
+                            <a:srgbClr val="1D1B43"/>
+                          </a:solidFill>
+                          <a:latin typeface="Calibri"/>
+                        </a:rPr>
+                        <a:t>9</a:t>
+                      </a:r>
+                    </a:p>
+                  </a:txBody>
+                  <a:tcPr>
+                    <a:solidFill>
+                      <a:srgbClr val="FFFFFF"/>
+                    </a:solidFill>
+                  </a:tcPr>
+                </a:tc>
+                <a:tc>
+                  <a:txBody>
+                    <a:bodyPr/>
+                    <a:lstStyle/>
+                    <a:p>
+                      <a:pPr algn="l"/>
+                      <a:r>
+                        <a:rPr sz="1000" b="0">
+                          <a:solidFill>
+                            <a:srgbClr val="1D1B43"/>
+                          </a:solidFill>
+                          <a:latin typeface="Calibri"/>
+                        </a:rPr>
+                        <a:t>9</a:t>
+                      </a:r>
+                    </a:p>
+                  </a:txBody>
+                  <a:tcPr>
+                    <a:solidFill>
+                      <a:srgbClr val="FFFFFF"/>
+                    </a:solidFill>
+                  </a:tcPr>
+                </a:tc>
+                <a:tc>
+                  <a:txBody>
+                    <a:bodyPr/>
+                    <a:lstStyle/>
+                    <a:p>
+                      <a:pPr algn="l"/>
+                      <a:r>
+                        <a:rPr sz="1000" b="0">
+                          <a:solidFill>
+                            <a:srgbClr val="1D1B43"/>
+                          </a:solidFill>
+                          <a:latin typeface="Calibri"/>
+                        </a:rPr>
+                        <a:t>0</a:t>
+                      </a:r>
+                    </a:p>
+                  </a:txBody>
+                  <a:tcPr>
+                    <a:solidFill>
+                      <a:srgbClr val="FFFFFF"/>
+                    </a:solidFill>
+                  </a:tcPr>
+                </a:tc>
+                <a:tc>
+                  <a:txBody>
+                    <a:bodyPr/>
+                    <a:lstStyle/>
+                    <a:p>
+                      <a:pPr algn="l"/>
+                      <a:r>
+                        <a:rPr sz="1000" b="0">
+                          <a:solidFill>
+                            <a:srgbClr val="1D1B43"/>
+                          </a:solidFill>
+                          <a:latin typeface="Calibri"/>
+                        </a:rPr>
+                        <a:t>100.0%</a:t>
+                      </a:r>
+                    </a:p>
+                  </a:txBody>
+                  <a:tcPr>
+                    <a:solidFill>
+                      <a:srgbClr val="FFFFFF"/>
+                    </a:solidFill>
+                  </a:tcPr>
+                </a:tc>
+                <a:tc>
+                  <a:txBody>
+                    <a:bodyPr/>
+                    <a:lstStyle/>
+                    <a:p>
+                      <a:pPr algn="l"/>
+                      <a:r>
+                        <a:rPr sz="1000" b="0">
+                          <a:solidFill>
+                            <a:srgbClr val="1D1B43"/>
+                          </a:solidFill>
+                          <a:latin typeface="Calibri"/>
+                        </a:rPr>
+                        <a:t>Excelente</a:t>
+                      </a:r>
+                    </a:p>
+                  </a:txBody>
+                  <a:tcPr>
+                    <a:solidFill>
+                      <a:srgbClr val="FFFFFF"/>
+                    </a:solidFill>
+                  </a:tcPr>
+                </a:tc>
+              </a:tr>
+              <a:tr h="457200">
+                <a:tc>
+                  <a:txBody>
+                    <a:bodyPr/>
+                    <a:lstStyle/>
+                    <a:p>
+                      <a:pPr algn="l"/>
+                      <a:r>
+                        <a:rPr sz="1000" b="0">
+                          <a:solidFill>
+                            <a:srgbClr val="1D1B43"/>
+                          </a:solidFill>
+                          <a:latin typeface="Calibri"/>
+                        </a:rPr>
+                        <a:t>MT</a:t>
+                      </a:r>
+                    </a:p>
+                  </a:txBody>
+                  <a:tcPr>
+                    <a:solidFill>
+                      <a:srgbClr val="F2F2F2"/>
+                    </a:solidFill>
+                  </a:tcPr>
+                </a:tc>
+                <a:tc>
+                  <a:txBody>
+                    <a:bodyPr/>
+                    <a:lstStyle/>
+                    <a:p>
+                      <a:pPr algn="l"/>
+                      <a:r>
+                        <a:rPr sz="1000" b="0">
+                          <a:solidFill>
+                            <a:srgbClr val="1D1B43"/>
+                          </a:solidFill>
+                          <a:latin typeface="Calibri"/>
+                        </a:rPr>
+                        <a:t>8</a:t>
+                      </a:r>
+                    </a:p>
+                  </a:txBody>
+                  <a:tcPr>
+                    <a:solidFill>
+                      <a:srgbClr val="F2F2F2"/>
+                    </a:solidFill>
+                  </a:tcPr>
+                </a:tc>
+                <a:tc>
+                  <a:txBody>
+                    <a:bodyPr/>
+                    <a:lstStyle/>
+                    <a:p>
+                      <a:pPr algn="l"/>
+                      <a:r>
+                        <a:rPr sz="1000" b="0">
+                          <a:solidFill>
+                            <a:srgbClr val="1D1B43"/>
+                          </a:solidFill>
+                          <a:latin typeface="Calibri"/>
+                        </a:rPr>
+                        <a:t>8</a:t>
+                      </a:r>
+                    </a:p>
+                  </a:txBody>
+                  <a:tcPr>
+                    <a:solidFill>
+                      <a:srgbClr val="F2F2F2"/>
+                    </a:solidFill>
+                  </a:tcPr>
+                </a:tc>
+                <a:tc>
+                  <a:txBody>
+                    <a:bodyPr/>
+                    <a:lstStyle/>
+                    <a:p>
+                      <a:pPr algn="l"/>
+                      <a:r>
+                        <a:rPr sz="1000" b="0">
+                          <a:solidFill>
+                            <a:srgbClr val="1D1B43"/>
+                          </a:solidFill>
+                          <a:latin typeface="Calibri"/>
+                        </a:rPr>
+                        <a:t>0</a:t>
+                      </a:r>
+                    </a:p>
+                  </a:txBody>
+                  <a:tcPr>
+                    <a:solidFill>
+                      <a:srgbClr val="F2F2F2"/>
+                    </a:solidFill>
+                  </a:tcPr>
+                </a:tc>
+                <a:tc>
+                  <a:txBody>
+                    <a:bodyPr/>
+                    <a:lstStyle/>
+                    <a:p>
+                      <a:pPr algn="l"/>
+                      <a:r>
+                        <a:rPr sz="1000" b="0">
+                          <a:solidFill>
+                            <a:srgbClr val="1D1B43"/>
+                          </a:solidFill>
+                          <a:latin typeface="Calibri"/>
+                        </a:rPr>
+                        <a:t>100.0%</a:t>
+                      </a:r>
+                    </a:p>
+                  </a:txBody>
+                  <a:tcPr>
+                    <a:solidFill>
+                      <a:srgbClr val="F2F2F2"/>
+                    </a:solidFill>
+                  </a:tcPr>
+                </a:tc>
+                <a:tc>
+                  <a:txBody>
+                    <a:bodyPr/>
+                    <a:lstStyle/>
+                    <a:p>
+                      <a:pPr algn="l"/>
+                      <a:r>
+                        <a:rPr sz="1000" b="0">
+                          <a:solidFill>
+                            <a:srgbClr val="1D1B43"/>
+                          </a:solidFill>
+                          <a:latin typeface="Calibri"/>
+                        </a:rPr>
+                        <a:t>Excelente</a:t>
+                      </a:r>
+                    </a:p>
+                  </a:txBody>
+                  <a:tcPr>
+                    <a:solidFill>
+                      <a:srgbClr val="F2F2F2"/>
+                    </a:solidFill>
+                  </a:tcPr>
+                </a:tc>
+              </a:tr>
+              <a:tr h="457200">
+                <a:tc>
+                  <a:txBody>
+                    <a:bodyPr/>
+                    <a:lstStyle/>
+                    <a:p>
+                      <a:pPr algn="l"/>
+                      <a:r>
+                        <a:rPr sz="1000" b="0">
+                          <a:solidFill>
+                            <a:srgbClr val="1D1B43"/>
+                          </a:solidFill>
+                          <a:latin typeface="Calibri"/>
+                        </a:rPr>
+                        <a:t>MS</a:t>
+                      </a:r>
+                    </a:p>
+                  </a:txBody>
+                  <a:tcPr>
+                    <a:solidFill>
+                      <a:srgbClr val="FFFFFF"/>
+                    </a:solidFill>
+                  </a:tcPr>
+                </a:tc>
+                <a:tc>
+                  <a:txBody>
+                    <a:bodyPr/>
+                    <a:lstStyle/>
+                    <a:p>
+                      <a:pPr algn="l"/>
+                      <a:r>
+                        <a:rPr sz="1000" b="0">
+                          <a:solidFill>
+                            <a:srgbClr val="1D1B43"/>
+                          </a:solidFill>
+                          <a:latin typeface="Calibri"/>
+                        </a:rPr>
+                        <a:t>7</a:t>
+                      </a:r>
+                    </a:p>
+                  </a:txBody>
+                  <a:tcPr>
+                    <a:solidFill>
+                      <a:srgbClr val="FFFFFF"/>
+                    </a:solidFill>
+                  </a:tcPr>
+                </a:tc>
+                <a:tc>
+                  <a:txBody>
+                    <a:bodyPr/>
+                    <a:lstStyle/>
+                    <a:p>
+                      <a:pPr algn="l"/>
+                      <a:r>
+                        <a:rPr sz="1000" b="0">
+                          <a:solidFill>
+                            <a:srgbClr val="1D1B43"/>
+                          </a:solidFill>
+                          <a:latin typeface="Calibri"/>
+                        </a:rPr>
+                        <a:t>7</a:t>
+                      </a:r>
+                    </a:p>
+                  </a:txBody>
+                  <a:tcPr>
+                    <a:solidFill>
+                      <a:srgbClr val="FFFFFF"/>
+                    </a:solidFill>
+                  </a:tcPr>
+                </a:tc>
+                <a:tc>
+                  <a:txBody>
+                    <a:bodyPr/>
+                    <a:lstStyle/>
+                    <a:p>
+                      <a:pPr algn="l"/>
+                      <a:r>
+                        <a:rPr sz="1000" b="0">
+                          <a:solidFill>
+                            <a:srgbClr val="1D1B43"/>
+                          </a:solidFill>
+                          <a:latin typeface="Calibri"/>
+                        </a:rPr>
+                        <a:t>0</a:t>
+                      </a:r>
+                    </a:p>
+                  </a:txBody>
+                  <a:tcPr>
+                    <a:solidFill>
+                      <a:srgbClr val="FFFFFF"/>
+                    </a:solidFill>
+                  </a:tcPr>
+                </a:tc>
+                <a:tc>
+                  <a:txBody>
+                    <a:bodyPr/>
+                    <a:lstStyle/>
+                    <a:p>
+                      <a:pPr algn="l"/>
+                      <a:r>
+                        <a:rPr sz="1000" b="0">
+                          <a:solidFill>
+                            <a:srgbClr val="1D1B43"/>
+                          </a:solidFill>
+                          <a:latin typeface="Calibri"/>
+                        </a:rPr>
+                        <a:t>100.0%</a:t>
+                      </a:r>
+                    </a:p>
+                  </a:txBody>
+                  <a:tcPr>
+                    <a:solidFill>
+                      <a:srgbClr val="FFFFFF"/>
+                    </a:solidFill>
+                  </a:tcPr>
+                </a:tc>
+                <a:tc>
+                  <a:txBody>
+                    <a:bodyPr/>
+                    <a:lstStyle/>
+                    <a:p>
+                      <a:pPr algn="l"/>
+                      <a:r>
+                        <a:rPr sz="1000" b="0">
+                          <a:solidFill>
+                            <a:srgbClr val="1D1B43"/>
+                          </a:solidFill>
+                          <a:latin typeface="Calibri"/>
+                        </a:rPr>
+                        <a:t>Excelente</a:t>
+                      </a:r>
+                    </a:p>
+                  </a:txBody>
+                  <a:tcPr>
+                    <a:solidFill>
+                      <a:srgbClr val="FFFFFF"/>
+                    </a:solidFill>
+                  </a:tcPr>
+                </a:tc>
+              </a:tr>
+              <a:tr h="457200">
+                <a:tc>
+                  <a:txBody>
+                    <a:bodyPr/>
+                    <a:lstStyle/>
+                    <a:p>
+                      <a:pPr algn="l"/>
+                      <a:r>
+                        <a:rPr sz="1000" b="0">
+                          <a:solidFill>
+                            <a:srgbClr val="1D1B43"/>
+                          </a:solidFill>
+                          <a:latin typeface="Calibri"/>
+                        </a:rPr>
+                        <a:t>SC</a:t>
+                      </a:r>
+                    </a:p>
+                  </a:txBody>
+                  <a:tcPr>
+                    <a:solidFill>
+                      <a:srgbClr val="F2F2F2"/>
+                    </a:solidFill>
+                  </a:tcPr>
+                </a:tc>
+                <a:tc>
+                  <a:txBody>
+                    <a:bodyPr/>
+                    <a:lstStyle/>
+                    <a:p>
+                      <a:pPr algn="l"/>
+                      <a:r>
+                        <a:rPr sz="1000" b="0">
+                          <a:solidFill>
+                            <a:srgbClr val="1D1B43"/>
+                          </a:solidFill>
+                          <a:latin typeface="Calibri"/>
+                        </a:rPr>
+                        <a:t>7</a:t>
+                      </a:r>
+                    </a:p>
+                  </a:txBody>
+                  <a:tcPr>
+                    <a:solidFill>
+                      <a:srgbClr val="F2F2F2"/>
+                    </a:solidFill>
+                  </a:tcPr>
+                </a:tc>
+                <a:tc>
+                  <a:txBody>
+                    <a:bodyPr/>
+                    <a:lstStyle/>
+                    <a:p>
+                      <a:pPr algn="l"/>
+                      <a:r>
+                        <a:rPr sz="1000" b="0">
+                          <a:solidFill>
+                            <a:srgbClr val="1D1B43"/>
+                          </a:solidFill>
+                          <a:latin typeface="Calibri"/>
+                        </a:rPr>
+                        <a:t>7</a:t>
+                      </a:r>
+                    </a:p>
+                  </a:txBody>
+                  <a:tcPr>
+                    <a:solidFill>
+                      <a:srgbClr val="F2F2F2"/>
+                    </a:solidFill>
+                  </a:tcPr>
+                </a:tc>
+                <a:tc>
+                  <a:txBody>
+                    <a:bodyPr/>
+                    <a:lstStyle/>
+                    <a:p>
+                      <a:pPr algn="l"/>
+                      <a:r>
+                        <a:rPr sz="1000" b="0">
+                          <a:solidFill>
+                            <a:srgbClr val="1D1B43"/>
+                          </a:solidFill>
+                          <a:latin typeface="Calibri"/>
+                        </a:rPr>
+                        <a:t>0</a:t>
+                      </a:r>
+                    </a:p>
+                  </a:txBody>
+                  <a:tcPr>
+                    <a:solidFill>
+                      <a:srgbClr val="F2F2F2"/>
+                    </a:solidFill>
+                  </a:tcPr>
+                </a:tc>
+                <a:tc>
+                  <a:txBody>
+                    <a:bodyPr/>
+                    <a:lstStyle/>
+                    <a:p>
+                      <a:pPr algn="l"/>
+                      <a:r>
+                        <a:rPr sz="1000" b="0">
+                          <a:solidFill>
+                            <a:srgbClr val="1D1B43"/>
+                          </a:solidFill>
+                          <a:latin typeface="Calibri"/>
+                        </a:rPr>
+                        <a:t>100.0%</a:t>
+                      </a:r>
+                    </a:p>
+                  </a:txBody>
+                  <a:tcPr>
+                    <a:solidFill>
+                      <a:srgbClr val="F2F2F2"/>
+                    </a:solidFill>
+                  </a:tcPr>
+                </a:tc>
+                <a:tc>
+                  <a:txBody>
+                    <a:bodyPr/>
+                    <a:lstStyle/>
+                    <a:p>
+                      <a:pPr algn="l"/>
+                      <a:r>
+                        <a:rPr sz="1000" b="0">
+                          <a:solidFill>
+                            <a:srgbClr val="1D1B43"/>
+                          </a:solidFill>
+                          <a:latin typeface="Calibri"/>
+                        </a:rPr>
+                        <a:t>Excelente</a:t>
+                      </a:r>
+                    </a:p>
+                  </a:txBody>
+                  <a:tcPr>
+                    <a:solidFill>
+                      <a:srgbClr val="F2F2F2"/>
+                    </a:solidFill>
+                  </a:tcPr>
+                </a:tc>
+              </a:tr>
+              <a:tr h="457200">
+                <a:tc>
+                  <a:txBody>
+                    <a:bodyPr/>
+                    <a:lstStyle/>
+                    <a:p>
+                      <a:pPr algn="l"/>
+                      <a:r>
+                        <a:rPr sz="1000" b="0">
+                          <a:solidFill>
+                            <a:srgbClr val="1D1B43"/>
+                          </a:solidFill>
+                          <a:latin typeface="Calibri"/>
+                        </a:rPr>
+                        <a:t>MG</a:t>
+                      </a:r>
+                    </a:p>
+                  </a:txBody>
+                  <a:tcPr>
+                    <a:solidFill>
+                      <a:srgbClr val="FFFFFF"/>
+                    </a:solidFill>
+                  </a:tcPr>
+                </a:tc>
+                <a:tc>
+                  <a:txBody>
+                    <a:bodyPr/>
+                    <a:lstStyle/>
+                    <a:p>
+                      <a:pPr algn="l"/>
+                      <a:r>
+                        <a:rPr sz="1000" b="0">
+                          <a:solidFill>
+                            <a:srgbClr val="1D1B43"/>
+                          </a:solidFill>
+                          <a:latin typeface="Calibri"/>
+                        </a:rPr>
+                        <a:t>6</a:t>
+                      </a:r>
+                    </a:p>
+                  </a:txBody>
+                  <a:tcPr>
+                    <a:solidFill>
+                      <a:srgbClr val="FFFFFF"/>
+                    </a:solidFill>
+                  </a:tcPr>
+                </a:tc>
+                <a:tc>
+                  <a:txBody>
+                    <a:bodyPr/>
+                    <a:lstStyle/>
+                    <a:p>
+                      <a:pPr algn="l"/>
+                      <a:r>
+                        <a:rPr sz="1000" b="0">
+                          <a:solidFill>
+                            <a:srgbClr val="1D1B43"/>
+                          </a:solidFill>
+                          <a:latin typeface="Calibri"/>
+                        </a:rPr>
+                        <a:t>5</a:t>
+                      </a:r>
+                    </a:p>
+                  </a:txBody>
+                  <a:tcPr>
+                    <a:solidFill>
+                      <a:srgbClr val="FFFFFF"/>
+                    </a:solidFill>
+                  </a:tcPr>
+                </a:tc>
+                <a:tc>
+                  <a:txBody>
+                    <a:bodyPr/>
+                    <a:lstStyle/>
+                    <a:p>
+                      <a:pPr algn="l"/>
+                      <a:r>
+                        <a:rPr sz="1000" b="0">
+                          <a:solidFill>
+                            <a:srgbClr val="1D1B43"/>
+                          </a:solidFill>
+                          <a:latin typeface="Calibri"/>
+                        </a:rPr>
+                        <a:t>1</a:t>
+                      </a:r>
+                    </a:p>
+                  </a:txBody>
+                  <a:tcPr>
+                    <a:solidFill>
+                      <a:srgbClr val="FFFFFF"/>
+                    </a:solidFill>
+                  </a:tcPr>
+                </a:tc>
+                <a:tc>
+                  <a:txBody>
+                    <a:bodyPr/>
+                    <a:lstStyle/>
+                    <a:p>
+                      <a:pPr algn="l"/>
+                      <a:r>
+                        <a:rPr sz="1000" b="0">
+                          <a:solidFill>
+                            <a:srgbClr val="1D1B43"/>
+                          </a:solidFill>
+                          <a:latin typeface="Calibri"/>
+                        </a:rPr>
+                        <a:t>83.3%</a:t>
+                      </a:r>
+                    </a:p>
+                  </a:txBody>
+                  <a:tcPr>
+                    <a:solidFill>
+                      <a:srgbClr val="FFFFFF"/>
+                    </a:solidFill>
+                  </a:tcPr>
+                </a:tc>
+                <a:tc>
+                  <a:txBody>
+                    <a:bodyPr/>
+                    <a:lstStyle/>
+                    <a:p>
+                      <a:pPr algn="l"/>
+                      <a:r>
+                        <a:rPr sz="1000" b="0">
+                          <a:solidFill>
+                            <a:srgbClr val="1D1B43"/>
+                          </a:solidFill>
+                          <a:latin typeface="Calibri"/>
+                        </a:rPr>
+                        <a:t>Atencao</a:t>
+                      </a:r>
+                    </a:p>
+                  </a:txBody>
+                  <a:tcPr>
+                    <a:solidFill>
+                      <a:srgbClr val="FFFFFF"/>
+                    </a:solidFill>
+                  </a:tcPr>
+                </a:tc>
+              </a:tr>
+            </a:tbl>
+          </a:graphicData>
+        </a:graphic>
+      </p:graphicFrame>
+    </p:spTree>
+  </p:cSld>
+  <p:clrMapOvr>
+    <a:masterClrMapping/>
+  </p:clrMapOvr>
+</p:sld>
+</file>
+
+<file path=ppt/slides/slide6.xml><?xml version="1.0" encoding="utf-8"?>
+<p:sld xmlns:a="http://schemas.openxmlformats.org/drawingml/2006/main" xmlns:p="http://schemas.openxmlformats.org/presentationml/2006/main" xmlns:r="http://schemas.openxmlformats.org/officeDocument/2006/relationships">
+  <p:cSld>
+    <p:bg>
+      <p:bgPr>
+        <a:solidFill>
+          <a:srgbClr val="FFFFFF"/>
+        </a:solidFill>
+        <a:effectLst/>
+      </p:bgPr>
+    </p:bg>
+    <p:spTree>
+      <p:nvGrpSpPr>
+        <p:cNvPr id="1" name=""/>
+        <p:cNvGrpSpPr/>
+        <p:nvPr/>
+      </p:nvGrpSpPr>
+      <p:grpSpPr/>
+      <p:pic>
+        <p:nvPicPr>
+          <p:cNvPr id="2" name="Picture 1" descr="slide2_img3.png"/>
+          <p:cNvPicPr>
+            <a:picLocks noChangeAspect="1"/>
+          </p:cNvPicPr>
+          <p:nvPr/>
+        </p:nvPicPr>
+        <p:blipFill>
+          <a:blip r:embed="rId2"/>
+          <a:stretch>
+            <a:fillRect/>
+          </a:stretch>
+        </p:blipFill>
+        <p:spPr>
+          <a:xfrm>
+            <a:off x="10661904" y="155448"/>
+            <a:ext cx="1380744" cy="667512"/>
+          </a:xfrm>
+          <a:prstGeom prst="rect">
+            <a:avLst/>
+          </a:prstGeom>
+        </p:spPr>
+      </p:pic>
+      <p:sp>
+        <p:nvSpPr>
+          <p:cNvPr id="3" name="TextBox 2"/>
+          <p:cNvSpPr txBox="1"/>
+          <p:nvPr/>
+        </p:nvSpPr>
+        <p:spPr>
+          <a:xfrm>
+            <a:off x="749808" y="502920"/>
             <a:ext cx="10058400" cy="914400"/>
           </a:xfrm>
           <a:prstGeom prst="rect">
@@ -6693,7 +6945,7 @@
                 </a:solidFill>
                 <a:latin typeface="Calibri"/>
               </a:rPr>
-              <a:t>TOP DESTINATARIOS (54 pontos)</a:t>
+              <a:t>TOP DESTINATARIOS (53 pontos)</a:t>
             </a:r>
           </a:p>
         </p:txBody>
@@ -6968,7 +7220,7 @@
                           </a:solidFill>
                           <a:latin typeface="Calibri"/>
                         </a:rPr>
-                        <a:t>AMAZONSERVICOS DE VA - BRASILIA / DF</a:t>
+                        <a:t>RI HAPPY BRINQUEDOS - BRASILIA / DF</a:t>
                       </a:r>
                     </a:p>
                   </a:txBody>
@@ -6991,7 +7243,7 @@
                           </a:solidFill>
                           <a:latin typeface="Calibri"/>
                         </a:rPr>
-                        <a:t>6</a:t>
+                        <a:t>5</a:t>
                       </a:r>
                     </a:p>
                   </a:txBody>
@@ -7014,7 +7266,7 @@
                           </a:solidFill>
                           <a:latin typeface="Calibri"/>
                         </a:rPr>
-                        <a:t>6</a:t>
+                        <a:t>5</a:t>
                       </a:r>
                     </a:p>
                   </a:txBody>
@@ -7131,7 +7383,7 @@
                           </a:solidFill>
                           <a:latin typeface="Calibri"/>
                         </a:rPr>
-                        <a:t>DEYCON COM E DISTRIB - VARZEA GRANDE / MT</a:t>
+                        <a:t>MATTEL DO BRASIL LTD - NAVEGANTES / SC</a:t>
                       </a:r>
                     </a:p>
                   </a:txBody>
@@ -7154,7 +7406,7 @@
                           </a:solidFill>
                           <a:latin typeface="Calibri"/>
                         </a:rPr>
-                        <a:t>5</a:t>
+                        <a:t>4</a:t>
                       </a:r>
                     </a:p>
                   </a:txBody>
@@ -7177,7 +7429,7 @@
                           </a:solidFill>
                           <a:latin typeface="Calibri"/>
                         </a:rPr>
-                        <a:t>5</a:t>
+                        <a:t>4</a:t>
                       </a:r>
                     </a:p>
                   </a:txBody>
@@ -7294,7 +7546,7 @@
                           </a:solidFill>
                           <a:latin typeface="Calibri"/>
                         </a:rPr>
-                        <a:t>DEYCON COM E DISTRIB - IBIPORA / PR</a:t>
+                        <a:t>AMAZONSERVICOS DE VA - BRASILIA / DF</a:t>
                       </a:r>
                     </a:p>
                   </a:txBody>
@@ -7457,7 +7709,7 @@
                           </a:solidFill>
                           <a:latin typeface="Calibri"/>
                         </a:rPr>
-                        <a:t>DEYCON COM E DISTRIB - SAO JOSE DOS PINHAIS / PR</a:t>
+                        <a:t>AMAZON SERVICOS DE V - NOVA SANTA RITA / RS</a:t>
                       </a:r>
                     </a:p>
                   </a:txBody>
@@ -7480,7 +7732,7 @@
                           </a:solidFill>
                           <a:latin typeface="Calibri"/>
                         </a:rPr>
-                        <a:t>4</a:t>
+                        <a:t>3</a:t>
                       </a:r>
                     </a:p>
                   </a:txBody>
@@ -7503,7 +7755,7 @@
                           </a:solidFill>
                           <a:latin typeface="Calibri"/>
                         </a:rPr>
-                        <a:t>4</a:t>
+                        <a:t>3</a:t>
                       </a:r>
                     </a:p>
                   </a:txBody>
@@ -7620,7 +7872,7 @@
                           </a:solidFill>
                           <a:latin typeface="Calibri"/>
                         </a:rPr>
-                        <a:t>CIA ZAFFARI COM IND - PORTO ALEGRE / RS</a:t>
+                        <a:t>AMAZON SERVICOS DE V - BETIM / MG</a:t>
                       </a:r>
                     </a:p>
                   </a:txBody>
@@ -7666,7 +7918,7 @@
                           </a:solidFill>
                           <a:latin typeface="Calibri"/>
                         </a:rPr>
-                        <a:t>3</a:t>
+                        <a:t>2</a:t>
                       </a:r>
                     </a:p>
                   </a:txBody>
@@ -7689,7 +7941,7 @@
                           </a:solidFill>
                           <a:latin typeface="Calibri"/>
                         </a:rPr>
-                        <a:t>0</a:t>
+                        <a:t>1</a:t>
                       </a:r>
                     </a:p>
                   </a:txBody>
@@ -7712,7 +7964,7 @@
                           </a:solidFill>
                           <a:latin typeface="Calibri"/>
                         </a:rPr>
-                        <a:t>100.0%</a:t>
+                        <a:t>66.7%</a:t>
                       </a:r>
                     </a:p>
                   </a:txBody>
@@ -7735,7 +7987,7 @@
                           </a:solidFill>
                           <a:latin typeface="Calibri"/>
                         </a:rPr>
-                        <a:t>Excelente</a:t>
+                        <a:t>Atencao</a:t>
                       </a:r>
                     </a:p>
                   </a:txBody>
@@ -7783,7 +8035,7 @@
                           </a:solidFill>
                           <a:latin typeface="Calibri"/>
                         </a:rPr>
-                        <a:t>AMAZON SERVICOS DE V - BETIM / MG</a:t>
+                        <a:t>COMERCIO DE MEDICAME - GRAVATAI / RS</a:t>
                       </a:r>
                     </a:p>
                   </a:txBody>
@@ -7806,7 +8058,7 @@
                           </a:solidFill>
                           <a:latin typeface="Calibri"/>
                         </a:rPr>
-                        <a:t>3</a:t>
+                        <a:t>2</a:t>
                       </a:r>
                     </a:p>
                   </a:txBody>
@@ -7829,7 +8081,7 @@
                           </a:solidFill>
                           <a:latin typeface="Calibri"/>
                         </a:rPr>
-                        <a:t>3</a:t>
+                        <a:t>2</a:t>
                       </a:r>
                     </a:p>
                   </a:txBody>
@@ -7946,7 +8198,7 @@
                           </a:solidFill>
                           <a:latin typeface="Calibri"/>
                         </a:rPr>
-                        <a:t>FIORELO PEGORARO COM - JOACABA / SC</a:t>
+                        <a:t>GSW UTENSILIOS LTDA - MONTENEGRO / RS</a:t>
                       </a:r>
                     </a:p>
                   </a:txBody>
@@ -7969,7 +8221,7 @@
                           </a:solidFill>
                           <a:latin typeface="Calibri"/>
                         </a:rPr>
-                        <a:t>3</a:t>
+                        <a:t>2</a:t>
                       </a:r>
                     </a:p>
                   </a:txBody>
@@ -7992,7 +8244,7 @@
                           </a:solidFill>
                           <a:latin typeface="Calibri"/>
                         </a:rPr>
-                        <a:t>3</a:t>
+                        <a:t>2</a:t>
                       </a:r>
                     </a:p>
                   </a:txBody>
@@ -8109,7 +8361,7 @@
                           </a:solidFill>
                           <a:latin typeface="Calibri"/>
                         </a:rPr>
-                        <a:t>SANTA CRUZ COM ATAC - BRASILIA / DF</a:t>
+                        <a:t>T14 COM BRINQ ACESS - FOZ DO IGUACU / PR</a:t>
                       </a:r>
                     </a:p>
                   </a:txBody>
@@ -8132,7 +8384,7 @@
                           </a:solidFill>
                           <a:latin typeface="Calibri"/>
                         </a:rPr>
-                        <a:t>3</a:t>
+                        <a:t>2</a:t>
                       </a:r>
                     </a:p>
                   </a:txBody>
@@ -8155,7 +8407,7 @@
                           </a:solidFill>
                           <a:latin typeface="Calibri"/>
                         </a:rPr>
-                        <a:t>3</a:t>
+                        <a:t>2</a:t>
                       </a:r>
                     </a:p>
                   </a:txBody>
@@ -8272,7 +8524,7 @@
                           </a:solidFill>
                           <a:latin typeface="Calibri"/>
                         </a:rPr>
-                        <a:t>COM JAUER BRINQ M E - GARIBALDI / RS</a:t>
+                        <a:t>SUPER MIX COM BRINQ - CUIABA / MT</a:t>
                       </a:r>
                     </a:p>
                   </a:txBody>
@@ -8435,7 +8687,7 @@
                           </a:solidFill>
                           <a:latin typeface="Calibri"/>
                         </a:rPr>
-                        <a:t>DEYCON COM E DISTRIB - JOACABA / SC</a:t>
+                        <a:t>SUPER MIX COM DE BRI - CUIABA / MT</a:t>
                       </a:r>
                     </a:p>
                   </a:txBody>
@@ -8598,7 +8850,7 @@
                           </a:solidFill>
                           <a:latin typeface="Calibri"/>
                         </a:rPr>
-                        <a:t>FABIO J R DOS SANTOS - CURITIBA / PR</a:t>
+                        <a:t>RI HAPPY BRINQUEDOS - CUIABA / MT</a:t>
                       </a:r>
                     </a:p>
                   </a:txBody>
@@ -8761,7 +9013,7 @@
                           </a:solidFill>
                           <a:latin typeface="Calibri"/>
                         </a:rPr>
-                        <a:t>PEGORARO DEYCON COM - PASSO FUNDO / RS</a:t>
+                        <a:t>RI HAPPY BRINQUEDOS - CAMPO GRANDE / MS</a:t>
                       </a:r>
                     </a:p>
                   </a:txBody>
@@ -8924,7 +9176,7 @@
                           </a:solidFill>
                           <a:latin typeface="Calibri"/>
                         </a:rPr>
-                        <a:t>MAGAZINE LUIZA S/A - ARAUCARIA / PR</a:t>
+                        <a:t>CIA ZAFFARI COM IND - PORTO ALEGRE / RS</a:t>
                       </a:r>
                     </a:p>
                   </a:txBody>
@@ -9087,7 +9339,7 @@
                           </a:solidFill>
                           <a:latin typeface="Calibri"/>
                         </a:rPr>
-                        <a:t>AMAZON SERVICOS DE V - NOVA SANTA RITA / RS</a:t>
+                        <a:t>T14 COM BRINQ ACES E - LONDRINA / PR</a:t>
                       </a:r>
                     </a:p>
                   </a:txBody>
@@ -9225,7 +9477,7 @@
 </p:sld>
 </file>
 
-<file path=ppt/slides/slide6.xml><?xml version="1.0" encoding="utf-8"?>
+<file path=ppt/slides/slide7.xml><?xml version="1.0" encoding="utf-8"?>
 <p:sld xmlns:a="http://schemas.openxmlformats.org/drawingml/2006/main" xmlns:p="http://schemas.openxmlformats.org/presentationml/2006/main" xmlns:r="http://schemas.openxmlformats.org/officeDocument/2006/relationships">
   <p:cSld>
     <p:bg>

--- a/MATTEL_DO_BRASIL_LTDA.pptx
+++ b/MATTEL_DO_BRASIL_LTDA.pptx
@@ -143,29 +143,23 @@
           </c:spPr>
           <c:cat>
             <c:strRef>
-              <c:f>Sheet1!$A$2:$A$3</c:f>
+              <c:f>Sheet1!$A$2:$A$2</c:f>
               <c:strCache>
-                <c:ptCount val="2"/>
+                <c:ptCount val="1"/>
                 <c:pt idx="0">
                   <c:v>Abril 2026</c:v>
-                </c:pt>
-                <c:pt idx="1">
-                  <c:v>Maio 2026</c:v>
                 </c:pt>
               </c:strCache>
             </c:strRef>
           </c:cat>
           <c:val>
             <c:numRef>
-              <c:f>Sheet1!$B$2:$B$3</c:f>
+              <c:f>Sheet1!$B$2:$B$2</c:f>
               <c:numCache>
                 <c:formatCode>General</c:formatCode>
-                <c:ptCount val="2"/>
+                <c:ptCount val="1"/>
                 <c:pt idx="0">
-                  <c:v>88</c:v>
-                </c:pt>
-                <c:pt idx="1">
-                  <c:v>76</c:v>
+                  <c:v>118</c:v>
                 </c:pt>
               </c:numCache>
             </c:numRef>
@@ -192,29 +186,23 @@
           </c:spPr>
           <c:cat>
             <c:strRef>
-              <c:f>Sheet1!$A$2:$A$3</c:f>
+              <c:f>Sheet1!$A$2:$A$2</c:f>
               <c:strCache>
-                <c:ptCount val="2"/>
+                <c:ptCount val="1"/>
                 <c:pt idx="0">
                   <c:v>Abril 2026</c:v>
-                </c:pt>
-                <c:pt idx="1">
-                  <c:v>Maio 2026</c:v>
                 </c:pt>
               </c:strCache>
             </c:strRef>
           </c:cat>
           <c:val>
             <c:numRef>
-              <c:f>Sheet1!$C$2:$C$3</c:f>
+              <c:f>Sheet1!$C$2:$C$2</c:f>
               <c:numCache>
                 <c:formatCode>General</c:formatCode>
-                <c:ptCount val="2"/>
+                <c:ptCount val="1"/>
                 <c:pt idx="0">
                   <c:v>2</c:v>
-                </c:pt>
-                <c:pt idx="1">
-                  <c:v>1</c:v>
                 </c:pt>
               </c:numCache>
             </c:numRef>
@@ -3387,7 +3375,7 @@
                 </a:solidFill>
                 <a:latin typeface="Calibri"/>
               </a:rPr>
-              <a:t>INDICADORES MAIO 2026</a:t>
+              <a:t>INDICADORES ABRIL 2026</a:t>
             </a:r>
           </a:p>
         </p:txBody>
@@ -3494,14 +3482,13 @@
           <a:p>
             <a:pPr algn="ctr"/>
             <a:r>
-              <a:rPr sz="1600" b="1">
+              <a:rPr sz="1400" b="1">
                 <a:solidFill>
                   <a:srgbClr val="FFFFFF"/>
                 </a:solidFill>
                 <a:latin typeface="Calibri"/>
               </a:rPr>
-              <a:t>Nossa rota e ir alem das
-entregas!</a:t>
+              <a:t>Nossa rota e ir alem das entregas!</a:t>
             </a:r>
           </a:p>
         </p:txBody>
@@ -3709,7 +3696,7 @@
                 </a:solidFill>
                 <a:latin typeface="Calibri"/>
               </a:rPr>
-              <a:t>77</a:t>
+              <a:t>120</a:t>
             </a:r>
           </a:p>
         </p:txBody>
@@ -3824,7 +3811,7 @@
                 </a:solidFill>
                 <a:latin typeface="Calibri"/>
               </a:rPr>
-              <a:t>76</a:t>
+              <a:t>118</a:t>
             </a:r>
           </a:p>
         </p:txBody>
@@ -3939,7 +3926,7 @@
                 </a:solidFill>
                 <a:latin typeface="Calibri"/>
               </a:rPr>
-              <a:t>1</a:t>
+              <a:t>2</a:t>
             </a:r>
           </a:p>
         </p:txBody>
@@ -4054,7 +4041,7 @@
                 </a:solidFill>
                 <a:latin typeface="Calibri"/>
               </a:rPr>
-              <a:t>98.7%</a:t>
+              <a:t>98.3%</a:t>
             </a:r>
           </a:p>
         </p:txBody>
@@ -4155,30 +4142,30 @@
                           </a:solidFill>
                           <a:latin typeface="Calibri"/>
                         </a:rPr>
+                        <a:t>Marco 2026</a:t>
+                      </a:r>
+                    </a:p>
+                  </a:txBody>
+                  <a:tcPr>
+                    <a:solidFill>
+                      <a:srgbClr val="1D1B43"/>
+                    </a:solidFill>
+                  </a:tcPr>
+                </a:tc>
+                <a:tc>
+                  <a:txBody>
+                    <a:bodyPr/>
+                    <a:lstStyle/>
+                    <a:p>
+                      <a:pPr algn="ctr"/>
+                      <a:r>
+                        <a:rPr sz="1100" b="1">
+                          <a:solidFill>
+                            <a:srgbClr val="FFFFFF"/>
+                          </a:solidFill>
+                          <a:latin typeface="Calibri"/>
+                        </a:rPr>
                         <a:t>Abril 2026</a:t>
-                      </a:r>
-                    </a:p>
-                  </a:txBody>
-                  <a:tcPr>
-                    <a:solidFill>
-                      <a:srgbClr val="1D1B43"/>
-                    </a:solidFill>
-                  </a:tcPr>
-                </a:tc>
-                <a:tc>
-                  <a:txBody>
-                    <a:bodyPr/>
-                    <a:lstStyle/>
-                    <a:p>
-                      <a:pPr algn="ctr"/>
-                      <a:r>
-                        <a:rPr sz="1100" b="1">
-                          <a:solidFill>
-                            <a:srgbClr val="FFFFFF"/>
-                          </a:solidFill>
-                          <a:latin typeface="Calibri"/>
-                        </a:rPr>
-                        <a:t>Maio 2026</a:t>
                       </a:r>
                     </a:p>
                   </a:txBody>
@@ -4249,7 +4236,7 @@
                           </a:solidFill>
                           <a:latin typeface="Calibri"/>
                         </a:rPr>
-                        <a:t>90</a:t>
+                        <a:t>-</a:t>
                       </a:r>
                     </a:p>
                   </a:txBody>
@@ -4272,7 +4259,7 @@
                           </a:solidFill>
                           <a:latin typeface="Calibri"/>
                         </a:rPr>
-                        <a:t>77</a:t>
+                        <a:t>120</a:t>
                       </a:r>
                     </a:p>
                   </a:txBody>
@@ -4295,7 +4282,7 @@
                           </a:solidFill>
                           <a:latin typeface="Calibri"/>
                         </a:rPr>
-                        <a:t>- 13</a:t>
+                        <a:t>-</a:t>
                       </a:r>
                     </a:p>
                   </a:txBody>
@@ -4343,7 +4330,7 @@
                           </a:solidFill>
                           <a:latin typeface="Calibri"/>
                         </a:rPr>
-                        <a:t>88</a:t>
+                        <a:t>-</a:t>
                       </a:r>
                     </a:p>
                   </a:txBody>
@@ -4366,7 +4353,7 @@
                           </a:solidFill>
                           <a:latin typeface="Calibri"/>
                         </a:rPr>
-                        <a:t>76</a:t>
+                        <a:t>118</a:t>
                       </a:r>
                     </a:p>
                   </a:txBody>
@@ -4389,7 +4376,7 @@
                           </a:solidFill>
                           <a:latin typeface="Calibri"/>
                         </a:rPr>
-                        <a:t>- 12</a:t>
+                        <a:t>-</a:t>
                       </a:r>
                     </a:p>
                   </a:txBody>
@@ -4437,6 +4424,29 @@
                           </a:solidFill>
                           <a:latin typeface="Calibri"/>
                         </a:rPr>
+                        <a:t>-</a:t>
+                      </a:r>
+                    </a:p>
+                  </a:txBody>
+                  <a:tcPr>
+                    <a:solidFill>
+                      <a:srgbClr val="FFFFFF"/>
+                    </a:solidFill>
+                  </a:tcPr>
+                </a:tc>
+                <a:tc>
+                  <a:txBody>
+                    <a:bodyPr/>
+                    <a:lstStyle/>
+                    <a:p>
+                      <a:pPr algn="l"/>
+                      <a:r>
+                        <a:rPr sz="1000" b="0">
+                          <a:solidFill>
+                            <a:srgbClr val="1D1B43"/>
+                          </a:solidFill>
+                          <a:latin typeface="Calibri"/>
+                        </a:rPr>
                         <a:t>2</a:t>
                       </a:r>
                     </a:p>
@@ -4460,30 +4470,7 @@
                           </a:solidFill>
                           <a:latin typeface="Calibri"/>
                         </a:rPr>
-                        <a:t>1</a:t>
-                      </a:r>
-                    </a:p>
-                  </a:txBody>
-                  <a:tcPr>
-                    <a:solidFill>
-                      <a:srgbClr val="FFFFFF"/>
-                    </a:solidFill>
-                  </a:tcPr>
-                </a:tc>
-                <a:tc>
-                  <a:txBody>
-                    <a:bodyPr/>
-                    <a:lstStyle/>
-                    <a:p>
-                      <a:pPr algn="l"/>
-                      <a:r>
-                        <a:rPr sz="1000" b="0">
-                          <a:solidFill>
-                            <a:srgbClr val="1D1B43"/>
-                          </a:solidFill>
-                          <a:latin typeface="Calibri"/>
-                        </a:rPr>
-                        <a:t>- 1</a:t>
+                        <a:t>-</a:t>
                       </a:r>
                     </a:p>
                   </a:txBody>
@@ -4531,7 +4518,7 @@
                           </a:solidFill>
                           <a:latin typeface="Calibri"/>
                         </a:rPr>
-                        <a:t>97.8%</a:t>
+                        <a:t>-</a:t>
                       </a:r>
                     </a:p>
                   </a:txBody>
@@ -4554,7 +4541,7 @@
                           </a:solidFill>
                           <a:latin typeface="Calibri"/>
                         </a:rPr>
-                        <a:t>98.7%</a:t>
+                        <a:t>98.3%</a:t>
                       </a:r>
                     </a:p>
                   </a:txBody>
@@ -4577,7 +4564,7 @@
                           </a:solidFill>
                           <a:latin typeface="Calibri"/>
                         </a:rPr>
-                        <a:t>+ 0.9pp</a:t>
+                        <a:t>-</a:t>
                       </a:r>
                     </a:p>
                   </a:txBody>
@@ -4748,7 +4735,7 @@
         </p:nvGraphicFramePr>
         <p:xfrm>
           <a:off x="7955279" y="2286000"/>
-          <a:ext cx="4480560" cy="1316736"/>
+          <a:ext cx="4480560" cy="877824"/>
         </p:xfrm>
         <a:graphic>
           <a:graphicData uri="http://schemas.openxmlformats.org/drawingml/2006/table">
@@ -4917,7 +4904,7 @@
                           </a:solidFill>
                           <a:latin typeface="Calibri"/>
                         </a:rPr>
-                        <a:t>90</a:t>
+                        <a:t>120</a:t>
                       </a:r>
                     </a:p>
                   </a:txBody>
@@ -4940,7 +4927,7 @@
                           </a:solidFill>
                           <a:latin typeface="Calibri"/>
                         </a:rPr>
-                        <a:t>88</a:t>
+                        <a:t>118</a:t>
                       </a:r>
                     </a:p>
                   </a:txBody>
@@ -4986,130 +4973,13 @@
                           </a:solidFill>
                           <a:latin typeface="Calibri"/>
                         </a:rPr>
-                        <a:t>97.8%</a:t>
+                        <a:t>98.3%</a:t>
                       </a:r>
                     </a:p>
                   </a:txBody>
                   <a:tcPr>
                     <a:solidFill>
                       <a:srgbClr val="FFFFFF"/>
-                    </a:solidFill>
-                  </a:tcPr>
-                </a:tc>
-              </a:tr>
-              <a:tr h="438912">
-                <a:tc>
-                  <a:txBody>
-                    <a:bodyPr/>
-                    <a:lstStyle/>
-                    <a:p>
-                      <a:pPr algn="l"/>
-                      <a:r>
-                        <a:rPr sz="1000" b="0">
-                          <a:solidFill>
-                            <a:srgbClr val="1D1B43"/>
-                          </a:solidFill>
-                          <a:latin typeface="Calibri"/>
-                        </a:rPr>
-                        <a:t>Maio 2026</a:t>
-                      </a:r>
-                    </a:p>
-                  </a:txBody>
-                  <a:tcPr>
-                    <a:solidFill>
-                      <a:srgbClr val="F2F2F2"/>
-                    </a:solidFill>
-                  </a:tcPr>
-                </a:tc>
-                <a:tc>
-                  <a:txBody>
-                    <a:bodyPr/>
-                    <a:lstStyle/>
-                    <a:p>
-                      <a:pPr algn="l"/>
-                      <a:r>
-                        <a:rPr sz="1000" b="0">
-                          <a:solidFill>
-                            <a:srgbClr val="1D1B43"/>
-                          </a:solidFill>
-                          <a:latin typeface="Calibri"/>
-                        </a:rPr>
-                        <a:t>77</a:t>
-                      </a:r>
-                    </a:p>
-                  </a:txBody>
-                  <a:tcPr>
-                    <a:solidFill>
-                      <a:srgbClr val="F2F2F2"/>
-                    </a:solidFill>
-                  </a:tcPr>
-                </a:tc>
-                <a:tc>
-                  <a:txBody>
-                    <a:bodyPr/>
-                    <a:lstStyle/>
-                    <a:p>
-                      <a:pPr algn="l"/>
-                      <a:r>
-                        <a:rPr sz="1000" b="0">
-                          <a:solidFill>
-                            <a:srgbClr val="1D1B43"/>
-                          </a:solidFill>
-                          <a:latin typeface="Calibri"/>
-                        </a:rPr>
-                        <a:t>76</a:t>
-                      </a:r>
-                    </a:p>
-                  </a:txBody>
-                  <a:tcPr>
-                    <a:solidFill>
-                      <a:srgbClr val="F2F2F2"/>
-                    </a:solidFill>
-                  </a:tcPr>
-                </a:tc>
-                <a:tc>
-                  <a:txBody>
-                    <a:bodyPr/>
-                    <a:lstStyle/>
-                    <a:p>
-                      <a:pPr algn="l"/>
-                      <a:r>
-                        <a:rPr sz="1000" b="0">
-                          <a:solidFill>
-                            <a:srgbClr val="1D1B43"/>
-                          </a:solidFill>
-                          <a:latin typeface="Calibri"/>
-                        </a:rPr>
-                        <a:t>1</a:t>
-                      </a:r>
-                    </a:p>
-                  </a:txBody>
-                  <a:tcPr>
-                    <a:solidFill>
-                      <a:srgbClr val="F2F2F2"/>
-                    </a:solidFill>
-                  </a:tcPr>
-                </a:tc>
-                <a:tc>
-                  <a:txBody>
-                    <a:bodyPr/>
-                    <a:lstStyle/>
-                    <a:p>
-                      <a:pPr algn="l"/>
-                      <a:r>
-                        <a:rPr sz="1000" b="0">
-                          <a:solidFill>
-                            <a:srgbClr val="1D1B43"/>
-                          </a:solidFill>
-                          <a:latin typeface="Calibri"/>
-                        </a:rPr>
-                        <a:t>98.7%</a:t>
-                      </a:r>
-                    </a:p>
-                  </a:txBody>
-                  <a:tcPr>
-                    <a:solidFill>
-                      <a:srgbClr val="F2F2F2"/>
                     </a:solidFill>
                   </a:tcPr>
                 </a:tc>
@@ -5191,7 +5061,7 @@
                 </a:solidFill>
                 <a:latin typeface="Calibri"/>
               </a:rPr>
-              <a:t>PERFORMANCE: 98.7% - EXCELENTE</a:t>
+              <a:t>PERFORMANCE: 98.3% - EXCELENTE</a:t>
             </a:r>
           </a:p>
         </p:txBody>
@@ -5276,7 +5146,7 @@
                 </a:solidFill>
                 <a:latin typeface="Calibri"/>
               </a:rPr>
-              <a:t>OCORRENCIAS FORA DO PRAZO (1)</a:t>
+              <a:t>OCORRENCIAS FORA DO PRAZO (2)</a:t>
             </a:r>
           </a:p>
         </p:txBody>
@@ -5334,7 +5204,7 @@
         </p:nvGraphicFramePr>
         <p:xfrm>
           <a:off x="457200" y="1828800"/>
-          <a:ext cx="11429999" cy="768096"/>
+          <a:ext cx="11429999" cy="1152144"/>
         </p:xfrm>
         <a:graphic>
           <a:graphicData uri="http://schemas.openxmlformats.org/drawingml/2006/table">
@@ -5480,7 +5350,7 @@
                           </a:solidFill>
                           <a:latin typeface="Calibri"/>
                         </a:rPr>
-                        <a:t>281522</a:t>
+                        <a:t>279217</a:t>
                       </a:r>
                     </a:p>
                   </a:txBody>
@@ -5503,7 +5373,7 @@
                           </a:solidFill>
                           <a:latin typeface="Calibri"/>
                         </a:rPr>
-                        <a:t>AMAZON SERVICOS DE V - BETIM / MG</a:t>
+                        <a:t>MARINA BRINQUEDOS EI - SAO MATEUS / ES</a:t>
                       </a:r>
                     </a:p>
                   </a:txBody>
@@ -5526,7 +5396,7 @@
                           </a:solidFill>
                           <a:latin typeface="Calibri"/>
                         </a:rPr>
-                        <a:t>BETIM/MG</a:t>
+                        <a:t>SAO MATEUS/ES</a:t>
                       </a:r>
                     </a:p>
                   </a:txBody>
@@ -5549,7 +5419,7 @@
                           </a:solidFill>
                           <a:latin typeface="Calibri"/>
                         </a:rPr>
-                        <a:t>13/05/2026</a:t>
+                        <a:t>28/04/2026</a:t>
                       </a:r>
                     </a:p>
                   </a:txBody>
@@ -5579,6 +5449,123 @@
                   <a:tcPr>
                     <a:solidFill>
                       <a:srgbClr val="FFFFFF"/>
+                    </a:solidFill>
+                  </a:tcPr>
+                </a:tc>
+              </a:tr>
+              <a:tr h="384048">
+                <a:tc>
+                  <a:txBody>
+                    <a:bodyPr/>
+                    <a:lstStyle/>
+                    <a:p>
+                      <a:pPr algn="l"/>
+                      <a:r>
+                        <a:rPr sz="1000" b="0">
+                          <a:solidFill>
+                            <a:srgbClr val="1D1B43"/>
+                          </a:solidFill>
+                          <a:latin typeface="Calibri"/>
+                        </a:rPr>
+                        <a:t>279218</a:t>
+                      </a:r>
+                    </a:p>
+                  </a:txBody>
+                  <a:tcPr>
+                    <a:solidFill>
+                      <a:srgbClr val="F2F2F2"/>
+                    </a:solidFill>
+                  </a:tcPr>
+                </a:tc>
+                <a:tc>
+                  <a:txBody>
+                    <a:bodyPr/>
+                    <a:lstStyle/>
+                    <a:p>
+                      <a:pPr algn="l"/>
+                      <a:r>
+                        <a:rPr sz="1000" b="0">
+                          <a:solidFill>
+                            <a:srgbClr val="1D1B43"/>
+                          </a:solidFill>
+                          <a:latin typeface="Calibri"/>
+                        </a:rPr>
+                        <a:t>ML BRINQUEDOS E PAPE - ARACRUZ / ES</a:t>
+                      </a:r>
+                    </a:p>
+                  </a:txBody>
+                  <a:tcPr>
+                    <a:solidFill>
+                      <a:srgbClr val="F2F2F2"/>
+                    </a:solidFill>
+                  </a:tcPr>
+                </a:tc>
+                <a:tc>
+                  <a:txBody>
+                    <a:bodyPr/>
+                    <a:lstStyle/>
+                    <a:p>
+                      <a:pPr algn="l"/>
+                      <a:r>
+                        <a:rPr sz="1000" b="0">
+                          <a:solidFill>
+                            <a:srgbClr val="1D1B43"/>
+                          </a:solidFill>
+                          <a:latin typeface="Calibri"/>
+                        </a:rPr>
+                        <a:t>ARACRUZ/ES</a:t>
+                      </a:r>
+                    </a:p>
+                  </a:txBody>
+                  <a:tcPr>
+                    <a:solidFill>
+                      <a:srgbClr val="F2F2F2"/>
+                    </a:solidFill>
+                  </a:tcPr>
+                </a:tc>
+                <a:tc>
+                  <a:txBody>
+                    <a:bodyPr/>
+                    <a:lstStyle/>
+                    <a:p>
+                      <a:pPr algn="l"/>
+                      <a:r>
+                        <a:rPr sz="1000" b="0">
+                          <a:solidFill>
+                            <a:srgbClr val="1D1B43"/>
+                          </a:solidFill>
+                          <a:latin typeface="Calibri"/>
+                        </a:rPr>
+                        <a:t>28/04/2026</a:t>
+                      </a:r>
+                    </a:p>
+                  </a:txBody>
+                  <a:tcPr>
+                    <a:solidFill>
+                      <a:srgbClr val="F2F2F2"/>
+                    </a:solidFill>
+                  </a:tcPr>
+                </a:tc>
+                <a:tc>
+                  <a:txBody>
+                    <a:bodyPr/>
+                    <a:lstStyle/>
+                    <a:p>
+                      <a:pPr algn="l"/>
+                      <a:r>
+                        <a:rPr sz="1000" b="0">
+                          <a:solidFill>
+                            <a:srgbClr val="1D1B43"/>
+                          </a:solidFill>
+                          <a:latin typeface="Calibri"/>
+                        </a:rPr>
+                        <a:t>ENTREGUE FORA DO PRAZO</a:t>
+                      </a:r>
+                    </a:p>
+                  </a:txBody>
+                  <a:tcPr>
+                    <a:solidFill>
+                      <a:srgbClr val="F2F2F2"/>
                     </a:solidFill>
                   </a:tcPr>
                 </a:tc>
@@ -5725,7 +5712,7 @@
         </p:nvGraphicFramePr>
         <p:xfrm>
           <a:off x="731520" y="1920240"/>
-          <a:ext cx="10698480" cy="3657600"/>
+          <a:ext cx="10698480" cy="4389120"/>
         </p:xfrm>
         <a:graphic>
           <a:graphicData uri="http://schemas.openxmlformats.org/drawingml/2006/table">
@@ -5741,7 +5728,7 @@
                 <a:gridCol w="1554480"/>
                 <a:gridCol w="3108960"/>
               </a:tblGrid>
-              <a:tr h="457200">
+              <a:tr h="438912">
                 <a:tc>
                   <a:txBody>
                     <a:bodyPr/>
@@ -5881,7 +5868,147 @@
                   </a:tcPr>
                 </a:tc>
               </a:tr>
-              <a:tr h="457200">
+              <a:tr h="438912">
+                <a:tc>
+                  <a:txBody>
+                    <a:bodyPr/>
+                    <a:lstStyle/>
+                    <a:p>
+                      <a:pPr algn="l"/>
+                      <a:r>
+                        <a:rPr sz="1000" b="0">
+                          <a:solidFill>
+                            <a:srgbClr val="1D1B43"/>
+                          </a:solidFill>
+                          <a:latin typeface="Calibri"/>
+                        </a:rPr>
+                        <a:t>DF</a:t>
+                      </a:r>
+                    </a:p>
+                  </a:txBody>
+                  <a:tcPr>
+                    <a:solidFill>
+                      <a:srgbClr val="FFFFFF"/>
+                    </a:solidFill>
+                  </a:tcPr>
+                </a:tc>
+                <a:tc>
+                  <a:txBody>
+                    <a:bodyPr/>
+                    <a:lstStyle/>
+                    <a:p>
+                      <a:pPr algn="l"/>
+                      <a:r>
+                        <a:rPr sz="1000" b="0">
+                          <a:solidFill>
+                            <a:srgbClr val="1D1B43"/>
+                          </a:solidFill>
+                          <a:latin typeface="Calibri"/>
+                        </a:rPr>
+                        <a:t>24</a:t>
+                      </a:r>
+                    </a:p>
+                  </a:txBody>
+                  <a:tcPr>
+                    <a:solidFill>
+                      <a:srgbClr val="FFFFFF"/>
+                    </a:solidFill>
+                  </a:tcPr>
+                </a:tc>
+                <a:tc>
+                  <a:txBody>
+                    <a:bodyPr/>
+                    <a:lstStyle/>
+                    <a:p>
+                      <a:pPr algn="l"/>
+                      <a:r>
+                        <a:rPr sz="1000" b="0">
+                          <a:solidFill>
+                            <a:srgbClr val="1D1B43"/>
+                          </a:solidFill>
+                          <a:latin typeface="Calibri"/>
+                        </a:rPr>
+                        <a:t>24</a:t>
+                      </a:r>
+                    </a:p>
+                  </a:txBody>
+                  <a:tcPr>
+                    <a:solidFill>
+                      <a:srgbClr val="FFFFFF"/>
+                    </a:solidFill>
+                  </a:tcPr>
+                </a:tc>
+                <a:tc>
+                  <a:txBody>
+                    <a:bodyPr/>
+                    <a:lstStyle/>
+                    <a:p>
+                      <a:pPr algn="l"/>
+                      <a:r>
+                        <a:rPr sz="1000" b="0">
+                          <a:solidFill>
+                            <a:srgbClr val="1D1B43"/>
+                          </a:solidFill>
+                          <a:latin typeface="Calibri"/>
+                        </a:rPr>
+                        <a:t>0</a:t>
+                      </a:r>
+                    </a:p>
+                  </a:txBody>
+                  <a:tcPr>
+                    <a:solidFill>
+                      <a:srgbClr val="FFFFFF"/>
+                    </a:solidFill>
+                  </a:tcPr>
+                </a:tc>
+                <a:tc>
+                  <a:txBody>
+                    <a:bodyPr/>
+                    <a:lstStyle/>
+                    <a:p>
+                      <a:pPr algn="l"/>
+                      <a:r>
+                        <a:rPr sz="1000" b="0">
+                          <a:solidFill>
+                            <a:srgbClr val="1D1B43"/>
+                          </a:solidFill>
+                          <a:latin typeface="Calibri"/>
+                        </a:rPr>
+                        <a:t>100.0%</a:t>
+                      </a:r>
+                    </a:p>
+                  </a:txBody>
+                  <a:tcPr>
+                    <a:solidFill>
+                      <a:srgbClr val="FFFFFF"/>
+                    </a:solidFill>
+                  </a:tcPr>
+                </a:tc>
+                <a:tc>
+                  <a:txBody>
+                    <a:bodyPr/>
+                    <a:lstStyle/>
+                    <a:p>
+                      <a:pPr algn="l"/>
+                      <a:r>
+                        <a:rPr sz="1000" b="0">
+                          <a:solidFill>
+                            <a:srgbClr val="1D1B43"/>
+                          </a:solidFill>
+                          <a:latin typeface="Calibri"/>
+                        </a:rPr>
+                        <a:t>Excelente</a:t>
+                      </a:r>
+                    </a:p>
+                  </a:txBody>
+                  <a:tcPr>
+                    <a:solidFill>
+                      <a:srgbClr val="FFFFFF"/>
+                    </a:solidFill>
+                  </a:tcPr>
+                </a:tc>
+              </a:tr>
+              <a:tr h="438912">
                 <a:tc>
                   <a:txBody>
                     <a:bodyPr/>
@@ -5901,6 +6028,146 @@
                   </a:txBody>
                   <a:tcPr>
                     <a:solidFill>
+                      <a:srgbClr val="F2F2F2"/>
+                    </a:solidFill>
+                  </a:tcPr>
+                </a:tc>
+                <a:tc>
+                  <a:txBody>
+                    <a:bodyPr/>
+                    <a:lstStyle/>
+                    <a:p>
+                      <a:pPr algn="l"/>
+                      <a:r>
+                        <a:rPr sz="1000" b="0">
+                          <a:solidFill>
+                            <a:srgbClr val="1D1B43"/>
+                          </a:solidFill>
+                          <a:latin typeface="Calibri"/>
+                        </a:rPr>
+                        <a:t>24</a:t>
+                      </a:r>
+                    </a:p>
+                  </a:txBody>
+                  <a:tcPr>
+                    <a:solidFill>
+                      <a:srgbClr val="F2F2F2"/>
+                    </a:solidFill>
+                  </a:tcPr>
+                </a:tc>
+                <a:tc>
+                  <a:txBody>
+                    <a:bodyPr/>
+                    <a:lstStyle/>
+                    <a:p>
+                      <a:pPr algn="l"/>
+                      <a:r>
+                        <a:rPr sz="1000" b="0">
+                          <a:solidFill>
+                            <a:srgbClr val="1D1B43"/>
+                          </a:solidFill>
+                          <a:latin typeface="Calibri"/>
+                        </a:rPr>
+                        <a:t>24</a:t>
+                      </a:r>
+                    </a:p>
+                  </a:txBody>
+                  <a:tcPr>
+                    <a:solidFill>
+                      <a:srgbClr val="F2F2F2"/>
+                    </a:solidFill>
+                  </a:tcPr>
+                </a:tc>
+                <a:tc>
+                  <a:txBody>
+                    <a:bodyPr/>
+                    <a:lstStyle/>
+                    <a:p>
+                      <a:pPr algn="l"/>
+                      <a:r>
+                        <a:rPr sz="1000" b="0">
+                          <a:solidFill>
+                            <a:srgbClr val="1D1B43"/>
+                          </a:solidFill>
+                          <a:latin typeface="Calibri"/>
+                        </a:rPr>
+                        <a:t>0</a:t>
+                      </a:r>
+                    </a:p>
+                  </a:txBody>
+                  <a:tcPr>
+                    <a:solidFill>
+                      <a:srgbClr val="F2F2F2"/>
+                    </a:solidFill>
+                  </a:tcPr>
+                </a:tc>
+                <a:tc>
+                  <a:txBody>
+                    <a:bodyPr/>
+                    <a:lstStyle/>
+                    <a:p>
+                      <a:pPr algn="l"/>
+                      <a:r>
+                        <a:rPr sz="1000" b="0">
+                          <a:solidFill>
+                            <a:srgbClr val="1D1B43"/>
+                          </a:solidFill>
+                          <a:latin typeface="Calibri"/>
+                        </a:rPr>
+                        <a:t>100.0%</a:t>
+                      </a:r>
+                    </a:p>
+                  </a:txBody>
+                  <a:tcPr>
+                    <a:solidFill>
+                      <a:srgbClr val="F2F2F2"/>
+                    </a:solidFill>
+                  </a:tcPr>
+                </a:tc>
+                <a:tc>
+                  <a:txBody>
+                    <a:bodyPr/>
+                    <a:lstStyle/>
+                    <a:p>
+                      <a:pPr algn="l"/>
+                      <a:r>
+                        <a:rPr sz="1000" b="0">
+                          <a:solidFill>
+                            <a:srgbClr val="1D1B43"/>
+                          </a:solidFill>
+                          <a:latin typeface="Calibri"/>
+                        </a:rPr>
+                        <a:t>Excelente</a:t>
+                      </a:r>
+                    </a:p>
+                  </a:txBody>
+                  <a:tcPr>
+                    <a:solidFill>
+                      <a:srgbClr val="F2F2F2"/>
+                    </a:solidFill>
+                  </a:tcPr>
+                </a:tc>
+              </a:tr>
+              <a:tr h="438912">
+                <a:tc>
+                  <a:txBody>
+                    <a:bodyPr/>
+                    <a:lstStyle/>
+                    <a:p>
+                      <a:pPr algn="l"/>
+                      <a:r>
+                        <a:rPr sz="1000" b="0">
+                          <a:solidFill>
+                            <a:srgbClr val="1D1B43"/>
+                          </a:solidFill>
+                          <a:latin typeface="Calibri"/>
+                        </a:rPr>
+                        <a:t>MG</a:t>
+                      </a:r>
+                    </a:p>
+                  </a:txBody>
+                  <a:tcPr>
+                    <a:solidFill>
                       <a:srgbClr val="FFFFFF"/>
                     </a:solidFill>
                   </a:tcPr>
@@ -5918,7 +6185,7 @@
                           </a:solidFill>
                           <a:latin typeface="Calibri"/>
                         </a:rPr>
-                        <a:t>23</a:t>
+                        <a:t>16</a:t>
                       </a:r>
                     </a:p>
                   </a:txBody>
@@ -5941,7 +6208,7 @@
                           </a:solidFill>
                           <a:latin typeface="Calibri"/>
                         </a:rPr>
-                        <a:t>23</a:t>
+                        <a:t>16</a:t>
                       </a:r>
                     </a:p>
                   </a:txBody>
@@ -6021,7 +6288,7 @@
                   </a:tcPr>
                 </a:tc>
               </a:tr>
-              <a:tr h="457200">
+              <a:tr h="438912">
                 <a:tc>
                   <a:txBody>
                     <a:bodyPr/>
@@ -6058,7 +6325,7 @@
                           </a:solidFill>
                           <a:latin typeface="Calibri"/>
                         </a:rPr>
-                        <a:t>17</a:t>
+                        <a:t>15</a:t>
                       </a:r>
                     </a:p>
                   </a:txBody>
@@ -6081,7 +6348,7 @@
                           </a:solidFill>
                           <a:latin typeface="Calibri"/>
                         </a:rPr>
-                        <a:t>17</a:t>
+                        <a:t>15</a:t>
                       </a:r>
                     </a:p>
                   </a:txBody>
@@ -6161,21 +6428,21 @@
                   </a:tcPr>
                 </a:tc>
               </a:tr>
-              <a:tr h="457200">
-                <a:tc>
-                  <a:txBody>
-                    <a:bodyPr/>
-                    <a:lstStyle/>
-                    <a:p>
-                      <a:pPr algn="l"/>
-                      <a:r>
-                        <a:rPr sz="1000" b="0">
-                          <a:solidFill>
-                            <a:srgbClr val="1D1B43"/>
-                          </a:solidFill>
-                          <a:latin typeface="Calibri"/>
-                        </a:rPr>
-                        <a:t>DF</a:t>
+              <a:tr h="438912">
+                <a:tc>
+                  <a:txBody>
+                    <a:bodyPr/>
+                    <a:lstStyle/>
+                    <a:p>
+                      <a:pPr algn="l"/>
+                      <a:r>
+                        <a:rPr sz="1000" b="0">
+                          <a:solidFill>
+                            <a:srgbClr val="1D1B43"/>
+                          </a:solidFill>
+                          <a:latin typeface="Calibri"/>
+                        </a:rPr>
+                        <a:t>MT</a:t>
                       </a:r>
                     </a:p>
                   </a:txBody>
@@ -6198,6 +6465,286 @@
                           </a:solidFill>
                           <a:latin typeface="Calibri"/>
                         </a:rPr>
+                        <a:t>11</a:t>
+                      </a:r>
+                    </a:p>
+                  </a:txBody>
+                  <a:tcPr>
+                    <a:solidFill>
+                      <a:srgbClr val="FFFFFF"/>
+                    </a:solidFill>
+                  </a:tcPr>
+                </a:tc>
+                <a:tc>
+                  <a:txBody>
+                    <a:bodyPr/>
+                    <a:lstStyle/>
+                    <a:p>
+                      <a:pPr algn="l"/>
+                      <a:r>
+                        <a:rPr sz="1000" b="0">
+                          <a:solidFill>
+                            <a:srgbClr val="1D1B43"/>
+                          </a:solidFill>
+                          <a:latin typeface="Calibri"/>
+                        </a:rPr>
+                        <a:t>11</a:t>
+                      </a:r>
+                    </a:p>
+                  </a:txBody>
+                  <a:tcPr>
+                    <a:solidFill>
+                      <a:srgbClr val="FFFFFF"/>
+                    </a:solidFill>
+                  </a:tcPr>
+                </a:tc>
+                <a:tc>
+                  <a:txBody>
+                    <a:bodyPr/>
+                    <a:lstStyle/>
+                    <a:p>
+                      <a:pPr algn="l"/>
+                      <a:r>
+                        <a:rPr sz="1000" b="0">
+                          <a:solidFill>
+                            <a:srgbClr val="1D1B43"/>
+                          </a:solidFill>
+                          <a:latin typeface="Calibri"/>
+                        </a:rPr>
+                        <a:t>0</a:t>
+                      </a:r>
+                    </a:p>
+                  </a:txBody>
+                  <a:tcPr>
+                    <a:solidFill>
+                      <a:srgbClr val="FFFFFF"/>
+                    </a:solidFill>
+                  </a:tcPr>
+                </a:tc>
+                <a:tc>
+                  <a:txBody>
+                    <a:bodyPr/>
+                    <a:lstStyle/>
+                    <a:p>
+                      <a:pPr algn="l"/>
+                      <a:r>
+                        <a:rPr sz="1000" b="0">
+                          <a:solidFill>
+                            <a:srgbClr val="1D1B43"/>
+                          </a:solidFill>
+                          <a:latin typeface="Calibri"/>
+                        </a:rPr>
+                        <a:t>100.0%</a:t>
+                      </a:r>
+                    </a:p>
+                  </a:txBody>
+                  <a:tcPr>
+                    <a:solidFill>
+                      <a:srgbClr val="FFFFFF"/>
+                    </a:solidFill>
+                  </a:tcPr>
+                </a:tc>
+                <a:tc>
+                  <a:txBody>
+                    <a:bodyPr/>
+                    <a:lstStyle/>
+                    <a:p>
+                      <a:pPr algn="l"/>
+                      <a:r>
+                        <a:rPr sz="1000" b="0">
+                          <a:solidFill>
+                            <a:srgbClr val="1D1B43"/>
+                          </a:solidFill>
+                          <a:latin typeface="Calibri"/>
+                        </a:rPr>
+                        <a:t>Excelente</a:t>
+                      </a:r>
+                    </a:p>
+                  </a:txBody>
+                  <a:tcPr>
+                    <a:solidFill>
+                      <a:srgbClr val="FFFFFF"/>
+                    </a:solidFill>
+                  </a:tcPr>
+                </a:tc>
+              </a:tr>
+              <a:tr h="438912">
+                <a:tc>
+                  <a:txBody>
+                    <a:bodyPr/>
+                    <a:lstStyle/>
+                    <a:p>
+                      <a:pPr algn="l"/>
+                      <a:r>
+                        <a:rPr sz="1000" b="0">
+                          <a:solidFill>
+                            <a:srgbClr val="1D1B43"/>
+                          </a:solidFill>
+                          <a:latin typeface="Calibri"/>
+                        </a:rPr>
+                        <a:t>ES</a:t>
+                      </a:r>
+                    </a:p>
+                  </a:txBody>
+                  <a:tcPr>
+                    <a:solidFill>
+                      <a:srgbClr val="F2F2F2"/>
+                    </a:solidFill>
+                  </a:tcPr>
+                </a:tc>
+                <a:tc>
+                  <a:txBody>
+                    <a:bodyPr/>
+                    <a:lstStyle/>
+                    <a:p>
+                      <a:pPr algn="l"/>
+                      <a:r>
+                        <a:rPr sz="1000" b="0">
+                          <a:solidFill>
+                            <a:srgbClr val="1D1B43"/>
+                          </a:solidFill>
+                          <a:latin typeface="Calibri"/>
+                        </a:rPr>
+                        <a:t>10</a:t>
+                      </a:r>
+                    </a:p>
+                  </a:txBody>
+                  <a:tcPr>
+                    <a:solidFill>
+                      <a:srgbClr val="F2F2F2"/>
+                    </a:solidFill>
+                  </a:tcPr>
+                </a:tc>
+                <a:tc>
+                  <a:txBody>
+                    <a:bodyPr/>
+                    <a:lstStyle/>
+                    <a:p>
+                      <a:pPr algn="l"/>
+                      <a:r>
+                        <a:rPr sz="1000" b="0">
+                          <a:solidFill>
+                            <a:srgbClr val="1D1B43"/>
+                          </a:solidFill>
+                          <a:latin typeface="Calibri"/>
+                        </a:rPr>
+                        <a:t>8</a:t>
+                      </a:r>
+                    </a:p>
+                  </a:txBody>
+                  <a:tcPr>
+                    <a:solidFill>
+                      <a:srgbClr val="F2F2F2"/>
+                    </a:solidFill>
+                  </a:tcPr>
+                </a:tc>
+                <a:tc>
+                  <a:txBody>
+                    <a:bodyPr/>
+                    <a:lstStyle/>
+                    <a:p>
+                      <a:pPr algn="l"/>
+                      <a:r>
+                        <a:rPr sz="1000" b="0">
+                          <a:solidFill>
+                            <a:srgbClr val="1D1B43"/>
+                          </a:solidFill>
+                          <a:latin typeface="Calibri"/>
+                        </a:rPr>
+                        <a:t>2</a:t>
+                      </a:r>
+                    </a:p>
+                  </a:txBody>
+                  <a:tcPr>
+                    <a:solidFill>
+                      <a:srgbClr val="F2F2F2"/>
+                    </a:solidFill>
+                  </a:tcPr>
+                </a:tc>
+                <a:tc>
+                  <a:txBody>
+                    <a:bodyPr/>
+                    <a:lstStyle/>
+                    <a:p>
+                      <a:pPr algn="l"/>
+                      <a:r>
+                        <a:rPr sz="1000" b="0">
+                          <a:solidFill>
+                            <a:srgbClr val="1D1B43"/>
+                          </a:solidFill>
+                          <a:latin typeface="Calibri"/>
+                        </a:rPr>
+                        <a:t>80.0%</a:t>
+                      </a:r>
+                    </a:p>
+                  </a:txBody>
+                  <a:tcPr>
+                    <a:solidFill>
+                      <a:srgbClr val="F2F2F2"/>
+                    </a:solidFill>
+                  </a:tcPr>
+                </a:tc>
+                <a:tc>
+                  <a:txBody>
+                    <a:bodyPr/>
+                    <a:lstStyle/>
+                    <a:p>
+                      <a:pPr algn="l"/>
+                      <a:r>
+                        <a:rPr sz="1000" b="0">
+                          <a:solidFill>
+                            <a:srgbClr val="1D1B43"/>
+                          </a:solidFill>
+                          <a:latin typeface="Calibri"/>
+                        </a:rPr>
+                        <a:t>Atencao</a:t>
+                      </a:r>
+                    </a:p>
+                  </a:txBody>
+                  <a:tcPr>
+                    <a:solidFill>
+                      <a:srgbClr val="F2F2F2"/>
+                    </a:solidFill>
+                  </a:tcPr>
+                </a:tc>
+              </a:tr>
+              <a:tr h="438912">
+                <a:tc>
+                  <a:txBody>
+                    <a:bodyPr/>
+                    <a:lstStyle/>
+                    <a:p>
+                      <a:pPr algn="l"/>
+                      <a:r>
+                        <a:rPr sz="1000" b="0">
+                          <a:solidFill>
+                            <a:srgbClr val="1D1B43"/>
+                          </a:solidFill>
+                          <a:latin typeface="Calibri"/>
+                        </a:rPr>
+                        <a:t>SC</a:t>
+                      </a:r>
+                    </a:p>
+                  </a:txBody>
+                  <a:tcPr>
+                    <a:solidFill>
+                      <a:srgbClr val="FFFFFF"/>
+                    </a:solidFill>
+                  </a:tcPr>
+                </a:tc>
+                <a:tc>
+                  <a:txBody>
+                    <a:bodyPr/>
+                    <a:lstStyle/>
+                    <a:p>
+                      <a:pPr algn="l"/>
+                      <a:r>
+                        <a:rPr sz="1000" b="0">
+                          <a:solidFill>
+                            <a:srgbClr val="1D1B43"/>
+                          </a:solidFill>
+                          <a:latin typeface="Calibri"/>
+                        </a:rPr>
                         <a:t>9</a:t>
                       </a:r>
                     </a:p>
@@ -6301,21 +6848,21 @@
                   </a:tcPr>
                 </a:tc>
               </a:tr>
-              <a:tr h="457200">
-                <a:tc>
-                  <a:txBody>
-                    <a:bodyPr/>
-                    <a:lstStyle/>
-                    <a:p>
-                      <a:pPr algn="l"/>
-                      <a:r>
-                        <a:rPr sz="1000" b="0">
-                          <a:solidFill>
-                            <a:srgbClr val="1D1B43"/>
-                          </a:solidFill>
-                          <a:latin typeface="Calibri"/>
-                        </a:rPr>
-                        <a:t>MT</a:t>
+              <a:tr h="438912">
+                <a:tc>
+                  <a:txBody>
+                    <a:bodyPr/>
+                    <a:lstStyle/>
+                    <a:p>
+                      <a:pPr algn="l"/>
+                      <a:r>
+                        <a:rPr sz="1000" b="0">
+                          <a:solidFill>
+                            <a:srgbClr val="1D1B43"/>
+                          </a:solidFill>
+                          <a:latin typeface="Calibri"/>
+                        </a:rPr>
+                        <a:t>GO</a:t>
                       </a:r>
                     </a:p>
                   </a:txBody>
@@ -6338,7 +6885,7 @@
                           </a:solidFill>
                           <a:latin typeface="Calibri"/>
                         </a:rPr>
-                        <a:t>8</a:t>
+                        <a:t>6</a:t>
                       </a:r>
                     </a:p>
                   </a:txBody>
@@ -6361,7 +6908,7 @@
                           </a:solidFill>
                           <a:latin typeface="Calibri"/>
                         </a:rPr>
-                        <a:t>8</a:t>
+                        <a:t>6</a:t>
                       </a:r>
                     </a:p>
                   </a:txBody>
@@ -6441,7 +6988,7 @@
                   </a:tcPr>
                 </a:tc>
               </a:tr>
-              <a:tr h="457200">
+              <a:tr h="438912">
                 <a:tc>
                   <a:txBody>
                     <a:bodyPr/>
@@ -6478,7 +7025,7 @@
                           </a:solidFill>
                           <a:latin typeface="Calibri"/>
                         </a:rPr>
-                        <a:t>7</a:t>
+                        <a:t>5</a:t>
                       </a:r>
                     </a:p>
                   </a:txBody>
@@ -6501,7 +7048,7 @@
                           </a:solidFill>
                           <a:latin typeface="Calibri"/>
                         </a:rPr>
-                        <a:t>7</a:t>
+                        <a:t>5</a:t>
                       </a:r>
                     </a:p>
                   </a:txBody>
@@ -6571,286 +7118,6 @@
                           <a:latin typeface="Calibri"/>
                         </a:rPr>
                         <a:t>Excelente</a:t>
-                      </a:r>
-                    </a:p>
-                  </a:txBody>
-                  <a:tcPr>
-                    <a:solidFill>
-                      <a:srgbClr val="FFFFFF"/>
-                    </a:solidFill>
-                  </a:tcPr>
-                </a:tc>
-              </a:tr>
-              <a:tr h="457200">
-                <a:tc>
-                  <a:txBody>
-                    <a:bodyPr/>
-                    <a:lstStyle/>
-                    <a:p>
-                      <a:pPr algn="l"/>
-                      <a:r>
-                        <a:rPr sz="1000" b="0">
-                          <a:solidFill>
-                            <a:srgbClr val="1D1B43"/>
-                          </a:solidFill>
-                          <a:latin typeface="Calibri"/>
-                        </a:rPr>
-                        <a:t>SC</a:t>
-                      </a:r>
-                    </a:p>
-                  </a:txBody>
-                  <a:tcPr>
-                    <a:solidFill>
-                      <a:srgbClr val="F2F2F2"/>
-                    </a:solidFill>
-                  </a:tcPr>
-                </a:tc>
-                <a:tc>
-                  <a:txBody>
-                    <a:bodyPr/>
-                    <a:lstStyle/>
-                    <a:p>
-                      <a:pPr algn="l"/>
-                      <a:r>
-                        <a:rPr sz="1000" b="0">
-                          <a:solidFill>
-                            <a:srgbClr val="1D1B43"/>
-                          </a:solidFill>
-                          <a:latin typeface="Calibri"/>
-                        </a:rPr>
-                        <a:t>7</a:t>
-                      </a:r>
-                    </a:p>
-                  </a:txBody>
-                  <a:tcPr>
-                    <a:solidFill>
-                      <a:srgbClr val="F2F2F2"/>
-                    </a:solidFill>
-                  </a:tcPr>
-                </a:tc>
-                <a:tc>
-                  <a:txBody>
-                    <a:bodyPr/>
-                    <a:lstStyle/>
-                    <a:p>
-                      <a:pPr algn="l"/>
-                      <a:r>
-                        <a:rPr sz="1000" b="0">
-                          <a:solidFill>
-                            <a:srgbClr val="1D1B43"/>
-                          </a:solidFill>
-                          <a:latin typeface="Calibri"/>
-                        </a:rPr>
-                        <a:t>7</a:t>
-                      </a:r>
-                    </a:p>
-                  </a:txBody>
-                  <a:tcPr>
-                    <a:solidFill>
-                      <a:srgbClr val="F2F2F2"/>
-                    </a:solidFill>
-                  </a:tcPr>
-                </a:tc>
-                <a:tc>
-                  <a:txBody>
-                    <a:bodyPr/>
-                    <a:lstStyle/>
-                    <a:p>
-                      <a:pPr algn="l"/>
-                      <a:r>
-                        <a:rPr sz="1000" b="0">
-                          <a:solidFill>
-                            <a:srgbClr val="1D1B43"/>
-                          </a:solidFill>
-                          <a:latin typeface="Calibri"/>
-                        </a:rPr>
-                        <a:t>0</a:t>
-                      </a:r>
-                    </a:p>
-                  </a:txBody>
-                  <a:tcPr>
-                    <a:solidFill>
-                      <a:srgbClr val="F2F2F2"/>
-                    </a:solidFill>
-                  </a:tcPr>
-                </a:tc>
-                <a:tc>
-                  <a:txBody>
-                    <a:bodyPr/>
-                    <a:lstStyle/>
-                    <a:p>
-                      <a:pPr algn="l"/>
-                      <a:r>
-                        <a:rPr sz="1000" b="0">
-                          <a:solidFill>
-                            <a:srgbClr val="1D1B43"/>
-                          </a:solidFill>
-                          <a:latin typeface="Calibri"/>
-                        </a:rPr>
-                        <a:t>100.0%</a:t>
-                      </a:r>
-                    </a:p>
-                  </a:txBody>
-                  <a:tcPr>
-                    <a:solidFill>
-                      <a:srgbClr val="F2F2F2"/>
-                    </a:solidFill>
-                  </a:tcPr>
-                </a:tc>
-                <a:tc>
-                  <a:txBody>
-                    <a:bodyPr/>
-                    <a:lstStyle/>
-                    <a:p>
-                      <a:pPr algn="l"/>
-                      <a:r>
-                        <a:rPr sz="1000" b="0">
-                          <a:solidFill>
-                            <a:srgbClr val="1D1B43"/>
-                          </a:solidFill>
-                          <a:latin typeface="Calibri"/>
-                        </a:rPr>
-                        <a:t>Excelente</a:t>
-                      </a:r>
-                    </a:p>
-                  </a:txBody>
-                  <a:tcPr>
-                    <a:solidFill>
-                      <a:srgbClr val="F2F2F2"/>
-                    </a:solidFill>
-                  </a:tcPr>
-                </a:tc>
-              </a:tr>
-              <a:tr h="457200">
-                <a:tc>
-                  <a:txBody>
-                    <a:bodyPr/>
-                    <a:lstStyle/>
-                    <a:p>
-                      <a:pPr algn="l"/>
-                      <a:r>
-                        <a:rPr sz="1000" b="0">
-                          <a:solidFill>
-                            <a:srgbClr val="1D1B43"/>
-                          </a:solidFill>
-                          <a:latin typeface="Calibri"/>
-                        </a:rPr>
-                        <a:t>MG</a:t>
-                      </a:r>
-                    </a:p>
-                  </a:txBody>
-                  <a:tcPr>
-                    <a:solidFill>
-                      <a:srgbClr val="FFFFFF"/>
-                    </a:solidFill>
-                  </a:tcPr>
-                </a:tc>
-                <a:tc>
-                  <a:txBody>
-                    <a:bodyPr/>
-                    <a:lstStyle/>
-                    <a:p>
-                      <a:pPr algn="l"/>
-                      <a:r>
-                        <a:rPr sz="1000" b="0">
-                          <a:solidFill>
-                            <a:srgbClr val="1D1B43"/>
-                          </a:solidFill>
-                          <a:latin typeface="Calibri"/>
-                        </a:rPr>
-                        <a:t>6</a:t>
-                      </a:r>
-                    </a:p>
-                  </a:txBody>
-                  <a:tcPr>
-                    <a:solidFill>
-                      <a:srgbClr val="FFFFFF"/>
-                    </a:solidFill>
-                  </a:tcPr>
-                </a:tc>
-                <a:tc>
-                  <a:txBody>
-                    <a:bodyPr/>
-                    <a:lstStyle/>
-                    <a:p>
-                      <a:pPr algn="l"/>
-                      <a:r>
-                        <a:rPr sz="1000" b="0">
-                          <a:solidFill>
-                            <a:srgbClr val="1D1B43"/>
-                          </a:solidFill>
-                          <a:latin typeface="Calibri"/>
-                        </a:rPr>
-                        <a:t>5</a:t>
-                      </a:r>
-                    </a:p>
-                  </a:txBody>
-                  <a:tcPr>
-                    <a:solidFill>
-                      <a:srgbClr val="FFFFFF"/>
-                    </a:solidFill>
-                  </a:tcPr>
-                </a:tc>
-                <a:tc>
-                  <a:txBody>
-                    <a:bodyPr/>
-                    <a:lstStyle/>
-                    <a:p>
-                      <a:pPr algn="l"/>
-                      <a:r>
-                        <a:rPr sz="1000" b="0">
-                          <a:solidFill>
-                            <a:srgbClr val="1D1B43"/>
-                          </a:solidFill>
-                          <a:latin typeface="Calibri"/>
-                        </a:rPr>
-                        <a:t>1</a:t>
-                      </a:r>
-                    </a:p>
-                  </a:txBody>
-                  <a:tcPr>
-                    <a:solidFill>
-                      <a:srgbClr val="FFFFFF"/>
-                    </a:solidFill>
-                  </a:tcPr>
-                </a:tc>
-                <a:tc>
-                  <a:txBody>
-                    <a:bodyPr/>
-                    <a:lstStyle/>
-                    <a:p>
-                      <a:pPr algn="l"/>
-                      <a:r>
-                        <a:rPr sz="1000" b="0">
-                          <a:solidFill>
-                            <a:srgbClr val="1D1B43"/>
-                          </a:solidFill>
-                          <a:latin typeface="Calibri"/>
-                        </a:rPr>
-                        <a:t>83.3%</a:t>
-                      </a:r>
-                    </a:p>
-                  </a:txBody>
-                  <a:tcPr>
-                    <a:solidFill>
-                      <a:srgbClr val="FFFFFF"/>
-                    </a:solidFill>
-                  </a:tcPr>
-                </a:tc>
-                <a:tc>
-                  <a:txBody>
-                    <a:bodyPr/>
-                    <a:lstStyle/>
-                    <a:p>
-                      <a:pPr algn="l"/>
-                      <a:r>
-                        <a:rPr sz="1000" b="0">
-                          <a:solidFill>
-                            <a:srgbClr val="1D1B43"/>
-                          </a:solidFill>
-                          <a:latin typeface="Calibri"/>
-                        </a:rPr>
-                        <a:t>Atencao</a:t>
                       </a:r>
                     </a:p>
                   </a:txBody>
@@ -6945,7 +7212,7 @@
                 </a:solidFill>
                 <a:latin typeface="Calibri"/>
               </a:rPr>
-              <a:t>TOP DESTINATARIOS (53 pontos)</a:t>
+              <a:t>TOP DESTINATARIOS (61 pontos)</a:t>
             </a:r>
           </a:p>
         </p:txBody>
@@ -7243,7 +7510,7 @@
                           </a:solidFill>
                           <a:latin typeface="Calibri"/>
                         </a:rPr>
-                        <a:t>5</a:t>
+                        <a:t>10</a:t>
                       </a:r>
                     </a:p>
                   </a:txBody>
@@ -7266,7 +7533,7 @@
                           </a:solidFill>
                           <a:latin typeface="Calibri"/>
                         </a:rPr>
-                        <a:t>5</a:t>
+                        <a:t>10</a:t>
                       </a:r>
                     </a:p>
                   </a:txBody>
@@ -7383,7 +7650,7 @@
                           </a:solidFill>
                           <a:latin typeface="Calibri"/>
                         </a:rPr>
-                        <a:t>MATTEL DO BRASIL LTD - NAVEGANTES / SC</a:t>
+                        <a:t>DEYCON COM E DISTRIB - VARZEA GRANDE / MT</a:t>
                       </a:r>
                     </a:p>
                   </a:txBody>
@@ -7406,7 +7673,7 @@
                           </a:solidFill>
                           <a:latin typeface="Calibri"/>
                         </a:rPr>
-                        <a:t>4</a:t>
+                        <a:t>7</a:t>
                       </a:r>
                     </a:p>
                   </a:txBody>
@@ -7429,7 +7696,7 @@
                           </a:solidFill>
                           <a:latin typeface="Calibri"/>
                         </a:rPr>
-                        <a:t>4</a:t>
+                        <a:t>7</a:t>
                       </a:r>
                     </a:p>
                   </a:txBody>
@@ -7569,7 +7836,7 @@
                           </a:solidFill>
                           <a:latin typeface="Calibri"/>
                         </a:rPr>
-                        <a:t>4</a:t>
+                        <a:t>7</a:t>
                       </a:r>
                     </a:p>
                   </a:txBody>
@@ -7592,7 +7859,7 @@
                           </a:solidFill>
                           <a:latin typeface="Calibri"/>
                         </a:rPr>
-                        <a:t>4</a:t>
+                        <a:t>7</a:t>
                       </a:r>
                     </a:p>
                   </a:txBody>
@@ -7709,7 +7976,7 @@
                           </a:solidFill>
                           <a:latin typeface="Calibri"/>
                         </a:rPr>
-                        <a:t>AMAZON SERVICOS DE V - NOVA SANTA RITA / RS</a:t>
+                        <a:t>DEYCON COM E DISTRIB - IBIPORA / PR</a:t>
                       </a:r>
                     </a:p>
                   </a:txBody>
@@ -7732,7 +7999,7 @@
                           </a:solidFill>
                           <a:latin typeface="Calibri"/>
                         </a:rPr>
-                        <a:t>3</a:t>
+                        <a:t>4</a:t>
                       </a:r>
                     </a:p>
                   </a:txBody>
@@ -7755,7 +8022,7 @@
                           </a:solidFill>
                           <a:latin typeface="Calibri"/>
                         </a:rPr>
-                        <a:t>3</a:t>
+                        <a:t>4</a:t>
                       </a:r>
                     </a:p>
                   </a:txBody>
@@ -7872,7 +8139,7 @@
                           </a:solidFill>
                           <a:latin typeface="Calibri"/>
                         </a:rPr>
-                        <a:t>AMAZON SERVICOS DE V - BETIM / MG</a:t>
+                        <a:t>CIA ZAFFARI COM IND - PORTO ALEGRE / RS</a:t>
                       </a:r>
                     </a:p>
                   </a:txBody>
@@ -7895,7 +8162,7 @@
                           </a:solidFill>
                           <a:latin typeface="Calibri"/>
                         </a:rPr>
-                        <a:t>3</a:t>
+                        <a:t>4</a:t>
                       </a:r>
                     </a:p>
                   </a:txBody>
@@ -7918,7 +8185,7 @@
                           </a:solidFill>
                           <a:latin typeface="Calibri"/>
                         </a:rPr>
-                        <a:t>2</a:t>
+                        <a:t>4</a:t>
                       </a:r>
                     </a:p>
                   </a:txBody>
@@ -7941,7 +8208,7 @@
                           </a:solidFill>
                           <a:latin typeface="Calibri"/>
                         </a:rPr>
-                        <a:t>1</a:t>
+                        <a:t>0</a:t>
                       </a:r>
                     </a:p>
                   </a:txBody>
@@ -7964,7 +8231,7 @@
                           </a:solidFill>
                           <a:latin typeface="Calibri"/>
                         </a:rPr>
-                        <a:t>66.7%</a:t>
+                        <a:t>100.0%</a:t>
                       </a:r>
                     </a:p>
                   </a:txBody>
@@ -7987,7 +8254,7 @@
                           </a:solidFill>
                           <a:latin typeface="Calibri"/>
                         </a:rPr>
-                        <a:t>Atencao</a:t>
+                        <a:t>Excelente</a:t>
                       </a:r>
                     </a:p>
                   </a:txBody>
@@ -8035,7 +8302,7 @@
                           </a:solidFill>
                           <a:latin typeface="Calibri"/>
                         </a:rPr>
-                        <a:t>COMERCIO DE MEDICAME - GRAVATAI / RS</a:t>
+                        <a:t>RI HAPPY BRINQUEDOS - CUIABA / MT</a:t>
                       </a:r>
                     </a:p>
                   </a:txBody>
@@ -8058,7 +8325,7 @@
                           </a:solidFill>
                           <a:latin typeface="Calibri"/>
                         </a:rPr>
-                        <a:t>2</a:t>
+                        <a:t>4</a:t>
                       </a:r>
                     </a:p>
                   </a:txBody>
@@ -8081,7 +8348,7 @@
                           </a:solidFill>
                           <a:latin typeface="Calibri"/>
                         </a:rPr>
-                        <a:t>2</a:t>
+                        <a:t>4</a:t>
                       </a:r>
                     </a:p>
                   </a:txBody>
@@ -8198,7 +8465,7 @@
                           </a:solidFill>
                           <a:latin typeface="Calibri"/>
                         </a:rPr>
-                        <a:t>GSW UTENSILIOS LTDA - MONTENEGRO / RS</a:t>
+                        <a:t>RI HAPPY BRINQUEDOS - GOIANIA / GO</a:t>
                       </a:r>
                     </a:p>
                   </a:txBody>
@@ -8221,7 +8488,7 @@
                           </a:solidFill>
                           <a:latin typeface="Calibri"/>
                         </a:rPr>
-                        <a:t>2</a:t>
+                        <a:t>4</a:t>
                       </a:r>
                     </a:p>
                   </a:txBody>
@@ -8244,7 +8511,7 @@
                           </a:solidFill>
                           <a:latin typeface="Calibri"/>
                         </a:rPr>
-                        <a:t>2</a:t>
+                        <a:t>4</a:t>
                       </a:r>
                     </a:p>
                   </a:txBody>
@@ -8361,7 +8628,7 @@
                           </a:solidFill>
                           <a:latin typeface="Calibri"/>
                         </a:rPr>
-                        <a:t>T14 COM BRINQ ACESS - FOZ DO IGUACU / PR</a:t>
+                        <a:t>DEYCON COM E DISTRIB - SAO JOSE DOS PINHAIS / PR</a:t>
                       </a:r>
                     </a:p>
                   </a:txBody>
@@ -8384,7 +8651,7 @@
                           </a:solidFill>
                           <a:latin typeface="Calibri"/>
                         </a:rPr>
-                        <a:t>2</a:t>
+                        <a:t>4</a:t>
                       </a:r>
                     </a:p>
                   </a:txBody>
@@ -8407,7 +8674,7 @@
                           </a:solidFill>
                           <a:latin typeface="Calibri"/>
                         </a:rPr>
-                        <a:t>2</a:t>
+                        <a:t>4</a:t>
                       </a:r>
                     </a:p>
                   </a:txBody>
@@ -8524,7 +8791,7 @@
                           </a:solidFill>
                           <a:latin typeface="Calibri"/>
                         </a:rPr>
-                        <a:t>SUPER MIX COM BRINQ - CUIABA / MT</a:t>
+                        <a:t>FIORELO PEGORARO COM - JOACABA / SC</a:t>
                       </a:r>
                     </a:p>
                   </a:txBody>
@@ -8547,7 +8814,7 @@
                           </a:solidFill>
                           <a:latin typeface="Calibri"/>
                         </a:rPr>
-                        <a:t>2</a:t>
+                        <a:t>3</a:t>
                       </a:r>
                     </a:p>
                   </a:txBody>
@@ -8570,7 +8837,7 @@
                           </a:solidFill>
                           <a:latin typeface="Calibri"/>
                         </a:rPr>
-                        <a:t>2</a:t>
+                        <a:t>3</a:t>
                       </a:r>
                     </a:p>
                   </a:txBody>
@@ -8687,7 +8954,7 @@
                           </a:solidFill>
                           <a:latin typeface="Calibri"/>
                         </a:rPr>
-                        <a:t>SUPER MIX COM DE BRI - CUIABA / MT</a:t>
+                        <a:t>SANTA CRUZ COM ATAC - BRASILIA / DF</a:t>
                       </a:r>
                     </a:p>
                   </a:txBody>
@@ -8710,7 +8977,7 @@
                           </a:solidFill>
                           <a:latin typeface="Calibri"/>
                         </a:rPr>
-                        <a:t>2</a:t>
+                        <a:t>3</a:t>
                       </a:r>
                     </a:p>
                   </a:txBody>
@@ -8733,7 +9000,7 @@
                           </a:solidFill>
                           <a:latin typeface="Calibri"/>
                         </a:rPr>
-                        <a:t>2</a:t>
+                        <a:t>3</a:t>
                       </a:r>
                     </a:p>
                   </a:txBody>
@@ -8850,7 +9117,7 @@
                           </a:solidFill>
                           <a:latin typeface="Calibri"/>
                         </a:rPr>
-                        <a:t>RI HAPPY BRINQUEDOS - CUIABA / MT</a:t>
+                        <a:t>AMAZON SERVICOS DE V - BETIM / MG</a:t>
                       </a:r>
                     </a:p>
                   </a:txBody>
@@ -8873,7 +9140,7 @@
                           </a:solidFill>
                           <a:latin typeface="Calibri"/>
                         </a:rPr>
-                        <a:t>2</a:t>
+                        <a:t>3</a:t>
                       </a:r>
                     </a:p>
                   </a:txBody>
@@ -8896,7 +9163,7 @@
                           </a:solidFill>
                           <a:latin typeface="Calibri"/>
                         </a:rPr>
-                        <a:t>2</a:t>
+                        <a:t>3</a:t>
                       </a:r>
                     </a:p>
                   </a:txBody>
@@ -9013,7 +9280,7 @@
                           </a:solidFill>
                           <a:latin typeface="Calibri"/>
                         </a:rPr>
-                        <a:t>RI HAPPY BRINQUEDOS - CAMPO GRANDE / MS</a:t>
+                        <a:t>AMAZON SERVICOS DE V - NOVA SANTA RITA / RS</a:t>
                       </a:r>
                     </a:p>
                   </a:txBody>
@@ -9036,7 +9303,7 @@
                           </a:solidFill>
                           <a:latin typeface="Calibri"/>
                         </a:rPr>
-                        <a:t>2</a:t>
+                        <a:t>3</a:t>
                       </a:r>
                     </a:p>
                   </a:txBody>
@@ -9059,7 +9326,7 @@
                           </a:solidFill>
                           <a:latin typeface="Calibri"/>
                         </a:rPr>
-                        <a:t>2</a:t>
+                        <a:t>3</a:t>
                       </a:r>
                     </a:p>
                   </a:txBody>
@@ -9176,7 +9443,7 @@
                           </a:solidFill>
                           <a:latin typeface="Calibri"/>
                         </a:rPr>
-                        <a:t>CIA ZAFFARI COM IND - PORTO ALEGRE / RS</a:t>
+                        <a:t>FABIO J R DOS SANTOS - CURITIBA / PR</a:t>
                       </a:r>
                     </a:p>
                   </a:txBody>
@@ -9339,7 +9606,7 @@
                           </a:solidFill>
                           <a:latin typeface="Calibri"/>
                         </a:rPr>
-                        <a:t>T14 COM BRINQ ACES E - LONDRINA / PR</a:t>
+                        <a:t>MATTEL DO BRASIL LTD - NAVEGANTES / SC</a:t>
                       </a:r>
                     </a:p>
                   </a:txBody>

--- a/MATTEL_DO_BRASIL_LTDA.pptx
+++ b/MATTEL_DO_BRASIL_LTDA.pptx
@@ -143,10 +143,13 @@
           </c:spPr>
           <c:cat>
             <c:strRef>
-              <c:f>Sheet1!$A$2:$A$2</c:f>
+              <c:f>Sheet1!$A$2:$A$3</c:f>
               <c:strCache>
-                <c:ptCount val="1"/>
+                <c:ptCount val="2"/>
                 <c:pt idx="0">
+                  <c:v>Maio 2026</c:v>
+                </c:pt>
+                <c:pt idx="1">
                   <c:v>Abril 2026</c:v>
                 </c:pt>
               </c:strCache>
@@ -154,11 +157,14 @@
           </c:cat>
           <c:val>
             <c:numRef>
-              <c:f>Sheet1!$B$2:$B$2</c:f>
+              <c:f>Sheet1!$B$2:$B$3</c:f>
               <c:numCache>
                 <c:formatCode>General</c:formatCode>
-                <c:ptCount val="1"/>
+                <c:ptCount val="2"/>
                 <c:pt idx="0">
+                  <c:v>77</c:v>
+                </c:pt>
+                <c:pt idx="1">
                   <c:v>118</c:v>
                 </c:pt>
               </c:numCache>
@@ -186,10 +192,13 @@
           </c:spPr>
           <c:cat>
             <c:strRef>
-              <c:f>Sheet1!$A$2:$A$2</c:f>
+              <c:f>Sheet1!$A$2:$A$3</c:f>
               <c:strCache>
-                <c:ptCount val="1"/>
+                <c:ptCount val="2"/>
                 <c:pt idx="0">
+                  <c:v>Maio 2026</c:v>
+                </c:pt>
+                <c:pt idx="1">
                   <c:v>Abril 2026</c:v>
                 </c:pt>
               </c:strCache>
@@ -197,11 +206,14 @@
           </c:cat>
           <c:val>
             <c:numRef>
-              <c:f>Sheet1!$C$2:$C$2</c:f>
+              <c:f>Sheet1!$C$2:$C$3</c:f>
               <c:numCache>
                 <c:formatCode>General</c:formatCode>
-                <c:ptCount val="1"/>
+                <c:ptCount val="2"/>
                 <c:pt idx="0">
+                  <c:v>1</c:v>
+                </c:pt>
+                <c:pt idx="1">
                   <c:v>2</c:v>
                 </c:pt>
               </c:numCache>
@@ -4142,7 +4154,7 @@
                           </a:solidFill>
                           <a:latin typeface="Calibri"/>
                         </a:rPr>
-                        <a:t>Marco 2026</a:t>
+                        <a:t>Maio 2026</a:t>
                       </a:r>
                     </a:p>
                   </a:txBody>
@@ -4236,7 +4248,7 @@
                           </a:solidFill>
                           <a:latin typeface="Calibri"/>
                         </a:rPr>
-                        <a:t>-</a:t>
+                        <a:t>78</a:t>
                       </a:r>
                     </a:p>
                   </a:txBody>
@@ -4282,7 +4294,7 @@
                           </a:solidFill>
                           <a:latin typeface="Calibri"/>
                         </a:rPr>
-                        <a:t>-</a:t>
+                        <a:t>+ 42</a:t>
                       </a:r>
                     </a:p>
                   </a:txBody>
@@ -4330,7 +4342,7 @@
                           </a:solidFill>
                           <a:latin typeface="Calibri"/>
                         </a:rPr>
-                        <a:t>-</a:t>
+                        <a:t>77</a:t>
                       </a:r>
                     </a:p>
                   </a:txBody>
@@ -4376,7 +4388,7 @@
                           </a:solidFill>
                           <a:latin typeface="Calibri"/>
                         </a:rPr>
-                        <a:t>-</a:t>
+                        <a:t>+ 41</a:t>
                       </a:r>
                     </a:p>
                   </a:txBody>
@@ -4424,7 +4436,7 @@
                           </a:solidFill>
                           <a:latin typeface="Calibri"/>
                         </a:rPr>
-                        <a:t>-</a:t>
+                        <a:t>1</a:t>
                       </a:r>
                     </a:p>
                   </a:txBody>
@@ -4470,7 +4482,7 @@
                           </a:solidFill>
                           <a:latin typeface="Calibri"/>
                         </a:rPr>
-                        <a:t>-</a:t>
+                        <a:t>+ 1</a:t>
                       </a:r>
                     </a:p>
                   </a:txBody>
@@ -4518,7 +4530,7 @@
                           </a:solidFill>
                           <a:latin typeface="Calibri"/>
                         </a:rPr>
-                        <a:t>-</a:t>
+                        <a:t>98.7%</a:t>
                       </a:r>
                     </a:p>
                   </a:txBody>
@@ -4564,7 +4576,7 @@
                           </a:solidFill>
                           <a:latin typeface="Calibri"/>
                         </a:rPr>
-                        <a:t>-</a:t>
+                        <a:t>- 0.4pp</a:t>
                       </a:r>
                     </a:p>
                   </a:txBody>
@@ -4735,7 +4747,7 @@
         </p:nvGraphicFramePr>
         <p:xfrm>
           <a:off x="7955279" y="2286000"/>
-          <a:ext cx="4480560" cy="877824"/>
+          <a:ext cx="4480560" cy="1316736"/>
         </p:xfrm>
         <a:graphic>
           <a:graphicData uri="http://schemas.openxmlformats.org/drawingml/2006/table">
@@ -4881,13 +4893,130 @@
                           </a:solidFill>
                           <a:latin typeface="Calibri"/>
                         </a:rPr>
+                        <a:t>Maio 2026</a:t>
+                      </a:r>
+                    </a:p>
+                  </a:txBody>
+                  <a:tcPr>
+                    <a:solidFill>
+                      <a:srgbClr val="FFFFFF"/>
+                    </a:solidFill>
+                  </a:tcPr>
+                </a:tc>
+                <a:tc>
+                  <a:txBody>
+                    <a:bodyPr/>
+                    <a:lstStyle/>
+                    <a:p>
+                      <a:pPr algn="l"/>
+                      <a:r>
+                        <a:rPr sz="1000" b="0">
+                          <a:solidFill>
+                            <a:srgbClr val="1D1B43"/>
+                          </a:solidFill>
+                          <a:latin typeface="Calibri"/>
+                        </a:rPr>
+                        <a:t>78</a:t>
+                      </a:r>
+                    </a:p>
+                  </a:txBody>
+                  <a:tcPr>
+                    <a:solidFill>
+                      <a:srgbClr val="FFFFFF"/>
+                    </a:solidFill>
+                  </a:tcPr>
+                </a:tc>
+                <a:tc>
+                  <a:txBody>
+                    <a:bodyPr/>
+                    <a:lstStyle/>
+                    <a:p>
+                      <a:pPr algn="l"/>
+                      <a:r>
+                        <a:rPr sz="1000" b="0">
+                          <a:solidFill>
+                            <a:srgbClr val="1D1B43"/>
+                          </a:solidFill>
+                          <a:latin typeface="Calibri"/>
+                        </a:rPr>
+                        <a:t>77</a:t>
+                      </a:r>
+                    </a:p>
+                  </a:txBody>
+                  <a:tcPr>
+                    <a:solidFill>
+                      <a:srgbClr val="FFFFFF"/>
+                    </a:solidFill>
+                  </a:tcPr>
+                </a:tc>
+                <a:tc>
+                  <a:txBody>
+                    <a:bodyPr/>
+                    <a:lstStyle/>
+                    <a:p>
+                      <a:pPr algn="l"/>
+                      <a:r>
+                        <a:rPr sz="1000" b="0">
+                          <a:solidFill>
+                            <a:srgbClr val="1D1B43"/>
+                          </a:solidFill>
+                          <a:latin typeface="Calibri"/>
+                        </a:rPr>
+                        <a:t>1</a:t>
+                      </a:r>
+                    </a:p>
+                  </a:txBody>
+                  <a:tcPr>
+                    <a:solidFill>
+                      <a:srgbClr val="FFFFFF"/>
+                    </a:solidFill>
+                  </a:tcPr>
+                </a:tc>
+                <a:tc>
+                  <a:txBody>
+                    <a:bodyPr/>
+                    <a:lstStyle/>
+                    <a:p>
+                      <a:pPr algn="l"/>
+                      <a:r>
+                        <a:rPr sz="1000" b="0">
+                          <a:solidFill>
+                            <a:srgbClr val="1D1B43"/>
+                          </a:solidFill>
+                          <a:latin typeface="Calibri"/>
+                        </a:rPr>
+                        <a:t>98.7%</a:t>
+                      </a:r>
+                    </a:p>
+                  </a:txBody>
+                  <a:tcPr>
+                    <a:solidFill>
+                      <a:srgbClr val="FFFFFF"/>
+                    </a:solidFill>
+                  </a:tcPr>
+                </a:tc>
+              </a:tr>
+              <a:tr h="438912">
+                <a:tc>
+                  <a:txBody>
+                    <a:bodyPr/>
+                    <a:lstStyle/>
+                    <a:p>
+                      <a:pPr algn="l"/>
+                      <a:r>
+                        <a:rPr sz="1000" b="0">
+                          <a:solidFill>
+                            <a:srgbClr val="1D1B43"/>
+                          </a:solidFill>
+                          <a:latin typeface="Calibri"/>
+                        </a:rPr>
                         <a:t>Abril 2026</a:t>
                       </a:r>
                     </a:p>
                   </a:txBody>
                   <a:tcPr>
                     <a:solidFill>
-                      <a:srgbClr val="FFFFFF"/>
+                      <a:srgbClr val="F2F2F2"/>
                     </a:solidFill>
                   </a:tcPr>
                 </a:tc>
@@ -4910,7 +5039,7 @@
                   </a:txBody>
                   <a:tcPr>
                     <a:solidFill>
-                      <a:srgbClr val="FFFFFF"/>
+                      <a:srgbClr val="F2F2F2"/>
                     </a:solidFill>
                   </a:tcPr>
                 </a:tc>
@@ -4933,7 +5062,7 @@
                   </a:txBody>
                   <a:tcPr>
                     <a:solidFill>
-                      <a:srgbClr val="FFFFFF"/>
+                      <a:srgbClr val="F2F2F2"/>
                     </a:solidFill>
                   </a:tcPr>
                 </a:tc>
@@ -4956,7 +5085,7 @@
                   </a:txBody>
                   <a:tcPr>
                     <a:solidFill>
-                      <a:srgbClr val="FFFFFF"/>
+                      <a:srgbClr val="F2F2F2"/>
                     </a:solidFill>
                   </a:tcPr>
                 </a:tc>
@@ -4979,7 +5108,7 @@
                   </a:txBody>
                   <a:tcPr>
                     <a:solidFill>
-                      <a:srgbClr val="FFFFFF"/>
+                      <a:srgbClr val="F2F2F2"/>
                     </a:solidFill>
                   </a:tcPr>
                 </a:tc>

--- a/MATTEL_DO_BRASIL_LTDA.pptx
+++ b/MATTEL_DO_BRASIL_LTDA.pptx
@@ -162,7 +162,7 @@
                 <c:formatCode>General</c:formatCode>
                 <c:ptCount val="2"/>
                 <c:pt idx="0">
-                  <c:v>77</c:v>
+                  <c:v>110</c:v>
                 </c:pt>
                 <c:pt idx="1">
                   <c:v>118</c:v>
@@ -211,7 +211,7 @@
                 <c:formatCode>General</c:formatCode>
                 <c:ptCount val="2"/>
                 <c:pt idx="0">
-                  <c:v>1</c:v>
+                  <c:v>13</c:v>
                 </c:pt>
                 <c:pt idx="1">
                   <c:v>2</c:v>
@@ -4248,7 +4248,7 @@
                           </a:solidFill>
                           <a:latin typeface="Calibri"/>
                         </a:rPr>
-                        <a:t>78</a:t>
+                        <a:t>123</a:t>
                       </a:r>
                     </a:p>
                   </a:txBody>
@@ -4294,7 +4294,7 @@
                           </a:solidFill>
                           <a:latin typeface="Calibri"/>
                         </a:rPr>
-                        <a:t>+ 42</a:t>
+                        <a:t>- 3</a:t>
                       </a:r>
                     </a:p>
                   </a:txBody>
@@ -4342,7 +4342,7 @@
                           </a:solidFill>
                           <a:latin typeface="Calibri"/>
                         </a:rPr>
-                        <a:t>77</a:t>
+                        <a:t>110</a:t>
                       </a:r>
                     </a:p>
                   </a:txBody>
@@ -4388,7 +4388,7 @@
                           </a:solidFill>
                           <a:latin typeface="Calibri"/>
                         </a:rPr>
-                        <a:t>+ 41</a:t>
+                        <a:t>+ 8</a:t>
                       </a:r>
                     </a:p>
                   </a:txBody>
@@ -4436,7 +4436,7 @@
                           </a:solidFill>
                           <a:latin typeface="Calibri"/>
                         </a:rPr>
-                        <a:t>1</a:t>
+                        <a:t>13</a:t>
                       </a:r>
                     </a:p>
                   </a:txBody>
@@ -4482,7 +4482,7 @@
                           </a:solidFill>
                           <a:latin typeface="Calibri"/>
                         </a:rPr>
-                        <a:t>+ 1</a:t>
+                        <a:t>- 11</a:t>
                       </a:r>
                     </a:p>
                   </a:txBody>
@@ -4530,7 +4530,7 @@
                           </a:solidFill>
                           <a:latin typeface="Calibri"/>
                         </a:rPr>
-                        <a:t>98.7%</a:t>
+                        <a:t>89.4%</a:t>
                       </a:r>
                     </a:p>
                   </a:txBody>
@@ -4576,7 +4576,7 @@
                           </a:solidFill>
                           <a:latin typeface="Calibri"/>
                         </a:rPr>
-                        <a:t>- 0.4pp</a:t>
+                        <a:t>+ 8.9pp</a:t>
                       </a:r>
                     </a:p>
                   </a:txBody>
@@ -4916,7 +4916,7 @@
                           </a:solidFill>
                           <a:latin typeface="Calibri"/>
                         </a:rPr>
-                        <a:t>78</a:t>
+                        <a:t>123</a:t>
                       </a:r>
                     </a:p>
                   </a:txBody>
@@ -4939,7 +4939,7 @@
                           </a:solidFill>
                           <a:latin typeface="Calibri"/>
                         </a:rPr>
-                        <a:t>77</a:t>
+                        <a:t>110</a:t>
                       </a:r>
                     </a:p>
                   </a:txBody>
@@ -4962,7 +4962,7 @@
                           </a:solidFill>
                           <a:latin typeface="Calibri"/>
                         </a:rPr>
-                        <a:t>1</a:t>
+                        <a:t>13</a:t>
                       </a:r>
                     </a:p>
                   </a:txBody>
@@ -4985,7 +4985,7 @@
                           </a:solidFill>
                           <a:latin typeface="Calibri"/>
                         </a:rPr>
-                        <a:t>98.7%</a:t>
+                        <a:t>89.4%</a:t>
                       </a:r>
                     </a:p>
                   </a:txBody>

--- a/MATTEL_DO_BRASIL_LTDA.pptx
+++ b/MATTEL_DO_BRASIL_LTDA.pptx
@@ -147,10 +147,10 @@
               <c:strCache>
                 <c:ptCount val="2"/>
                 <c:pt idx="0">
-                  <c:v>Maio 2026</c:v>
+                  <c:v>Abril 2026</c:v>
                 </c:pt>
                 <c:pt idx="1">
-                  <c:v>Abril 2026</c:v>
+                  <c:v>Maio 2026</c:v>
                 </c:pt>
               </c:strCache>
             </c:strRef>
@@ -162,10 +162,10 @@
                 <c:formatCode>General</c:formatCode>
                 <c:ptCount val="2"/>
                 <c:pt idx="0">
-                  <c:v>110</c:v>
+                  <c:v>118</c:v>
                 </c:pt>
                 <c:pt idx="1">
-                  <c:v>118</c:v>
+                  <c:v>129</c:v>
                 </c:pt>
               </c:numCache>
             </c:numRef>
@@ -196,10 +196,10 @@
               <c:strCache>
                 <c:ptCount val="2"/>
                 <c:pt idx="0">
-                  <c:v>Maio 2026</c:v>
+                  <c:v>Abril 2026</c:v>
                 </c:pt>
                 <c:pt idx="1">
-                  <c:v>Abril 2026</c:v>
+                  <c:v>Maio 2026</c:v>
                 </c:pt>
               </c:strCache>
             </c:strRef>
@@ -211,7 +211,7 @@
                 <c:formatCode>General</c:formatCode>
                 <c:ptCount val="2"/>
                 <c:pt idx="0">
-                  <c:v>13</c:v>
+                  <c:v>2</c:v>
                 </c:pt>
                 <c:pt idx="1">
                   <c:v>2</c:v>
@@ -3387,7 +3387,7 @@
                 </a:solidFill>
                 <a:latin typeface="Calibri"/>
               </a:rPr>
-              <a:t>INDICADORES ABRIL 2026</a:t>
+              <a:t>INDICADORES MAIO 2026</a:t>
             </a:r>
           </a:p>
         </p:txBody>
@@ -3708,7 +3708,7 @@
                 </a:solidFill>
                 <a:latin typeface="Calibri"/>
               </a:rPr>
-              <a:t>120</a:t>
+              <a:t>131</a:t>
             </a:r>
           </a:p>
         </p:txBody>
@@ -3823,7 +3823,7 @@
                 </a:solidFill>
                 <a:latin typeface="Calibri"/>
               </a:rPr>
-              <a:t>118</a:t>
+              <a:t>129</a:t>
             </a:r>
           </a:p>
         </p:txBody>
@@ -4053,7 +4053,7 @@
                 </a:solidFill>
                 <a:latin typeface="Calibri"/>
               </a:rPr>
-              <a:t>98.3%</a:t>
+              <a:t>98.5%</a:t>
             </a:r>
           </a:p>
         </p:txBody>
@@ -4154,30 +4154,30 @@
                           </a:solidFill>
                           <a:latin typeface="Calibri"/>
                         </a:rPr>
+                        <a:t>Abril 2026</a:t>
+                      </a:r>
+                    </a:p>
+                  </a:txBody>
+                  <a:tcPr>
+                    <a:solidFill>
+                      <a:srgbClr val="1D1B43"/>
+                    </a:solidFill>
+                  </a:tcPr>
+                </a:tc>
+                <a:tc>
+                  <a:txBody>
+                    <a:bodyPr/>
+                    <a:lstStyle/>
+                    <a:p>
+                      <a:pPr algn="ctr"/>
+                      <a:r>
+                        <a:rPr sz="1100" b="1">
+                          <a:solidFill>
+                            <a:srgbClr val="FFFFFF"/>
+                          </a:solidFill>
+                          <a:latin typeface="Calibri"/>
+                        </a:rPr>
                         <a:t>Maio 2026</a:t>
-                      </a:r>
-                    </a:p>
-                  </a:txBody>
-                  <a:tcPr>
-                    <a:solidFill>
-                      <a:srgbClr val="1D1B43"/>
-                    </a:solidFill>
-                  </a:tcPr>
-                </a:tc>
-                <a:tc>
-                  <a:txBody>
-                    <a:bodyPr/>
-                    <a:lstStyle/>
-                    <a:p>
-                      <a:pPr algn="ctr"/>
-                      <a:r>
-                        <a:rPr sz="1100" b="1">
-                          <a:solidFill>
-                            <a:srgbClr val="FFFFFF"/>
-                          </a:solidFill>
-                          <a:latin typeface="Calibri"/>
-                        </a:rPr>
-                        <a:t>Abril 2026</a:t>
                       </a:r>
                     </a:p>
                   </a:txBody>
@@ -4248,7 +4248,7 @@
                           </a:solidFill>
                           <a:latin typeface="Calibri"/>
                         </a:rPr>
-                        <a:t>123</a:t>
+                        <a:t>120</a:t>
                       </a:r>
                     </a:p>
                   </a:txBody>
@@ -4271,7 +4271,7 @@
                           </a:solidFill>
                           <a:latin typeface="Calibri"/>
                         </a:rPr>
-                        <a:t>120</a:t>
+                        <a:t>131</a:t>
                       </a:r>
                     </a:p>
                   </a:txBody>
@@ -4294,7 +4294,7 @@
                           </a:solidFill>
                           <a:latin typeface="Calibri"/>
                         </a:rPr>
-                        <a:t>- 3</a:t>
+                        <a:t>+ 11</a:t>
                       </a:r>
                     </a:p>
                   </a:txBody>
@@ -4342,7 +4342,7 @@
                           </a:solidFill>
                           <a:latin typeface="Calibri"/>
                         </a:rPr>
-                        <a:t>110</a:t>
+                        <a:t>118</a:t>
                       </a:r>
                     </a:p>
                   </a:txBody>
@@ -4365,7 +4365,7 @@
                           </a:solidFill>
                           <a:latin typeface="Calibri"/>
                         </a:rPr>
-                        <a:t>118</a:t>
+                        <a:t>129</a:t>
                       </a:r>
                     </a:p>
                   </a:txBody>
@@ -4388,7 +4388,7 @@
                           </a:solidFill>
                           <a:latin typeface="Calibri"/>
                         </a:rPr>
-                        <a:t>+ 8</a:t>
+                        <a:t>+ 11</a:t>
                       </a:r>
                     </a:p>
                   </a:txBody>
@@ -4436,7 +4436,7 @@
                           </a:solidFill>
                           <a:latin typeface="Calibri"/>
                         </a:rPr>
-                        <a:t>13</a:t>
+                        <a:t>2</a:t>
                       </a:r>
                     </a:p>
                   </a:txBody>
@@ -4482,7 +4482,7 @@
                           </a:solidFill>
                           <a:latin typeface="Calibri"/>
                         </a:rPr>
-                        <a:t>- 11</a:t>
+                        <a:t>- 0</a:t>
                       </a:r>
                     </a:p>
                   </a:txBody>
@@ -4530,7 +4530,7 @@
                           </a:solidFill>
                           <a:latin typeface="Calibri"/>
                         </a:rPr>
-                        <a:t>89.4%</a:t>
+                        <a:t>98.3%</a:t>
                       </a:r>
                     </a:p>
                   </a:txBody>
@@ -4553,7 +4553,7 @@
                           </a:solidFill>
                           <a:latin typeface="Calibri"/>
                         </a:rPr>
-                        <a:t>98.3%</a:t>
+                        <a:t>98.5%</a:t>
                       </a:r>
                     </a:p>
                   </a:txBody>
@@ -4576,7 +4576,7 @@
                           </a:solidFill>
                           <a:latin typeface="Calibri"/>
                         </a:rPr>
-                        <a:t>+ 8.9pp</a:t>
+                        <a:t>+ 0.2pp</a:t>
                       </a:r>
                     </a:p>
                   </a:txBody>
@@ -4893,7 +4893,7 @@
                           </a:solidFill>
                           <a:latin typeface="Calibri"/>
                         </a:rPr>
-                        <a:t>Maio 2026</a:t>
+                        <a:t>Abril 2026</a:t>
                       </a:r>
                     </a:p>
                   </a:txBody>
@@ -4916,7 +4916,7 @@
                           </a:solidFill>
                           <a:latin typeface="Calibri"/>
                         </a:rPr>
-                        <a:t>123</a:t>
+                        <a:t>120</a:t>
                       </a:r>
                     </a:p>
                   </a:txBody>
@@ -4939,7 +4939,7 @@
                           </a:solidFill>
                           <a:latin typeface="Calibri"/>
                         </a:rPr>
-                        <a:t>110</a:t>
+                        <a:t>118</a:t>
                       </a:r>
                     </a:p>
                   </a:txBody>
@@ -4962,7 +4962,7 @@
                           </a:solidFill>
                           <a:latin typeface="Calibri"/>
                         </a:rPr>
-                        <a:t>13</a:t>
+                        <a:t>2</a:t>
                       </a:r>
                     </a:p>
                   </a:txBody>
@@ -4985,7 +4985,7 @@
                           </a:solidFill>
                           <a:latin typeface="Calibri"/>
                         </a:rPr>
-                        <a:t>89.4%</a:t>
+                        <a:t>98.3%</a:t>
                       </a:r>
                     </a:p>
                   </a:txBody>
@@ -5010,7 +5010,7 @@
                           </a:solidFill>
                           <a:latin typeface="Calibri"/>
                         </a:rPr>
-                        <a:t>Abril 2026</a:t>
+                        <a:t>Maio 2026</a:t>
                       </a:r>
                     </a:p>
                   </a:txBody>
@@ -5033,7 +5033,7 @@
                           </a:solidFill>
                           <a:latin typeface="Calibri"/>
                         </a:rPr>
-                        <a:t>120</a:t>
+                        <a:t>131</a:t>
                       </a:r>
                     </a:p>
                   </a:txBody>
@@ -5056,7 +5056,7 @@
                           </a:solidFill>
                           <a:latin typeface="Calibri"/>
                         </a:rPr>
-                        <a:t>118</a:t>
+                        <a:t>129</a:t>
                       </a:r>
                     </a:p>
                   </a:txBody>
@@ -5102,7 +5102,7 @@
                           </a:solidFill>
                           <a:latin typeface="Calibri"/>
                         </a:rPr>
-                        <a:t>98.3%</a:t>
+                        <a:t>98.5%</a:t>
                       </a:r>
                     </a:p>
                   </a:txBody>
@@ -5190,7 +5190,7 @@
                 </a:solidFill>
                 <a:latin typeface="Calibri"/>
               </a:rPr>
-              <a:t>PERFORMANCE: 98.3% - EXCELENTE</a:t>
+              <a:t>PERFORMANCE: 98.5% - EXCELENTE</a:t>
             </a:r>
           </a:p>
         </p:txBody>
@@ -5479,7 +5479,7 @@
                           </a:solidFill>
                           <a:latin typeface="Calibri"/>
                         </a:rPr>
-                        <a:t>279217</a:t>
+                        <a:t>283230</a:t>
                       </a:r>
                     </a:p>
                   </a:txBody>
@@ -5502,7 +5502,7 @@
                           </a:solidFill>
                           <a:latin typeface="Calibri"/>
                         </a:rPr>
-                        <a:t>MARINA BRINQUEDOS EI - SAO MATEUS / ES</a:t>
+                        <a:t>RI HAPPY BRINQUEDOS - BELO HORIZONTE / MG</a:t>
                       </a:r>
                     </a:p>
                   </a:txBody>
@@ -5525,7 +5525,7 @@
                           </a:solidFill>
                           <a:latin typeface="Calibri"/>
                         </a:rPr>
-                        <a:t>SAO MATEUS/ES</a:t>
+                        <a:t>BELO HORIZONTE/MG</a:t>
                       </a:r>
                     </a:p>
                   </a:txBody>
@@ -5548,7 +5548,7 @@
                           </a:solidFill>
                           <a:latin typeface="Calibri"/>
                         </a:rPr>
-                        <a:t>28/04/2026</a:t>
+                        <a:t>25/05/2026</a:t>
                       </a:r>
                     </a:p>
                   </a:txBody>
@@ -5596,7 +5596,7 @@
                           </a:solidFill>
                           <a:latin typeface="Calibri"/>
                         </a:rPr>
-                        <a:t>279218</a:t>
+                        <a:t>283602</a:t>
                       </a:r>
                     </a:p>
                   </a:txBody>
@@ -5619,7 +5619,7 @@
                           </a:solidFill>
                           <a:latin typeface="Calibri"/>
                         </a:rPr>
-                        <a:t>ML BRINQUEDOS E PAPE - ARACRUZ / ES</a:t>
+                        <a:t>PBKIDS BRINQUEDOS LT - CURITIBA / PR</a:t>
                       </a:r>
                     </a:p>
                   </a:txBody>
@@ -5642,7 +5642,7 @@
                           </a:solidFill>
                           <a:latin typeface="Calibri"/>
                         </a:rPr>
-                        <a:t>ARACRUZ/ES</a:t>
+                        <a:t>CURITIBA/PR</a:t>
                       </a:r>
                     </a:p>
                   </a:txBody>
@@ -5665,7 +5665,7 @@
                           </a:solidFill>
                           <a:latin typeface="Calibri"/>
                         </a:rPr>
-                        <a:t>28/04/2026</a:t>
+                        <a:t>29/05/2026</a:t>
                       </a:r>
                     </a:p>
                   </a:txBody>
@@ -6011,7 +6011,7 @@
                           </a:solidFill>
                           <a:latin typeface="Calibri"/>
                         </a:rPr>
-                        <a:t>DF</a:t>
+                        <a:t>MG</a:t>
                       </a:r>
                     </a:p>
                   </a:txBody>
@@ -6034,7 +6034,7 @@
                           </a:solidFill>
                           <a:latin typeface="Calibri"/>
                         </a:rPr>
-                        <a:t>24</a:t>
+                        <a:t>27</a:t>
                       </a:r>
                     </a:p>
                   </a:txBody>
@@ -6057,7 +6057,7 @@
                           </a:solidFill>
                           <a:latin typeface="Calibri"/>
                         </a:rPr>
-                        <a:t>24</a:t>
+                        <a:t>26</a:t>
                       </a:r>
                     </a:p>
                   </a:txBody>
@@ -6080,7 +6080,7 @@
                           </a:solidFill>
                           <a:latin typeface="Calibri"/>
                         </a:rPr>
-                        <a:t>0</a:t>
+                        <a:t>1</a:t>
                       </a:r>
                     </a:p>
                   </a:txBody>
@@ -6103,7 +6103,7 @@
                           </a:solidFill>
                           <a:latin typeface="Calibri"/>
                         </a:rPr>
-                        <a:t>100.0%</a:t>
+                        <a:t>96.3%</a:t>
                       </a:r>
                     </a:p>
                   </a:txBody>
@@ -6151,7 +6151,7 @@
                           </a:solidFill>
                           <a:latin typeface="Calibri"/>
                         </a:rPr>
-                        <a:t>RS</a:t>
+                        <a:t>PR</a:t>
                       </a:r>
                     </a:p>
                   </a:txBody>
@@ -6174,7 +6174,7 @@
                           </a:solidFill>
                           <a:latin typeface="Calibri"/>
                         </a:rPr>
-                        <a:t>24</a:t>
+                        <a:t>27</a:t>
                       </a:r>
                     </a:p>
                   </a:txBody>
@@ -6197,7 +6197,7 @@
                           </a:solidFill>
                           <a:latin typeface="Calibri"/>
                         </a:rPr>
-                        <a:t>24</a:t>
+                        <a:t>26</a:t>
                       </a:r>
                     </a:p>
                   </a:txBody>
@@ -6220,7 +6220,7 @@
                           </a:solidFill>
                           <a:latin typeface="Calibri"/>
                         </a:rPr>
-                        <a:t>0</a:t>
+                        <a:t>1</a:t>
                       </a:r>
                     </a:p>
                   </a:txBody>
@@ -6243,7 +6243,7 @@
                           </a:solidFill>
                           <a:latin typeface="Calibri"/>
                         </a:rPr>
-                        <a:t>100.0%</a:t>
+                        <a:t>96.3%</a:t>
                       </a:r>
                     </a:p>
                   </a:txBody>
@@ -6291,7 +6291,7 @@
                           </a:solidFill>
                           <a:latin typeface="Calibri"/>
                         </a:rPr>
-                        <a:t>MG</a:t>
+                        <a:t>RS</a:t>
                       </a:r>
                     </a:p>
                   </a:txBody>
@@ -6314,7 +6314,7 @@
                           </a:solidFill>
                           <a:latin typeface="Calibri"/>
                         </a:rPr>
-                        <a:t>16</a:t>
+                        <a:t>23</a:t>
                       </a:r>
                     </a:p>
                   </a:txBody>
@@ -6337,7 +6337,7 @@
                           </a:solidFill>
                           <a:latin typeface="Calibri"/>
                         </a:rPr>
-                        <a:t>16</a:t>
+                        <a:t>23</a:t>
                       </a:r>
                     </a:p>
                   </a:txBody>
@@ -6431,7 +6431,7 @@
                           </a:solidFill>
                           <a:latin typeface="Calibri"/>
                         </a:rPr>
-                        <a:t>PR</a:t>
+                        <a:t>SC</a:t>
                       </a:r>
                     </a:p>
                   </a:txBody>
@@ -6454,7 +6454,7 @@
                           </a:solidFill>
                           <a:latin typeface="Calibri"/>
                         </a:rPr>
-                        <a:t>15</a:t>
+                        <a:t>16</a:t>
                       </a:r>
                     </a:p>
                   </a:txBody>
@@ -6477,7 +6477,7 @@
                           </a:solidFill>
                           <a:latin typeface="Calibri"/>
                         </a:rPr>
-                        <a:t>15</a:t>
+                        <a:t>16</a:t>
                       </a:r>
                     </a:p>
                   </a:txBody>
@@ -6571,7 +6571,7 @@
                           </a:solidFill>
                           <a:latin typeface="Calibri"/>
                         </a:rPr>
-                        <a:t>MT</a:t>
+                        <a:t>DF</a:t>
                       </a:r>
                     </a:p>
                   </a:txBody>
@@ -6711,7 +6711,7 @@
                           </a:solidFill>
                           <a:latin typeface="Calibri"/>
                         </a:rPr>
-                        <a:t>ES</a:t>
+                        <a:t>MS</a:t>
                       </a:r>
                     </a:p>
                   </a:txBody>
@@ -6757,7 +6757,7 @@
                           </a:solidFill>
                           <a:latin typeface="Calibri"/>
                         </a:rPr>
-                        <a:t>8</a:t>
+                        <a:t>10</a:t>
                       </a:r>
                     </a:p>
                   </a:txBody>
@@ -6780,7 +6780,7 @@
                           </a:solidFill>
                           <a:latin typeface="Calibri"/>
                         </a:rPr>
-                        <a:t>2</a:t>
+                        <a:t>0</a:t>
                       </a:r>
                     </a:p>
                   </a:txBody>
@@ -6803,7 +6803,7 @@
                           </a:solidFill>
                           <a:latin typeface="Calibri"/>
                         </a:rPr>
-                        <a:t>80.0%</a:t>
+                        <a:t>100.0%</a:t>
                       </a:r>
                     </a:p>
                   </a:txBody>
@@ -6826,7 +6826,7 @@
                           </a:solidFill>
                           <a:latin typeface="Calibri"/>
                         </a:rPr>
-                        <a:t>Atencao</a:t>
+                        <a:t>Excelente</a:t>
                       </a:r>
                     </a:p>
                   </a:txBody>
@@ -6851,7 +6851,7 @@
                           </a:solidFill>
                           <a:latin typeface="Calibri"/>
                         </a:rPr>
-                        <a:t>SC</a:t>
+                        <a:t>MT</a:t>
                       </a:r>
                     </a:p>
                   </a:txBody>
@@ -6874,7 +6874,7 @@
                           </a:solidFill>
                           <a:latin typeface="Calibri"/>
                         </a:rPr>
-                        <a:t>9</a:t>
+                        <a:t>8</a:t>
                       </a:r>
                     </a:p>
                   </a:txBody>
@@ -6897,7 +6897,7 @@
                           </a:solidFill>
                           <a:latin typeface="Calibri"/>
                         </a:rPr>
-                        <a:t>9</a:t>
+                        <a:t>8</a:t>
                       </a:r>
                     </a:p>
                   </a:txBody>
@@ -7014,7 +7014,7 @@
                           </a:solidFill>
                           <a:latin typeface="Calibri"/>
                         </a:rPr>
-                        <a:t>6</a:t>
+                        <a:t>5</a:t>
                       </a:r>
                     </a:p>
                   </a:txBody>
@@ -7037,7 +7037,7 @@
                           </a:solidFill>
                           <a:latin typeface="Calibri"/>
                         </a:rPr>
-                        <a:t>6</a:t>
+                        <a:t>5</a:t>
                       </a:r>
                     </a:p>
                   </a:txBody>
@@ -7131,7 +7131,7 @@
                           </a:solidFill>
                           <a:latin typeface="Calibri"/>
                         </a:rPr>
-                        <a:t>MS</a:t>
+                        <a:t>ES</a:t>
                       </a:r>
                     </a:p>
                   </a:txBody>
@@ -7154,7 +7154,7 @@
                           </a:solidFill>
                           <a:latin typeface="Calibri"/>
                         </a:rPr>
-                        <a:t>5</a:t>
+                        <a:t>4</a:t>
                       </a:r>
                     </a:p>
                   </a:txBody>
@@ -7177,7 +7177,7 @@
                           </a:solidFill>
                           <a:latin typeface="Calibri"/>
                         </a:rPr>
-                        <a:t>5</a:t>
+                        <a:t>4</a:t>
                       </a:r>
                     </a:p>
                   </a:txBody>
@@ -7341,7 +7341,7 @@
                 </a:solidFill>
                 <a:latin typeface="Calibri"/>
               </a:rPr>
-              <a:t>TOP DESTINATARIOS (61 pontos)</a:t>
+              <a:t>TOP DESTINATARIOS (82 pontos)</a:t>
             </a:r>
           </a:p>
         </p:txBody>
@@ -7616,7 +7616,7 @@
                           </a:solidFill>
                           <a:latin typeface="Calibri"/>
                         </a:rPr>
-                        <a:t>RI HAPPY BRINQUEDOS - BRASILIA / DF</a:t>
+                        <a:t>RI HAPPY BRINQUEDOS - BELO HORIZONTE / MG</a:t>
                       </a:r>
                     </a:p>
                   </a:txBody>
@@ -7639,7 +7639,7 @@
                           </a:solidFill>
                           <a:latin typeface="Calibri"/>
                         </a:rPr>
-                        <a:t>10</a:t>
+                        <a:t>6</a:t>
                       </a:r>
                     </a:p>
                   </a:txBody>
@@ -7662,7 +7662,7 @@
                           </a:solidFill>
                           <a:latin typeface="Calibri"/>
                         </a:rPr>
-                        <a:t>10</a:t>
+                        <a:t>5</a:t>
                       </a:r>
                     </a:p>
                   </a:txBody>
@@ -7685,7 +7685,7 @@
                           </a:solidFill>
                           <a:latin typeface="Calibri"/>
                         </a:rPr>
-                        <a:t>0</a:t>
+                        <a:t>1</a:t>
                       </a:r>
                     </a:p>
                   </a:txBody>
@@ -7708,7 +7708,7 @@
                           </a:solidFill>
                           <a:latin typeface="Calibri"/>
                         </a:rPr>
-                        <a:t>100.0%</a:t>
+                        <a:t>83.3%</a:t>
                       </a:r>
                     </a:p>
                   </a:txBody>
@@ -7731,7 +7731,7 @@
                           </a:solidFill>
                           <a:latin typeface="Calibri"/>
                         </a:rPr>
-                        <a:t>Excelente</a:t>
+                        <a:t>Atencao</a:t>
                       </a:r>
                     </a:p>
                   </a:txBody>
@@ -7779,7 +7779,7 @@
                           </a:solidFill>
                           <a:latin typeface="Calibri"/>
                         </a:rPr>
-                        <a:t>DEYCON COM E DISTRIB - VARZEA GRANDE / MT</a:t>
+                        <a:t>MATTEL DO BRASIL LTD - NAVEGANTES / SC</a:t>
                       </a:r>
                     </a:p>
                   </a:txBody>
@@ -7802,7 +7802,7 @@
                           </a:solidFill>
                           <a:latin typeface="Calibri"/>
                         </a:rPr>
-                        <a:t>7</a:t>
+                        <a:t>5</a:t>
                       </a:r>
                     </a:p>
                   </a:txBody>
@@ -7825,7 +7825,7 @@
                           </a:solidFill>
                           <a:latin typeface="Calibri"/>
                         </a:rPr>
-                        <a:t>7</a:t>
+                        <a:t>5</a:t>
                       </a:r>
                     </a:p>
                   </a:txBody>
@@ -7942,7 +7942,7 @@
                           </a:solidFill>
                           <a:latin typeface="Calibri"/>
                         </a:rPr>
-                        <a:t>AMAZONSERVICOS DE VA - BRASILIA / DF</a:t>
+                        <a:t>RI HAPPY BRINQUEDOS - BRASILIA / DF</a:t>
                       </a:r>
                     </a:p>
                   </a:txBody>
@@ -7965,7 +7965,7 @@
                           </a:solidFill>
                           <a:latin typeface="Calibri"/>
                         </a:rPr>
-                        <a:t>7</a:t>
+                        <a:t>5</a:t>
                       </a:r>
                     </a:p>
                   </a:txBody>
@@ -7988,7 +7988,7 @@
                           </a:solidFill>
                           <a:latin typeface="Calibri"/>
                         </a:rPr>
-                        <a:t>7</a:t>
+                        <a:t>5</a:t>
                       </a:r>
                     </a:p>
                   </a:txBody>
@@ -8105,7 +8105,7 @@
                           </a:solidFill>
                           <a:latin typeface="Calibri"/>
                         </a:rPr>
-                        <a:t>DEYCON COM E DISTRIB - IBIPORA / PR</a:t>
+                        <a:t>AMAZONSERVICOS DE VA - BRASILIA / DF</a:t>
                       </a:r>
                     </a:p>
                   </a:txBody>
@@ -8268,7 +8268,7 @@
                           </a:solidFill>
                           <a:latin typeface="Calibri"/>
                         </a:rPr>
-                        <a:t>CIA ZAFFARI COM IND - PORTO ALEGRE / RS</a:t>
+                        <a:t>AMAZON SERVICOS DE V - BETIM / MG</a:t>
                       </a:r>
                     </a:p>
                   </a:txBody>
@@ -8431,7 +8431,7 @@
                           </a:solidFill>
                           <a:latin typeface="Calibri"/>
                         </a:rPr>
-                        <a:t>RI HAPPY BRINQUEDOS - CUIABA / MT</a:t>
+                        <a:t>COMERCIO DE MEDICAME - GRAVATAI / RS</a:t>
                       </a:r>
                     </a:p>
                   </a:txBody>
@@ -8454,7 +8454,7 @@
                           </a:solidFill>
                           <a:latin typeface="Calibri"/>
                         </a:rPr>
-                        <a:t>4</a:t>
+                        <a:t>3</a:t>
                       </a:r>
                     </a:p>
                   </a:txBody>
@@ -8477,7 +8477,7 @@
                           </a:solidFill>
                           <a:latin typeface="Calibri"/>
                         </a:rPr>
-                        <a:t>4</a:t>
+                        <a:t>3</a:t>
                       </a:r>
                     </a:p>
                   </a:txBody>
@@ -8617,7 +8617,7 @@
                           </a:solidFill>
                           <a:latin typeface="Calibri"/>
                         </a:rPr>
-                        <a:t>4</a:t>
+                        <a:t>3</a:t>
                       </a:r>
                     </a:p>
                   </a:txBody>
@@ -8640,7 +8640,7 @@
                           </a:solidFill>
                           <a:latin typeface="Calibri"/>
                         </a:rPr>
-                        <a:t>4</a:t>
+                        <a:t>3</a:t>
                       </a:r>
                     </a:p>
                   </a:txBody>
@@ -8757,7 +8757,7 @@
                           </a:solidFill>
                           <a:latin typeface="Calibri"/>
                         </a:rPr>
-                        <a:t>DEYCON COM E DISTRIB - SAO JOSE DOS PINHAIS / PR</a:t>
+                        <a:t>RI HAPPY BRINQUEDOS - VILA VELHA / ES</a:t>
                       </a:r>
                     </a:p>
                   </a:txBody>
@@ -8780,7 +8780,7 @@
                           </a:solidFill>
                           <a:latin typeface="Calibri"/>
                         </a:rPr>
-                        <a:t>4</a:t>
+                        <a:t>3</a:t>
                       </a:r>
                     </a:p>
                   </a:txBody>
@@ -8803,7 +8803,7 @@
                           </a:solidFill>
                           <a:latin typeface="Calibri"/>
                         </a:rPr>
-                        <a:t>4</a:t>
+                        <a:t>3</a:t>
                       </a:r>
                     </a:p>
                   </a:txBody>
@@ -8920,7 +8920,7 @@
                           </a:solidFill>
                           <a:latin typeface="Calibri"/>
                         </a:rPr>
-                        <a:t>FIORELO PEGORARO COM - JOACABA / SC</a:t>
+                        <a:t>CIA ZAFFARI COM IND - PORTO ALEGRE / RS</a:t>
                       </a:r>
                     </a:p>
                   </a:txBody>
@@ -8943,7 +8943,7 @@
                           </a:solidFill>
                           <a:latin typeface="Calibri"/>
                         </a:rPr>
-                        <a:t>3</a:t>
+                        <a:t>2</a:t>
                       </a:r>
                     </a:p>
                   </a:txBody>
@@ -8966,7 +8966,7 @@
                           </a:solidFill>
                           <a:latin typeface="Calibri"/>
                         </a:rPr>
-                        <a:t>3</a:t>
+                        <a:t>2</a:t>
                       </a:r>
                     </a:p>
                   </a:txBody>
@@ -9083,7 +9083,7 @@
                           </a:solidFill>
                           <a:latin typeface="Calibri"/>
                         </a:rPr>
-                        <a:t>SANTA CRUZ COM ATAC - BRASILIA / DF</a:t>
+                        <a:t>AMAZON SERV VAR DO B - BRASILIA / DF</a:t>
                       </a:r>
                     </a:p>
                   </a:txBody>
@@ -9106,7 +9106,7 @@
                           </a:solidFill>
                           <a:latin typeface="Calibri"/>
                         </a:rPr>
-                        <a:t>3</a:t>
+                        <a:t>2</a:t>
                       </a:r>
                     </a:p>
                   </a:txBody>
@@ -9129,7 +9129,7 @@
                           </a:solidFill>
                           <a:latin typeface="Calibri"/>
                         </a:rPr>
-                        <a:t>3</a:t>
+                        <a:t>2</a:t>
                       </a:r>
                     </a:p>
                   </a:txBody>
@@ -9246,7 +9246,7 @@
                           </a:solidFill>
                           <a:latin typeface="Calibri"/>
                         </a:rPr>
-                        <a:t>AMAZON SERVICOS DE V - BETIM / MG</a:t>
+                        <a:t>GSW UTENSILIOS LTDA - MONTENEGRO / RS</a:t>
                       </a:r>
                     </a:p>
                   </a:txBody>
@@ -9269,7 +9269,7 @@
                           </a:solidFill>
                           <a:latin typeface="Calibri"/>
                         </a:rPr>
-                        <a:t>3</a:t>
+                        <a:t>2</a:t>
                       </a:r>
                     </a:p>
                   </a:txBody>
@@ -9292,7 +9292,7 @@
                           </a:solidFill>
                           <a:latin typeface="Calibri"/>
                         </a:rPr>
-                        <a:t>3</a:t>
+                        <a:t>2</a:t>
                       </a:r>
                     </a:p>
                   </a:txBody>
@@ -9409,7 +9409,7 @@
                           </a:solidFill>
                           <a:latin typeface="Calibri"/>
                         </a:rPr>
-                        <a:t>AMAZON SERVICOS DE V - NOVA SANTA RITA / RS</a:t>
+                        <a:t>PBKIDS BRINQUEDOS LT - UBERLANDIA / MG</a:t>
                       </a:r>
                     </a:p>
                   </a:txBody>
@@ -9432,7 +9432,7 @@
                           </a:solidFill>
                           <a:latin typeface="Calibri"/>
                         </a:rPr>
-                        <a:t>3</a:t>
+                        <a:t>2</a:t>
                       </a:r>
                     </a:p>
                   </a:txBody>
@@ -9455,7 +9455,7 @@
                           </a:solidFill>
                           <a:latin typeface="Calibri"/>
                         </a:rPr>
-                        <a:t>3</a:t>
+                        <a:t>2</a:t>
                       </a:r>
                     </a:p>
                   </a:txBody>
@@ -9572,7 +9572,7 @@
                           </a:solidFill>
                           <a:latin typeface="Calibri"/>
                         </a:rPr>
-                        <a:t>FABIO J R DOS SANTOS - CURITIBA / PR</a:t>
+                        <a:t>PBKIDS BRINQUEDOS LT - BELO HORIZONTE / MG</a:t>
                       </a:r>
                     </a:p>
                   </a:txBody>
@@ -9735,7 +9735,7 @@
                           </a:solidFill>
                           <a:latin typeface="Calibri"/>
                         </a:rPr>
-                        <a:t>MATTEL DO BRASIL LTD - NAVEGANTES / SC</a:t>
+                        <a:t>AMAZON SERVICOS DE V - NOVA SANTA RITA / RS</a:t>
                       </a:r>
                     </a:p>
                   </a:txBody>
